--- a/slides/04-skills-custom-agents.pptx
+++ b/slides/04-skills-custom-agents.pptx
@@ -2210,145 +2210,9 @@
           <a:chExt cx="0" cy="0"/>
         </a:xfrm>
       </p:grpSpPr>
-      <p:sp>
-        <p:nvSpPr>
-          <p:cNvPr id="2" name="Text 0"/>
-          <p:cNvSpPr/>
-          <p:nvPr/>
-        </p:nvSpPr>
-        <p:spPr>
-          <a:xfrm>
-            <a:off x="5968901" y="0"/>
-            <a:ext cx="3174950" cy="5143500"/>
-          </a:xfrm>
-          <a:prstGeom prst="rect">
-            <a:avLst/>
-          </a:prstGeom>
-          <a:solidFill>
-            <a:srgbClr val="1A7F37"/>
-          </a:solidFill>
-          <a:ln/>
-        </p:spPr>
-        <p:txBody>
-          <a:bodyPr wrap="square" rtlCol="0" anchor="ctr"/>
-          <a:lstStyle/>
-          <a:p>
-            <a:pPr indent="0" marL="0">
-              <a:buNone/>
-            </a:pPr>
-            <a:endParaRPr lang="en-US" dirty="0"/>
-          </a:p>
-        </p:txBody>
-      </p:sp>
-      <p:sp>
-        <p:nvSpPr>
-          <p:cNvPr id="3" name="Text 1"/>
-          <p:cNvSpPr/>
-          <p:nvPr/>
-        </p:nvSpPr>
-        <p:spPr>
-          <a:xfrm>
-            <a:off x="5939692" y="1269950"/>
-            <a:ext cx="2979319" cy="2159050"/>
-          </a:xfrm>
-          <a:prstGeom prst="rect">
-            <a:avLst/>
-          </a:prstGeom>
-          <a:noFill/>
-          <a:ln/>
-        </p:spPr>
-        <p:txBody>
-          <a:bodyPr wrap="square" lIns="0" tIns="0" rIns="0" bIns="0" rtlCol="0" anchor="t"/>
-          <a:lstStyle/>
-          <a:p>
-            <a:pPr algn="ctr" indent="0" marL="0">
-              <a:lnSpc>
-                <a:spcPts val="17000"/>
-              </a:lnSpc>
-              <a:buNone/>
-            </a:pPr>
-            <a:r>
-              <a:rPr lang="en-US" sz="15000" b="1" dirty="0">
-                <a:solidFill>
-                  <a:srgbClr val="2DA44E"/>
-                </a:solidFill>
-                <a:latin typeface="Arial" pitchFamily="34" charset="0"/>
-                <a:ea typeface="Arial" pitchFamily="34" charset="-122"/>
-                <a:cs typeface="Arial" pitchFamily="34" charset="-120"/>
-              </a:rPr>
-              <a:t>04</a:t>
-            </a:r>
-            <a:endParaRPr lang="en-US" sz="15000" dirty="0"/>
-          </a:p>
-        </p:txBody>
-      </p:sp>
-      <p:sp>
-        <p:nvSpPr>
-          <p:cNvPr id="4" name="Text 2"/>
-          <p:cNvSpPr/>
-          <p:nvPr/>
-        </p:nvSpPr>
-        <p:spPr>
-          <a:xfrm>
-            <a:off x="6069330" y="3682901"/>
-            <a:ext cx="2720340" cy="431899"/>
-          </a:xfrm>
-          <a:prstGeom prst="rect">
-            <a:avLst/>
-          </a:prstGeom>
-          <a:noFill/>
-          <a:ln/>
-        </p:spPr>
-        <p:txBody>
-          <a:bodyPr wrap="square" lIns="0" tIns="0" rIns="0" bIns="0" rtlCol="0" anchor="t"/>
-          <a:lstStyle/>
-          <a:p>
-            <a:pPr algn="ctr" indent="0" marL="0">
-              <a:lnSpc>
-                <a:spcPts val="1700"/>
-              </a:lnSpc>
-              <a:buNone/>
-            </a:pPr>
-            <a:r>
-              <a:rPr lang="en-US" sz="1350" dirty="0">
-                <a:solidFill>
-                  <a:srgbClr val="FFFFFF"/>
-                </a:solidFill>
-                <a:latin typeface="Arial" pitchFamily="34" charset="0"/>
-                <a:ea typeface="Arial" pitchFamily="34" charset="-122"/>
-                <a:cs typeface="Arial" pitchFamily="34" charset="-120"/>
-              </a:rPr>
-              <a:t>GITHUB COPILOT APP</a:t>
-            </a:r>
-            <a:endParaRPr lang="en-US" sz="1350" dirty="0"/>
-          </a:p>
-          <a:p>
-            <a:pPr algn="ctr" indent="0" marL="0">
-              <a:lnSpc>
-                <a:spcPts val="1700"/>
-              </a:lnSpc>
-              <a:buNone/>
-            </a:pPr>
-            <a:r>
-              <a:rPr lang="en-US" sz="1350" dirty="0">
-                <a:solidFill>
-                  <a:srgbClr val="FFFFFF"/>
-                </a:solidFill>
-                <a:latin typeface="Arial" pitchFamily="34" charset="0"/>
-                <a:ea typeface="Arial" pitchFamily="34" charset="-122"/>
-                <a:cs typeface="Arial" pitchFamily="34" charset="-120"/>
-              </a:rPr>
-              <a:t>FOR BEGINNERS</a:t>
-            </a:r>
-            <a:endParaRPr lang="en-US" sz="1350" dirty="0"/>
-          </a:p>
-        </p:txBody>
-      </p:sp>
       <p:pic>
         <p:nvPicPr>
-          <p:cNvPr id="5" name="Image 0" descr="/Users/danwahlin/.copilot/session-state/56a7a0da-def8-48d4-b5e8-0ac3878cb8dd/files/slides-build/icons/FaGithub-FFFFFF.png">
-            <a:hlinkClick r:id="rId2" tooltip="https://github.com/github/copilot-app-for-beginners/tree/main/04-skills-custom-agents"/>
-          </p:cNvPr>
+          <p:cNvPr id="2" name="Image 0" descr="/Users/danwahlin/.copilot/session-state/56a7a0da-def8-48d4-b5e8-0ac3878cb8dd/files/slides-build/img/grad-title.jpg">    </p:cNvPr>
           <p:cNvPicPr>
             <a:picLocks noChangeAspect="1"/>
           </p:cNvPicPr>
@@ -2362,6 +2226,32 @@
         </p:blipFill>
         <p:spPr>
           <a:xfrm>
+            <a:off x="0" y="0"/>
+            <a:ext cx="9144000" cy="5143500"/>
+          </a:xfrm>
+          <a:prstGeom prst="rect">
+            <a:avLst/>
+          </a:prstGeom>
+        </p:spPr>
+      </p:pic>
+      <p:pic>
+        <p:nvPicPr>
+          <p:cNvPr id="3" name="Image 1" descr="/Users/danwahlin/.copilot/session-state/56a7a0da-def8-48d4-b5e8-0ac3878cb8dd/files/slides-build/icons/FaGithub-1F2328.png">
+            <a:hlinkClick r:id="rId3" tooltip="https://github.com/github/copilot-app-for-beginners/tree/main/04-skills-custom-agents"/>
+          </p:cNvPr>
+          <p:cNvPicPr>
+            <a:picLocks noChangeAspect="1"/>
+          </p:cNvPicPr>
+          <p:nvPr/>
+        </p:nvPicPr>
+        <p:blipFill>
+          <a:blip r:embed="rId2"/>
+          <a:stretch>
+            <a:fillRect/>
+          </a:stretch>
+        </p:blipFill>
+        <p:spPr>
+          <a:xfrm>
             <a:off x="8635901" y="203150"/>
             <a:ext cx="304800" cy="304800"/>
           </a:xfrm>
@@ -2372,14 +2262,14 @@
       </p:pic>
       <p:sp>
         <p:nvSpPr>
-          <p:cNvPr id="6" name="Text 3"/>
-          <p:cNvSpPr/>
-          <p:nvPr/>
-        </p:nvSpPr>
-        <p:spPr>
-          <a:xfrm>
-            <a:off x="609600" y="1076325"/>
-            <a:ext cx="5052060" cy="209550"/>
+          <p:cNvPr id="4" name="Text 0"/>
+          <p:cNvSpPr/>
+          <p:nvPr/>
+        </p:nvSpPr>
+        <p:spPr>
+          <a:xfrm>
+            <a:off x="1015901" y="823913"/>
+            <a:ext cx="6088279" cy="209550"/>
           </a:xfrm>
           <a:prstGeom prst="rect">
             <a:avLst/>
@@ -2411,14 +2301,14 @@
       </p:sp>
       <p:sp>
         <p:nvSpPr>
-          <p:cNvPr id="7" name="Text 4"/>
-          <p:cNvSpPr/>
-          <p:nvPr/>
-        </p:nvSpPr>
-        <p:spPr>
-          <a:xfrm>
-            <a:off x="609600" y="1387376"/>
-            <a:ext cx="5052060" cy="1168301"/>
+          <p:cNvPr id="5" name="Text 1"/>
+          <p:cNvSpPr/>
+          <p:nvPr/>
+        </p:nvSpPr>
+        <p:spPr>
+          <a:xfrm>
+            <a:off x="1015901" y="1134963"/>
+            <a:ext cx="6088279" cy="1219200"/>
           </a:xfrm>
           <a:prstGeom prst="rect">
             <a:avLst/>
@@ -2432,7 +2322,7 @@
           <a:p>
             <a:pPr algn="l" indent="0" marL="0">
               <a:lnSpc>
-                <a:spcPts val="4600"/>
+                <a:spcPts val="4800"/>
               </a:lnSpc>
               <a:spcBef>
                 <a:spcPts val="800"/>
@@ -2440,7 +2330,7 @@
               <a:buNone/>
             </a:pPr>
             <a:r>
-              <a:rPr lang="en-US" sz="4000" b="1" dirty="0">
+              <a:rPr lang="en-US" sz="4200" b="1" dirty="0">
                 <a:solidFill>
                   <a:srgbClr val="1F2328"/>
                 </a:solidFill>
@@ -2450,19 +2340,19 @@
               </a:rPr>
               <a:t>Skills and Custom Agents</a:t>
             </a:r>
-            <a:endParaRPr lang="en-US" sz="4000" dirty="0"/>
-          </a:p>
-        </p:txBody>
-      </p:sp>
-      <p:sp>
-        <p:nvSpPr>
-          <p:cNvPr id="8" name="Text 5"/>
-          <p:cNvSpPr/>
-          <p:nvPr/>
-        </p:nvSpPr>
-        <p:spPr>
-          <a:xfrm>
-            <a:off x="609600" y="2784277"/>
+            <a:endParaRPr lang="en-US" sz="4200" dirty="0"/>
+          </a:p>
+        </p:txBody>
+      </p:sp>
+      <p:sp>
+        <p:nvSpPr>
+          <p:cNvPr id="6" name="Text 2"/>
+          <p:cNvSpPr/>
+          <p:nvPr/>
+        </p:nvSpPr>
+        <p:spPr>
+          <a:xfrm>
+            <a:off x="1015901" y="2582763"/>
             <a:ext cx="609600" cy="63401"/>
           </a:xfrm>
           <a:prstGeom prst="roundRect">
@@ -2488,14 +2378,14 @@
       </p:sp>
       <p:sp>
         <p:nvSpPr>
-          <p:cNvPr id="9" name="Text 6"/>
-          <p:cNvSpPr/>
-          <p:nvPr/>
-        </p:nvSpPr>
-        <p:spPr>
-          <a:xfrm>
-            <a:off x="609600" y="3076277"/>
-            <a:ext cx="5052060" cy="990749"/>
+          <p:cNvPr id="7" name="Text 3"/>
+          <p:cNvSpPr/>
+          <p:nvPr/>
+        </p:nvSpPr>
+        <p:spPr>
+          <a:xfrm>
+            <a:off x="1015901" y="2874764"/>
+            <a:ext cx="6088279" cy="990749"/>
           </a:xfrm>
           <a:prstGeom prst="rect">
             <a:avLst/>
@@ -2530,21 +2420,21 @@
       </p:sp>
       <p:pic>
         <p:nvPicPr>
-          <p:cNvPr id="10" name="Image 1" descr="/Users/danwahlin/.copilot/session-state/56a7a0da-def8-48d4-b5e8-0ac3878cb8dd/files/slides-build/icons/FaGithub-0969DA.png">    </p:cNvPr>
+          <p:cNvPr id="8" name="Image 2" descr="/Users/danwahlin/.copilot/session-state/56a7a0da-def8-48d4-b5e8-0ac3878cb8dd/files/slides-build/icons/FaGithub-0969DA.png">    </p:cNvPr>
           <p:cNvPicPr>
             <a:picLocks noChangeAspect="1"/>
           </p:cNvPicPr>
           <p:nvPr/>
         </p:nvPicPr>
         <p:blipFill>
-          <a:blip r:embed="rId3"/>
+          <a:blip r:embed="rId4"/>
           <a:stretch>
             <a:fillRect/>
           </a:stretch>
         </p:blipFill>
         <p:spPr>
           <a:xfrm>
-            <a:off x="609600" y="4354562"/>
+            <a:off x="1015901" y="4130576"/>
             <a:ext cx="177701" cy="177701"/>
           </a:xfrm>
           <a:prstGeom prst="rect">
@@ -2554,13 +2444,13 @@
       </p:pic>
       <p:sp>
         <p:nvSpPr>
-          <p:cNvPr id="11" name="Text 7"/>
-          <p:cNvSpPr/>
-          <p:nvPr/>
-        </p:nvSpPr>
-        <p:spPr>
-          <a:xfrm>
-            <a:off x="876151" y="4343400"/>
+          <p:cNvPr id="9" name="Text 4"/>
+          <p:cNvSpPr/>
+          <p:nvPr/>
+        </p:nvSpPr>
+        <p:spPr>
+          <a:xfrm>
+            <a:off x="1282452" y="4119414"/>
             <a:ext cx="3373252" cy="200025"/>
           </a:xfrm>
           <a:prstGeom prst="rect">
@@ -2584,7 +2474,7 @@
                 <a:latin typeface="Arial" pitchFamily="34" charset="0"/>
                 <a:ea typeface="Arial" pitchFamily="34" charset="-122"/>
                 <a:cs typeface="Arial" pitchFamily="34" charset="-120"/>
-                <a:hlinkClick r:id="rId4" invalidUrl="" action="" tgtFrame="" tooltip="https://github.com/github/copilot-app-for-beginners/tree/main/04-skills-custom-agents" history="1" highlightClick="0" endSnd="0">
+                <a:hlinkClick r:id="rId5" invalidUrl="" action="" tgtFrame="" tooltip="https://github.com/github/copilot-app-for-beginners/tree/main/04-skills-custom-agents" history="1" highlightClick="0" endSnd="0">
                   <a:extLst>
                     <a:ext uri="{A12FA001-AC4F-418D-AE19-62706E023703}">
                       <ahyp:hlinkClr xmlns:ahyp="http://schemas.microsoft.com/office/drawing/2018/hyperlinkcolor" val="tx"/>
@@ -2732,82 +2622,9 @@
           </a:p>
         </p:txBody>
       </p:sp>
-      <p:sp>
-        <p:nvSpPr>
-          <p:cNvPr id="5" name="Text 3"/>
-          <p:cNvSpPr/>
-          <p:nvPr/>
-        </p:nvSpPr>
-        <p:spPr>
-          <a:xfrm>
-            <a:off x="7340501" y="177701"/>
-            <a:ext cx="1168301" cy="279350"/>
-          </a:xfrm>
-          <a:prstGeom prst="roundRect">
-            <a:avLst>
-              <a:gd name="adj" fmla="val 22731"/>
-            </a:avLst>
-          </a:prstGeom>
-          <a:solidFill>
-            <a:srgbClr val="1A7F37"/>
-          </a:solidFill>
-          <a:ln/>
-        </p:spPr>
-        <p:txBody>
-          <a:bodyPr wrap="square" rtlCol="0" anchor="ctr"/>
-          <a:lstStyle/>
-          <a:p>
-            <a:pPr indent="0" marL="0">
-              <a:buNone/>
-            </a:pPr>
-            <a:endParaRPr lang="en-US" dirty="0"/>
-          </a:p>
-        </p:txBody>
-      </p:sp>
-      <p:sp>
-        <p:nvSpPr>
-          <p:cNvPr id="6" name="Text 4"/>
-          <p:cNvSpPr/>
-          <p:nvPr/>
-        </p:nvSpPr>
-        <p:spPr>
-          <a:xfrm>
-            <a:off x="7461041" y="231577"/>
-            <a:ext cx="927071" cy="171450"/>
-          </a:xfrm>
-          <a:prstGeom prst="rect">
-            <a:avLst/>
-          </a:prstGeom>
-          <a:noFill/>
-          <a:ln/>
-        </p:spPr>
-        <p:txBody>
-          <a:bodyPr wrap="square" lIns="0" tIns="0" rIns="0" bIns="0" rtlCol="0" anchor="t"/>
-          <a:lstStyle/>
-          <a:p>
-            <a:pPr algn="ctr" indent="0" marL="0">
-              <a:buNone/>
-            </a:pPr>
-            <a:r>
-              <a:rPr lang="en-US" sz="1150" b="1" dirty="0">
-                <a:solidFill>
-                  <a:srgbClr val="FFFFFF"/>
-                </a:solidFill>
-                <a:latin typeface="Arial" pitchFamily="34" charset="0"/>
-                <a:ea typeface="Arial" pitchFamily="34" charset="-122"/>
-                <a:cs typeface="Arial" pitchFamily="34" charset="-120"/>
-              </a:rPr>
-              <a:t>CHAPTER 04</a:t>
-            </a:r>
-            <a:endParaRPr lang="en-US" sz="1150" dirty="0"/>
-          </a:p>
-        </p:txBody>
-      </p:sp>
       <p:pic>
         <p:nvPicPr>
-          <p:cNvPr id="7" name="Image 0" descr="/Users/danwahlin/.copilot/session-state/56a7a0da-def8-48d4-b5e8-0ac3878cb8dd/files/slides-build/icons/FaGithub-1F2328.png">
-            <a:hlinkClick r:id="rId2" tooltip="https://github.com/github/copilot-app-for-beginners/tree/main/04-skills-custom-agents"/>
-          </p:cNvPr>
+          <p:cNvPr id="5" name="Image 0" descr="/Users/danwahlin/.copilot/session-state/56a7a0da-def8-48d4-b5e8-0ac3878cb8dd/files/slides-build/img/grad-corner.png">    </p:cNvPr>
           <p:cNvPicPr>
             <a:picLocks noChangeAspect="1"/>
           </p:cNvPicPr>
@@ -2821,6 +2638,103 @@
         </p:blipFill>
         <p:spPr>
           <a:xfrm>
+            <a:off x="6349901" y="0"/>
+            <a:ext cx="2793950" cy="1308050"/>
+          </a:xfrm>
+          <a:prstGeom prst="rect">
+            <a:avLst/>
+          </a:prstGeom>
+        </p:spPr>
+      </p:pic>
+      <p:sp>
+        <p:nvSpPr>
+          <p:cNvPr id="6" name="Text 3"/>
+          <p:cNvSpPr/>
+          <p:nvPr/>
+        </p:nvSpPr>
+        <p:spPr>
+          <a:xfrm>
+            <a:off x="7340501" y="177701"/>
+            <a:ext cx="1168301" cy="279350"/>
+          </a:xfrm>
+          <a:prstGeom prst="roundRect">
+            <a:avLst>
+              <a:gd name="adj" fmla="val 22731"/>
+            </a:avLst>
+          </a:prstGeom>
+          <a:solidFill>
+            <a:srgbClr val="1A7F37"/>
+          </a:solidFill>
+          <a:ln/>
+        </p:spPr>
+        <p:txBody>
+          <a:bodyPr wrap="square" rtlCol="0" anchor="ctr"/>
+          <a:lstStyle/>
+          <a:p>
+            <a:pPr indent="0" marL="0">
+              <a:buNone/>
+            </a:pPr>
+            <a:endParaRPr lang="en-US" dirty="0"/>
+          </a:p>
+        </p:txBody>
+      </p:sp>
+      <p:sp>
+        <p:nvSpPr>
+          <p:cNvPr id="7" name="Text 4"/>
+          <p:cNvSpPr/>
+          <p:nvPr/>
+        </p:nvSpPr>
+        <p:spPr>
+          <a:xfrm>
+            <a:off x="7461041" y="231577"/>
+            <a:ext cx="927071" cy="171450"/>
+          </a:xfrm>
+          <a:prstGeom prst="rect">
+            <a:avLst/>
+          </a:prstGeom>
+          <a:noFill/>
+          <a:ln/>
+        </p:spPr>
+        <p:txBody>
+          <a:bodyPr wrap="square" lIns="0" tIns="0" rIns="0" bIns="0" rtlCol="0" anchor="t"/>
+          <a:lstStyle/>
+          <a:p>
+            <a:pPr algn="ctr" indent="0" marL="0">
+              <a:buNone/>
+            </a:pPr>
+            <a:r>
+              <a:rPr lang="en-US" sz="1150" b="1" dirty="0">
+                <a:solidFill>
+                  <a:srgbClr val="FFFFFF"/>
+                </a:solidFill>
+                <a:latin typeface="Arial" pitchFamily="34" charset="0"/>
+                <a:ea typeface="Arial" pitchFamily="34" charset="-122"/>
+                <a:cs typeface="Arial" pitchFamily="34" charset="-120"/>
+              </a:rPr>
+              <a:t>CHAPTER 04</a:t>
+            </a:r>
+            <a:endParaRPr lang="en-US" sz="1150" dirty="0"/>
+          </a:p>
+        </p:txBody>
+      </p:sp>
+      <p:pic>
+        <p:nvPicPr>
+          <p:cNvPr id="8" name="Image 1" descr="/Users/danwahlin/.copilot/session-state/56a7a0da-def8-48d4-b5e8-0ac3878cb8dd/files/slides-build/icons/FaGithub-1F2328.png">
+            <a:hlinkClick r:id="rId3" tooltip="https://github.com/github/copilot-app-for-beginners/tree/main/04-skills-custom-agents"/>
+          </p:cNvPr>
+          <p:cNvPicPr>
+            <a:picLocks noChangeAspect="1"/>
+          </p:cNvPicPr>
+          <p:nvPr/>
+        </p:nvPicPr>
+        <p:blipFill>
+          <a:blip r:embed="rId2"/>
+          <a:stretch>
+            <a:fillRect/>
+          </a:stretch>
+        </p:blipFill>
+        <p:spPr>
+          <a:xfrm>
             <a:off x="8610600" y="165050"/>
             <a:ext cx="304800" cy="304800"/>
           </a:xfrm>
@@ -2831,7 +2745,7 @@
       </p:pic>
       <p:sp>
         <p:nvSpPr>
-          <p:cNvPr id="8" name="Text 5"/>
+          <p:cNvPr id="9" name="Text 5"/>
           <p:cNvSpPr/>
           <p:nvPr/>
         </p:nvSpPr>
@@ -2870,7 +2784,7 @@
       </p:sp>
       <p:sp>
         <p:nvSpPr>
-          <p:cNvPr id="9" name="Text 6"/>
+          <p:cNvPr id="10" name="Text 6"/>
           <p:cNvSpPr/>
           <p:nvPr/>
         </p:nvSpPr>
@@ -2915,7 +2829,7 @@
       </p:sp>
       <p:sp>
         <p:nvSpPr>
-          <p:cNvPr id="10" name="Text 7"/>
+          <p:cNvPr id="11" name="Text 7"/>
           <p:cNvSpPr/>
           <p:nvPr/>
         </p:nvSpPr>
@@ -2947,7 +2861,7 @@
       </p:sp>
       <p:sp>
         <p:nvSpPr>
-          <p:cNvPr id="11" name="Text 8"/>
+          <p:cNvPr id="12" name="Text 8"/>
           <p:cNvSpPr/>
           <p:nvPr/>
         </p:nvSpPr>
@@ -3019,112 +2933,9 @@
           <a:chExt cx="0" cy="0"/>
         </a:xfrm>
       </p:grpSpPr>
-      <p:sp>
-        <p:nvSpPr>
-          <p:cNvPr id="2" name="Text 0"/>
-          <p:cNvSpPr/>
-          <p:nvPr/>
-        </p:nvSpPr>
-        <p:spPr>
-          <a:xfrm>
-            <a:off x="0" y="0"/>
-            <a:ext cx="9144000" cy="76200"/>
-          </a:xfrm>
-          <a:prstGeom prst="rect">
-            <a:avLst/>
-          </a:prstGeom>
-          <a:solidFill>
-            <a:srgbClr val="9A6700"/>
-          </a:solidFill>
-          <a:ln/>
-        </p:spPr>
-        <p:txBody>
-          <a:bodyPr wrap="square" rtlCol="0" anchor="ctr"/>
-          <a:lstStyle/>
-          <a:p>
-            <a:pPr indent="0" marL="0">
-              <a:buNone/>
-            </a:pPr>
-            <a:endParaRPr lang="en-US" dirty="0"/>
-          </a:p>
-        </p:txBody>
-      </p:sp>
-      <p:sp>
-        <p:nvSpPr>
-          <p:cNvPr id="3" name="Text 1"/>
-          <p:cNvSpPr/>
-          <p:nvPr/>
-        </p:nvSpPr>
-        <p:spPr>
-          <a:xfrm>
-            <a:off x="7340501" y="177701"/>
-            <a:ext cx="1168301" cy="279350"/>
-          </a:xfrm>
-          <a:prstGeom prst="roundRect">
-            <a:avLst>
-              <a:gd name="adj" fmla="val 22731"/>
-            </a:avLst>
-          </a:prstGeom>
-          <a:solidFill>
-            <a:srgbClr val="1A7F37"/>
-          </a:solidFill>
-          <a:ln/>
-        </p:spPr>
-        <p:txBody>
-          <a:bodyPr wrap="square" rtlCol="0" anchor="ctr"/>
-          <a:lstStyle/>
-          <a:p>
-            <a:pPr indent="0" marL="0">
-              <a:buNone/>
-            </a:pPr>
-            <a:endParaRPr lang="en-US" dirty="0"/>
-          </a:p>
-        </p:txBody>
-      </p:sp>
-      <p:sp>
-        <p:nvSpPr>
-          <p:cNvPr id="4" name="Text 2"/>
-          <p:cNvSpPr/>
-          <p:nvPr/>
-        </p:nvSpPr>
-        <p:spPr>
-          <a:xfrm>
-            <a:off x="7461041" y="231577"/>
-            <a:ext cx="927071" cy="171450"/>
-          </a:xfrm>
-          <a:prstGeom prst="rect">
-            <a:avLst/>
-          </a:prstGeom>
-          <a:noFill/>
-          <a:ln/>
-        </p:spPr>
-        <p:txBody>
-          <a:bodyPr wrap="square" lIns="0" tIns="0" rIns="0" bIns="0" rtlCol="0" anchor="t"/>
-          <a:lstStyle/>
-          <a:p>
-            <a:pPr algn="ctr" indent="0" marL="0">
-              <a:buNone/>
-            </a:pPr>
-            <a:r>
-              <a:rPr lang="en-US" sz="1150" b="1" dirty="0">
-                <a:solidFill>
-                  <a:srgbClr val="FFFFFF"/>
-                </a:solidFill>
-                <a:latin typeface="Arial" pitchFamily="34" charset="0"/>
-                <a:ea typeface="Arial" pitchFamily="34" charset="-122"/>
-                <a:cs typeface="Arial" pitchFamily="34" charset="-120"/>
-              </a:rPr>
-              <a:t>CHAPTER 04</a:t>
-            </a:r>
-            <a:endParaRPr lang="en-US" sz="1150" dirty="0"/>
-          </a:p>
-        </p:txBody>
-      </p:sp>
       <p:pic>
         <p:nvPicPr>
-          <p:cNvPr id="5" name="Image 0" descr="/Users/danwahlin/.copilot/session-state/56a7a0da-def8-48d4-b5e8-0ac3878cb8dd/files/slides-build/icons/FaGithub-1F2328.png">
-            <a:hlinkClick r:id="rId2" tooltip="https://github.com/github/copilot-app-for-beginners/tree/main/04-skills-custom-agents"/>
-          </p:cNvPr>
+          <p:cNvPr id="2" name="Image 0" descr="/Users/danwahlin/.copilot/session-state/56a7a0da-def8-48d4-b5e8-0ac3878cb8dd/files/slides-build/img/grad-corner.png">    </p:cNvPr>
           <p:cNvPicPr>
             <a:picLocks noChangeAspect="1"/>
           </p:cNvPicPr>
@@ -3138,6 +2949,103 @@
         </p:blipFill>
         <p:spPr>
           <a:xfrm>
+            <a:off x="6349901" y="0"/>
+            <a:ext cx="2793950" cy="1308050"/>
+          </a:xfrm>
+          <a:prstGeom prst="rect">
+            <a:avLst/>
+          </a:prstGeom>
+        </p:spPr>
+      </p:pic>
+      <p:sp>
+        <p:nvSpPr>
+          <p:cNvPr id="3" name="Text 0"/>
+          <p:cNvSpPr/>
+          <p:nvPr/>
+        </p:nvSpPr>
+        <p:spPr>
+          <a:xfrm>
+            <a:off x="7340501" y="177701"/>
+            <a:ext cx="1168301" cy="279350"/>
+          </a:xfrm>
+          <a:prstGeom prst="roundRect">
+            <a:avLst>
+              <a:gd name="adj" fmla="val 22731"/>
+            </a:avLst>
+          </a:prstGeom>
+          <a:solidFill>
+            <a:srgbClr val="1A7F37"/>
+          </a:solidFill>
+          <a:ln/>
+        </p:spPr>
+        <p:txBody>
+          <a:bodyPr wrap="square" rtlCol="0" anchor="ctr"/>
+          <a:lstStyle/>
+          <a:p>
+            <a:pPr indent="0" marL="0">
+              <a:buNone/>
+            </a:pPr>
+            <a:endParaRPr lang="en-US" dirty="0"/>
+          </a:p>
+        </p:txBody>
+      </p:sp>
+      <p:sp>
+        <p:nvSpPr>
+          <p:cNvPr id="4" name="Text 1"/>
+          <p:cNvSpPr/>
+          <p:nvPr/>
+        </p:nvSpPr>
+        <p:spPr>
+          <a:xfrm>
+            <a:off x="7461041" y="231577"/>
+            <a:ext cx="927071" cy="171450"/>
+          </a:xfrm>
+          <a:prstGeom prst="rect">
+            <a:avLst/>
+          </a:prstGeom>
+          <a:noFill/>
+          <a:ln/>
+        </p:spPr>
+        <p:txBody>
+          <a:bodyPr wrap="square" lIns="0" tIns="0" rIns="0" bIns="0" rtlCol="0" anchor="t"/>
+          <a:lstStyle/>
+          <a:p>
+            <a:pPr algn="ctr" indent="0" marL="0">
+              <a:buNone/>
+            </a:pPr>
+            <a:r>
+              <a:rPr lang="en-US" sz="1150" b="1" dirty="0">
+                <a:solidFill>
+                  <a:srgbClr val="FFFFFF"/>
+                </a:solidFill>
+                <a:latin typeface="Arial" pitchFamily="34" charset="0"/>
+                <a:ea typeface="Arial" pitchFamily="34" charset="-122"/>
+                <a:cs typeface="Arial" pitchFamily="34" charset="-120"/>
+              </a:rPr>
+              <a:t>CHAPTER 04</a:t>
+            </a:r>
+            <a:endParaRPr lang="en-US" sz="1150" dirty="0"/>
+          </a:p>
+        </p:txBody>
+      </p:sp>
+      <p:pic>
+        <p:nvPicPr>
+          <p:cNvPr id="5" name="Image 1" descr="/Users/danwahlin/.copilot/session-state/56a7a0da-def8-48d4-b5e8-0ac3878cb8dd/files/slides-build/icons/FaGithub-1F2328.png">
+            <a:hlinkClick r:id="rId3" tooltip="https://github.com/github/copilot-app-for-beginners/tree/main/04-skills-custom-agents"/>
+          </p:cNvPr>
+          <p:cNvPicPr>
+            <a:picLocks noChangeAspect="1"/>
+          </p:cNvPicPr>
+          <p:nvPr/>
+        </p:nvPicPr>
+        <p:blipFill>
+          <a:blip r:embed="rId2"/>
+          <a:stretch>
+            <a:fillRect/>
+          </a:stretch>
+        </p:blipFill>
+        <p:spPr>
+          <a:xfrm>
             <a:off x="8610600" y="165050"/>
             <a:ext cx="304800" cy="304800"/>
           </a:xfrm>
@@ -3148,7 +3056,7 @@
       </p:pic>
       <p:sp>
         <p:nvSpPr>
-          <p:cNvPr id="6" name="Text 3"/>
+          <p:cNvPr id="6" name="Text 2"/>
           <p:cNvSpPr/>
           <p:nvPr/>
         </p:nvSpPr>
@@ -3187,7 +3095,7 @@
       </p:sp>
       <p:sp>
         <p:nvSpPr>
-          <p:cNvPr id="7" name="Text 4"/>
+          <p:cNvPr id="7" name="Text 3"/>
           <p:cNvSpPr/>
           <p:nvPr/>
         </p:nvSpPr>
@@ -3232,7 +3140,7 @@
       </p:sp>
       <p:sp>
         <p:nvSpPr>
-          <p:cNvPr id="8" name="Text 5"/>
+          <p:cNvPr id="8" name="Text 4"/>
           <p:cNvSpPr/>
           <p:nvPr/>
         </p:nvSpPr>
@@ -3277,7 +3185,7 @@
       </p:sp>
       <p:sp>
         <p:nvSpPr>
-          <p:cNvPr id="9" name="Text 6"/>
+          <p:cNvPr id="9" name="Text 5"/>
           <p:cNvSpPr/>
           <p:nvPr/>
         </p:nvSpPr>
@@ -3320,63 +3228,7 @@
       </p:sp>
       <p:pic>
         <p:nvPicPr>
-          <p:cNvPr id="10" name="Image 1" descr="/Users/danwahlin/.copilot/session-state/56a7a0da-def8-48d4-b5e8-0ac3878cb8dd/files/slides-build/img/04-hiring-specialists-analogy.jpg">    </p:cNvPr>
-          <p:cNvPicPr>
-            <a:picLocks noChangeAspect="1"/>
-          </p:cNvPicPr>
-          <p:nvPr/>
-        </p:nvPicPr>
-        <p:blipFill>
-          <a:blip r:embed="rId3"/>
-          <a:stretch>
-            <a:fillRect/>
-          </a:stretch>
-        </p:blipFill>
-        <p:spPr>
-          <a:xfrm>
-            <a:off x="558701" y="1747986"/>
-            <a:ext cx="4089350" cy="2726680"/>
-          </a:xfrm>
-          <a:prstGeom prst="rect">
-            <a:avLst/>
-          </a:prstGeom>
-        </p:spPr>
-      </p:pic>
-      <p:sp>
-        <p:nvSpPr>
-          <p:cNvPr id="11" name="Text 7"/>
-          <p:cNvSpPr/>
-          <p:nvPr/>
-        </p:nvSpPr>
-        <p:spPr>
-          <a:xfrm>
-            <a:off x="5003750" y="1986260"/>
-            <a:ext cx="381000" cy="381000"/>
-          </a:xfrm>
-          <a:prstGeom prst="roundRect">
-            <a:avLst>
-              <a:gd name="adj" fmla="val 23333"/>
-            </a:avLst>
-          </a:prstGeom>
-          <a:solidFill>
-            <a:srgbClr val="DAFBE1"/>
-          </a:solidFill>
-          <a:ln/>
-        </p:spPr>
-        <p:txBody>
-          <a:bodyPr wrap="square" rtlCol="0" anchor="ctr"/>
-          <a:lstStyle/>
-          <a:p>
-            <a:pPr indent="0" marL="0">
-              <a:buNone/>
-            </a:pPr>
-            <a:endParaRPr lang="en-US" dirty="0"/>
-          </a:p>
-        </p:txBody>
-      </p:sp>
-      <p:pic>
-        <p:nvPicPr>
-          <p:cNvPr id="12" name="Image 2" descr="/Users/danwahlin/.copilot/session-state/56a7a0da-def8-48d4-b5e8-0ac3878cb8dd/files/slides-build/icons/GoPerson-1A7F37.png">    </p:cNvPr>
+          <p:cNvPr id="10" name="Image 2" descr="/Users/danwahlin/.copilot/session-state/56a7a0da-def8-48d4-b5e8-0ac3878cb8dd/files/slides-build/img/04-hiring-specialists-analogy.jpg">    </p:cNvPr>
           <p:cNvPicPr>
             <a:picLocks noChangeAspect="1"/>
           </p:cNvPicPr>
@@ -3390,8 +3242,8 @@
         </p:blipFill>
         <p:spPr>
           <a:xfrm>
-            <a:off x="5086350" y="2068860"/>
-            <a:ext cx="215801" cy="215801"/>
+            <a:off x="558701" y="1747986"/>
+            <a:ext cx="4089350" cy="2726680"/>
           </a:xfrm>
           <a:prstGeom prst="rect">
             <a:avLst/>
@@ -3400,94 +3252,13 @@
       </p:pic>
       <p:sp>
         <p:nvSpPr>
-          <p:cNvPr id="13" name="Text 8"/>
-          <p:cNvSpPr/>
-          <p:nvPr/>
-        </p:nvSpPr>
-        <p:spPr>
-          <a:xfrm>
-            <a:off x="5537150" y="1950839"/>
-            <a:ext cx="2582198" cy="228600"/>
-          </a:xfrm>
-          <a:prstGeom prst="rect">
-            <a:avLst/>
-          </a:prstGeom>
-          <a:noFill/>
-          <a:ln/>
-        </p:spPr>
-        <p:txBody>
-          <a:bodyPr wrap="square" lIns="0" tIns="0" rIns="0" bIns="0" rtlCol="0" anchor="t"/>
-          <a:lstStyle/>
-          <a:p>
-            <a:pPr algn="l" indent="0" marL="0">
-              <a:buNone/>
-            </a:pPr>
-            <a:r>
-              <a:rPr lang="en-US" sz="1550" b="1" dirty="0">
-                <a:solidFill>
-                  <a:srgbClr val="1F2328"/>
-                </a:solidFill>
-                <a:latin typeface="Arial" pitchFamily="34" charset="0"/>
-                <a:ea typeface="Arial" pitchFamily="34" charset="-122"/>
-                <a:cs typeface="Arial" pitchFamily="34" charset="-120"/>
-              </a:rPr>
-              <a:t>A defined role</a:t>
-            </a:r>
-            <a:endParaRPr lang="en-US" sz="1550" dirty="0"/>
-          </a:p>
-        </p:txBody>
-      </p:sp>
-      <p:sp>
-        <p:nvSpPr>
-          <p:cNvPr id="14" name="Text 9"/>
-          <p:cNvSpPr/>
-          <p:nvPr/>
-        </p:nvSpPr>
-        <p:spPr>
-          <a:xfrm>
-            <a:off x="5537150" y="2204740"/>
-            <a:ext cx="2582198" cy="198090"/>
-          </a:xfrm>
-          <a:prstGeom prst="rect">
-            <a:avLst/>
-          </a:prstGeom>
-          <a:noFill/>
-          <a:ln/>
-        </p:spPr>
-        <p:txBody>
-          <a:bodyPr wrap="square" lIns="0" tIns="0" rIns="0" bIns="0" rtlCol="0" anchor="t"/>
-          <a:lstStyle/>
-          <a:p>
-            <a:pPr algn="l" indent="0" marL="0">
-              <a:lnSpc>
-                <a:spcPts val="1560"/>
-              </a:lnSpc>
-              <a:buNone/>
-            </a:pPr>
-            <a:r>
-              <a:rPr lang="en-US" sz="1350" dirty="0">
-                <a:solidFill>
-                  <a:srgbClr val="59636E"/>
-                </a:solidFill>
-                <a:latin typeface="Arial" pitchFamily="34" charset="0"/>
-                <a:ea typeface="Arial" pitchFamily="34" charset="-122"/>
-                <a:cs typeface="Arial" pitchFamily="34" charset="-120"/>
-              </a:rPr>
-              <a:t>Review, testing, security, or docs.</a:t>
-            </a:r>
-            <a:endParaRPr lang="en-US" sz="1350" dirty="0"/>
-          </a:p>
-        </p:txBody>
-      </p:sp>
-      <p:sp>
-        <p:nvSpPr>
-          <p:cNvPr id="15" name="Text 10"/>
-          <p:cNvSpPr/>
-          <p:nvPr/>
-        </p:nvSpPr>
-        <p:spPr>
-          <a:xfrm>
-            <a:off x="5003750" y="2920752"/>
+          <p:cNvPr id="11" name="Text 6"/>
+          <p:cNvSpPr/>
+          <p:nvPr/>
+        </p:nvSpPr>
+        <p:spPr>
+          <a:xfrm>
+            <a:off x="5003750" y="1986260"/>
             <a:ext cx="381000" cy="381000"/>
           </a:xfrm>
           <a:prstGeom prst="roundRect">
@@ -3513,7 +3284,7 @@
       </p:sp>
       <p:pic>
         <p:nvPicPr>
-          <p:cNvPr id="16" name="Image 3" descr="/Users/danwahlin/.copilot/session-state/56a7a0da-def8-48d4-b5e8-0ac3878cb8dd/files/slides-build/icons/GoTools-1A7F37.png">    </p:cNvPr>
+          <p:cNvPr id="12" name="Image 3" descr="/Users/danwahlin/.copilot/session-state/56a7a0da-def8-48d4-b5e8-0ac3878cb8dd/files/slides-build/icons/GoPerson-1A7F37.png">    </p:cNvPr>
           <p:cNvPicPr>
             <a:picLocks noChangeAspect="1"/>
           </p:cNvPicPr>
@@ -3527,7 +3298,7 @@
         </p:blipFill>
         <p:spPr>
           <a:xfrm>
-            <a:off x="5086350" y="3003352"/>
+            <a:off x="5086350" y="2068860"/>
             <a:ext cx="215801" cy="215801"/>
           </a:xfrm>
           <a:prstGeom prst="rect">
@@ -3537,14 +3308,14 @@
       </p:pic>
       <p:sp>
         <p:nvSpPr>
-          <p:cNvPr id="17" name="Text 11"/>
-          <p:cNvSpPr/>
-          <p:nvPr/>
-        </p:nvSpPr>
-        <p:spPr>
-          <a:xfrm>
-            <a:off x="5537150" y="2885331"/>
-            <a:ext cx="2128909" cy="228600"/>
+          <p:cNvPr id="13" name="Text 7"/>
+          <p:cNvSpPr/>
+          <p:nvPr/>
+        </p:nvSpPr>
+        <p:spPr>
+          <a:xfrm>
+            <a:off x="5537150" y="1950839"/>
+            <a:ext cx="2582198" cy="228600"/>
           </a:xfrm>
           <a:prstGeom prst="rect">
             <a:avLst/>
@@ -3568,7 +3339,7 @@
                 <a:ea typeface="Arial" pitchFamily="34" charset="-122"/>
                 <a:cs typeface="Arial" pitchFamily="34" charset="-120"/>
               </a:rPr>
-              <a:t>The right tools</a:t>
+              <a:t>A defined role</a:t>
             </a:r>
             <a:endParaRPr lang="en-US" sz="1550" dirty="0"/>
           </a:p>
@@ -3576,14 +3347,14 @@
       </p:sp>
       <p:sp>
         <p:nvSpPr>
-          <p:cNvPr id="18" name="Text 12"/>
-          <p:cNvSpPr/>
-          <p:nvPr/>
-        </p:nvSpPr>
-        <p:spPr>
-          <a:xfrm>
-            <a:off x="5537150" y="3139232"/>
-            <a:ext cx="2128909" cy="198090"/>
+          <p:cNvPr id="14" name="Text 8"/>
+          <p:cNvSpPr/>
+          <p:nvPr/>
+        </p:nvSpPr>
+        <p:spPr>
+          <a:xfrm>
+            <a:off x="5537150" y="2204740"/>
+            <a:ext cx="2582198" cy="198090"/>
           </a:xfrm>
           <a:prstGeom prst="rect">
             <a:avLst/>
@@ -3610,7 +3381,7 @@
                 <a:ea typeface="Arial" pitchFamily="34" charset="-122"/>
                 <a:cs typeface="Arial" pitchFamily="34" charset="-120"/>
               </a:rPr>
-              <a:t>Only what that job requires.</a:t>
+              <a:t>Review, testing, security, or docs.</a:t>
             </a:r>
             <a:endParaRPr lang="en-US" sz="1350" dirty="0"/>
           </a:p>
@@ -3618,13 +3389,13 @@
       </p:sp>
       <p:sp>
         <p:nvSpPr>
-          <p:cNvPr id="19" name="Text 13"/>
-          <p:cNvSpPr/>
-          <p:nvPr/>
-        </p:nvSpPr>
-        <p:spPr>
-          <a:xfrm>
-            <a:off x="5003750" y="3855244"/>
+          <p:cNvPr id="15" name="Text 9"/>
+          <p:cNvSpPr/>
+          <p:nvPr/>
+        </p:nvSpPr>
+        <p:spPr>
+          <a:xfrm>
+            <a:off x="5003750" y="2920752"/>
             <a:ext cx="381000" cy="381000"/>
           </a:xfrm>
           <a:prstGeom prst="roundRect">
@@ -3650,7 +3421,7 @@
       </p:sp>
       <p:pic>
         <p:nvPicPr>
-          <p:cNvPr id="20" name="Image 4" descr="/Users/danwahlin/.copilot/session-state/56a7a0da-def8-48d4-b5e8-0ac3878cb8dd/files/slides-build/icons/GoBook-1A7F37.png">    </p:cNvPr>
+          <p:cNvPr id="16" name="Image 4" descr="/Users/danwahlin/.copilot/session-state/56a7a0da-def8-48d4-b5e8-0ac3878cb8dd/files/slides-build/icons/GoTools-1A7F37.png">    </p:cNvPr>
           <p:cNvPicPr>
             <a:picLocks noChangeAspect="1"/>
           </p:cNvPicPr>
@@ -3664,6 +3435,143 @@
         </p:blipFill>
         <p:spPr>
           <a:xfrm>
+            <a:off x="5086350" y="3003352"/>
+            <a:ext cx="215801" cy="215801"/>
+          </a:xfrm>
+          <a:prstGeom prst="rect">
+            <a:avLst/>
+          </a:prstGeom>
+        </p:spPr>
+      </p:pic>
+      <p:sp>
+        <p:nvSpPr>
+          <p:cNvPr id="17" name="Text 10"/>
+          <p:cNvSpPr/>
+          <p:nvPr/>
+        </p:nvSpPr>
+        <p:spPr>
+          <a:xfrm>
+            <a:off x="5537150" y="2885331"/>
+            <a:ext cx="2128909" cy="228600"/>
+          </a:xfrm>
+          <a:prstGeom prst="rect">
+            <a:avLst/>
+          </a:prstGeom>
+          <a:noFill/>
+          <a:ln/>
+        </p:spPr>
+        <p:txBody>
+          <a:bodyPr wrap="square" lIns="0" tIns="0" rIns="0" bIns="0" rtlCol="0" anchor="t"/>
+          <a:lstStyle/>
+          <a:p>
+            <a:pPr algn="l" indent="0" marL="0">
+              <a:buNone/>
+            </a:pPr>
+            <a:r>
+              <a:rPr lang="en-US" sz="1550" b="1" dirty="0">
+                <a:solidFill>
+                  <a:srgbClr val="1F2328"/>
+                </a:solidFill>
+                <a:latin typeface="Arial" pitchFamily="34" charset="0"/>
+                <a:ea typeface="Arial" pitchFamily="34" charset="-122"/>
+                <a:cs typeface="Arial" pitchFamily="34" charset="-120"/>
+              </a:rPr>
+              <a:t>The right tools</a:t>
+            </a:r>
+            <a:endParaRPr lang="en-US" sz="1550" dirty="0"/>
+          </a:p>
+        </p:txBody>
+      </p:sp>
+      <p:sp>
+        <p:nvSpPr>
+          <p:cNvPr id="18" name="Text 11"/>
+          <p:cNvSpPr/>
+          <p:nvPr/>
+        </p:nvSpPr>
+        <p:spPr>
+          <a:xfrm>
+            <a:off x="5537150" y="3139232"/>
+            <a:ext cx="2128909" cy="198090"/>
+          </a:xfrm>
+          <a:prstGeom prst="rect">
+            <a:avLst/>
+          </a:prstGeom>
+          <a:noFill/>
+          <a:ln/>
+        </p:spPr>
+        <p:txBody>
+          <a:bodyPr wrap="square" lIns="0" tIns="0" rIns="0" bIns="0" rtlCol="0" anchor="t"/>
+          <a:lstStyle/>
+          <a:p>
+            <a:pPr algn="l" indent="0" marL="0">
+              <a:lnSpc>
+                <a:spcPts val="1560"/>
+              </a:lnSpc>
+              <a:buNone/>
+            </a:pPr>
+            <a:r>
+              <a:rPr lang="en-US" sz="1350" dirty="0">
+                <a:solidFill>
+                  <a:srgbClr val="59636E"/>
+                </a:solidFill>
+                <a:latin typeface="Arial" pitchFamily="34" charset="0"/>
+                <a:ea typeface="Arial" pitchFamily="34" charset="-122"/>
+                <a:cs typeface="Arial" pitchFamily="34" charset="-120"/>
+              </a:rPr>
+              <a:t>Only what that job requires.</a:t>
+            </a:r>
+            <a:endParaRPr lang="en-US" sz="1350" dirty="0"/>
+          </a:p>
+        </p:txBody>
+      </p:sp>
+      <p:sp>
+        <p:nvSpPr>
+          <p:cNvPr id="19" name="Text 12"/>
+          <p:cNvSpPr/>
+          <p:nvPr/>
+        </p:nvSpPr>
+        <p:spPr>
+          <a:xfrm>
+            <a:off x="5003750" y="3855244"/>
+            <a:ext cx="381000" cy="381000"/>
+          </a:xfrm>
+          <a:prstGeom prst="roundRect">
+            <a:avLst>
+              <a:gd name="adj" fmla="val 23333"/>
+            </a:avLst>
+          </a:prstGeom>
+          <a:solidFill>
+            <a:srgbClr val="DAFBE1"/>
+          </a:solidFill>
+          <a:ln/>
+        </p:spPr>
+        <p:txBody>
+          <a:bodyPr wrap="square" rtlCol="0" anchor="ctr"/>
+          <a:lstStyle/>
+          <a:p>
+            <a:pPr indent="0" marL="0">
+              <a:buNone/>
+            </a:pPr>
+            <a:endParaRPr lang="en-US" dirty="0"/>
+          </a:p>
+        </p:txBody>
+      </p:sp>
+      <p:pic>
+        <p:nvPicPr>
+          <p:cNvPr id="20" name="Image 5" descr="/Users/danwahlin/.copilot/session-state/56a7a0da-def8-48d4-b5e8-0ac3878cb8dd/files/slides-build/icons/GoBook-1A7F37.png">    </p:cNvPr>
+          <p:cNvPicPr>
+            <a:picLocks noChangeAspect="1"/>
+          </p:cNvPicPr>
+          <p:nvPr/>
+        </p:nvPicPr>
+        <p:blipFill>
+          <a:blip r:embed="rId7"/>
+          <a:stretch>
+            <a:fillRect/>
+          </a:stretch>
+        </p:blipFill>
+        <p:spPr>
+          <a:xfrm>
             <a:off x="5086350" y="3937843"/>
             <a:ext cx="215801" cy="215801"/>
           </a:xfrm>
@@ -3674,7 +3582,7 @@
       </p:pic>
       <p:sp>
         <p:nvSpPr>
-          <p:cNvPr id="21" name="Text 14"/>
+          <p:cNvPr id="21" name="Text 13"/>
           <p:cNvSpPr/>
           <p:nvPr/>
         </p:nvSpPr>
@@ -3713,7 +3621,7 @@
       </p:sp>
       <p:sp>
         <p:nvSpPr>
-          <p:cNvPr id="22" name="Text 15"/>
+          <p:cNvPr id="22" name="Text 14"/>
           <p:cNvSpPr/>
           <p:nvPr/>
         </p:nvSpPr>
@@ -3785,112 +3693,9 @@
           <a:chExt cx="0" cy="0"/>
         </a:xfrm>
       </p:grpSpPr>
-      <p:sp>
-        <p:nvSpPr>
-          <p:cNvPr id="2" name="Text 0"/>
-          <p:cNvSpPr/>
-          <p:nvPr/>
-        </p:nvSpPr>
-        <p:spPr>
-          <a:xfrm>
-            <a:off x="0" y="0"/>
-            <a:ext cx="9144000" cy="76200"/>
-          </a:xfrm>
-          <a:prstGeom prst="rect">
-            <a:avLst/>
-          </a:prstGeom>
-          <a:solidFill>
-            <a:srgbClr val="8250DF"/>
-          </a:solidFill>
-          <a:ln/>
-        </p:spPr>
-        <p:txBody>
-          <a:bodyPr wrap="square" rtlCol="0" anchor="ctr"/>
-          <a:lstStyle/>
-          <a:p>
-            <a:pPr indent="0" marL="0">
-              <a:buNone/>
-            </a:pPr>
-            <a:endParaRPr lang="en-US" dirty="0"/>
-          </a:p>
-        </p:txBody>
-      </p:sp>
-      <p:sp>
-        <p:nvSpPr>
-          <p:cNvPr id="3" name="Text 1"/>
-          <p:cNvSpPr/>
-          <p:nvPr/>
-        </p:nvSpPr>
-        <p:spPr>
-          <a:xfrm>
-            <a:off x="7340501" y="177701"/>
-            <a:ext cx="1168301" cy="279350"/>
-          </a:xfrm>
-          <a:prstGeom prst="roundRect">
-            <a:avLst>
-              <a:gd name="adj" fmla="val 22731"/>
-            </a:avLst>
-          </a:prstGeom>
-          <a:solidFill>
-            <a:srgbClr val="1A7F37"/>
-          </a:solidFill>
-          <a:ln/>
-        </p:spPr>
-        <p:txBody>
-          <a:bodyPr wrap="square" rtlCol="0" anchor="ctr"/>
-          <a:lstStyle/>
-          <a:p>
-            <a:pPr indent="0" marL="0">
-              <a:buNone/>
-            </a:pPr>
-            <a:endParaRPr lang="en-US" dirty="0"/>
-          </a:p>
-        </p:txBody>
-      </p:sp>
-      <p:sp>
-        <p:nvSpPr>
-          <p:cNvPr id="4" name="Text 2"/>
-          <p:cNvSpPr/>
-          <p:nvPr/>
-        </p:nvSpPr>
-        <p:spPr>
-          <a:xfrm>
-            <a:off x="7461041" y="231577"/>
-            <a:ext cx="927071" cy="171450"/>
-          </a:xfrm>
-          <a:prstGeom prst="rect">
-            <a:avLst/>
-          </a:prstGeom>
-          <a:noFill/>
-          <a:ln/>
-        </p:spPr>
-        <p:txBody>
-          <a:bodyPr wrap="square" lIns="0" tIns="0" rIns="0" bIns="0" rtlCol="0" anchor="t"/>
-          <a:lstStyle/>
-          <a:p>
-            <a:pPr algn="ctr" indent="0" marL="0">
-              <a:buNone/>
-            </a:pPr>
-            <a:r>
-              <a:rPr lang="en-US" sz="1150" b="1" dirty="0">
-                <a:solidFill>
-                  <a:srgbClr val="FFFFFF"/>
-                </a:solidFill>
-                <a:latin typeface="Arial" pitchFamily="34" charset="0"/>
-                <a:ea typeface="Arial" pitchFamily="34" charset="-122"/>
-                <a:cs typeface="Arial" pitchFamily="34" charset="-120"/>
-              </a:rPr>
-              <a:t>CHAPTER 04</a:t>
-            </a:r>
-            <a:endParaRPr lang="en-US" sz="1150" dirty="0"/>
-          </a:p>
-        </p:txBody>
-      </p:sp>
       <p:pic>
         <p:nvPicPr>
-          <p:cNvPr id="5" name="Image 0" descr="/Users/danwahlin/.copilot/session-state/56a7a0da-def8-48d4-b5e8-0ac3878cb8dd/files/slides-build/icons/FaGithub-1F2328.png">
-            <a:hlinkClick r:id="rId2" tooltip="https://github.com/github/copilot-app-for-beginners/tree/main/04-skills-custom-agents"/>
-          </p:cNvPr>
+          <p:cNvPr id="2" name="Image 0" descr="/Users/danwahlin/.copilot/session-state/56a7a0da-def8-48d4-b5e8-0ac3878cb8dd/files/slides-build/img/grad-corner.png">    </p:cNvPr>
           <p:cNvPicPr>
             <a:picLocks noChangeAspect="1"/>
           </p:cNvPicPr>
@@ -3904,6 +3709,103 @@
         </p:blipFill>
         <p:spPr>
           <a:xfrm>
+            <a:off x="6349901" y="0"/>
+            <a:ext cx="2793950" cy="1308050"/>
+          </a:xfrm>
+          <a:prstGeom prst="rect">
+            <a:avLst/>
+          </a:prstGeom>
+        </p:spPr>
+      </p:pic>
+      <p:sp>
+        <p:nvSpPr>
+          <p:cNvPr id="3" name="Text 0"/>
+          <p:cNvSpPr/>
+          <p:nvPr/>
+        </p:nvSpPr>
+        <p:spPr>
+          <a:xfrm>
+            <a:off x="7340501" y="177701"/>
+            <a:ext cx="1168301" cy="279350"/>
+          </a:xfrm>
+          <a:prstGeom prst="roundRect">
+            <a:avLst>
+              <a:gd name="adj" fmla="val 22731"/>
+            </a:avLst>
+          </a:prstGeom>
+          <a:solidFill>
+            <a:srgbClr val="1A7F37"/>
+          </a:solidFill>
+          <a:ln/>
+        </p:spPr>
+        <p:txBody>
+          <a:bodyPr wrap="square" rtlCol="0" anchor="ctr"/>
+          <a:lstStyle/>
+          <a:p>
+            <a:pPr indent="0" marL="0">
+              <a:buNone/>
+            </a:pPr>
+            <a:endParaRPr lang="en-US" dirty="0"/>
+          </a:p>
+        </p:txBody>
+      </p:sp>
+      <p:sp>
+        <p:nvSpPr>
+          <p:cNvPr id="4" name="Text 1"/>
+          <p:cNvSpPr/>
+          <p:nvPr/>
+        </p:nvSpPr>
+        <p:spPr>
+          <a:xfrm>
+            <a:off x="7461041" y="231577"/>
+            <a:ext cx="927071" cy="171450"/>
+          </a:xfrm>
+          <a:prstGeom prst="rect">
+            <a:avLst/>
+          </a:prstGeom>
+          <a:noFill/>
+          <a:ln/>
+        </p:spPr>
+        <p:txBody>
+          <a:bodyPr wrap="square" lIns="0" tIns="0" rIns="0" bIns="0" rtlCol="0" anchor="t"/>
+          <a:lstStyle/>
+          <a:p>
+            <a:pPr algn="ctr" indent="0" marL="0">
+              <a:buNone/>
+            </a:pPr>
+            <a:r>
+              <a:rPr lang="en-US" sz="1150" b="1" dirty="0">
+                <a:solidFill>
+                  <a:srgbClr val="FFFFFF"/>
+                </a:solidFill>
+                <a:latin typeface="Arial" pitchFamily="34" charset="0"/>
+                <a:ea typeface="Arial" pitchFamily="34" charset="-122"/>
+                <a:cs typeface="Arial" pitchFamily="34" charset="-120"/>
+              </a:rPr>
+              <a:t>CHAPTER 04</a:t>
+            </a:r>
+            <a:endParaRPr lang="en-US" sz="1150" dirty="0"/>
+          </a:p>
+        </p:txBody>
+      </p:sp>
+      <p:pic>
+        <p:nvPicPr>
+          <p:cNvPr id="5" name="Image 1" descr="/Users/danwahlin/.copilot/session-state/56a7a0da-def8-48d4-b5e8-0ac3878cb8dd/files/slides-build/icons/FaGithub-1F2328.png">
+            <a:hlinkClick r:id="rId3" tooltip="https://github.com/github/copilot-app-for-beginners/tree/main/04-skills-custom-agents"/>
+          </p:cNvPr>
+          <p:cNvPicPr>
+            <a:picLocks noChangeAspect="1"/>
+          </p:cNvPicPr>
+          <p:nvPr/>
+        </p:nvPicPr>
+        <p:blipFill>
+          <a:blip r:embed="rId2"/>
+          <a:stretch>
+            <a:fillRect/>
+          </a:stretch>
+        </p:blipFill>
+        <p:spPr>
+          <a:xfrm>
             <a:off x="8610600" y="165050"/>
             <a:ext cx="304800" cy="304800"/>
           </a:xfrm>
@@ -3914,7 +3816,7 @@
       </p:pic>
       <p:sp>
         <p:nvSpPr>
-          <p:cNvPr id="6" name="Text 3"/>
+          <p:cNvPr id="6" name="Text 2"/>
           <p:cNvSpPr/>
           <p:nvPr/>
         </p:nvSpPr>
@@ -3953,7 +3855,7 @@
       </p:sp>
       <p:sp>
         <p:nvSpPr>
-          <p:cNvPr id="7" name="Text 4"/>
+          <p:cNvPr id="7" name="Text 3"/>
           <p:cNvSpPr/>
           <p:nvPr/>
         </p:nvSpPr>
@@ -3998,7 +3900,7 @@
       </p:sp>
       <p:sp>
         <p:nvSpPr>
-          <p:cNvPr id="8" name="Text 5"/>
+          <p:cNvPr id="8" name="Text 4"/>
           <p:cNvSpPr/>
           <p:nvPr/>
         </p:nvSpPr>
@@ -4083,7 +3985,7 @@
       </p:sp>
       <p:sp>
         <p:nvSpPr>
-          <p:cNvPr id="9" name="Text 6"/>
+          <p:cNvPr id="9" name="Text 5"/>
           <p:cNvSpPr/>
           <p:nvPr/>
         </p:nvSpPr>
@@ -4119,7 +4021,7 @@
       </p:sp>
       <p:sp>
         <p:nvSpPr>
-          <p:cNvPr id="10" name="Text 7"/>
+          <p:cNvPr id="10" name="Text 6"/>
           <p:cNvSpPr/>
           <p:nvPr/>
         </p:nvSpPr>
@@ -4149,7 +4051,7 @@
       </p:sp>
       <p:sp>
         <p:nvSpPr>
-          <p:cNvPr id="11" name="Shape 8"/>
+          <p:cNvPr id="11" name="Shape 7"/>
           <p:cNvSpPr/>
           <p:nvPr/>
         </p:nvSpPr>
@@ -4172,7 +4074,7 @@
       </p:sp>
       <p:sp>
         <p:nvSpPr>
-          <p:cNvPr id="12" name="Text 9"/>
+          <p:cNvPr id="12" name="Text 8"/>
           <p:cNvSpPr/>
           <p:nvPr/>
         </p:nvSpPr>
@@ -4204,7 +4106,7 @@
       </p:sp>
       <p:sp>
         <p:nvSpPr>
-          <p:cNvPr id="13" name="Text 10"/>
+          <p:cNvPr id="13" name="Text 9"/>
           <p:cNvSpPr/>
           <p:nvPr/>
         </p:nvSpPr>
@@ -4236,7 +4138,7 @@
       </p:sp>
       <p:sp>
         <p:nvSpPr>
-          <p:cNvPr id="14" name="Text 11"/>
+          <p:cNvPr id="14" name="Text 10"/>
           <p:cNvSpPr/>
           <p:nvPr/>
         </p:nvSpPr>
@@ -4268,7 +4170,7 @@
       </p:sp>
       <p:sp>
         <p:nvSpPr>
-          <p:cNvPr id="15" name="Text 12"/>
+          <p:cNvPr id="15" name="Text 11"/>
           <p:cNvSpPr/>
           <p:nvPr/>
         </p:nvSpPr>
@@ -4307,7 +4209,7 @@
       </p:sp>
       <p:sp>
         <p:nvSpPr>
-          <p:cNvPr id="16" name="Text 13"/>
+          <p:cNvPr id="16" name="Text 12"/>
           <p:cNvSpPr/>
           <p:nvPr/>
         </p:nvSpPr>
@@ -4349,7 +4251,7 @@
       </p:sp>
       <p:sp>
         <p:nvSpPr>
-          <p:cNvPr id="17" name="Text 14"/>
+          <p:cNvPr id="17" name="Text 13"/>
           <p:cNvSpPr/>
           <p:nvPr/>
         </p:nvSpPr>
@@ -4408,7 +4310,7 @@
       </p:sp>
       <p:sp>
         <p:nvSpPr>
-          <p:cNvPr id="18" name="Text 15"/>
+          <p:cNvPr id="18" name="Text 14"/>
           <p:cNvSpPr/>
           <p:nvPr/>
         </p:nvSpPr>
@@ -4467,7 +4369,7 @@
       </p:sp>
       <p:sp>
         <p:nvSpPr>
-          <p:cNvPr id="19" name="Text 16"/>
+          <p:cNvPr id="19" name="Text 15"/>
           <p:cNvSpPr/>
           <p:nvPr/>
         </p:nvSpPr>
@@ -4509,7 +4411,7 @@
       </p:sp>
       <p:sp>
         <p:nvSpPr>
-          <p:cNvPr id="20" name="Text 17"/>
+          <p:cNvPr id="20" name="Text 16"/>
           <p:cNvSpPr/>
           <p:nvPr/>
         </p:nvSpPr>
@@ -4551,7 +4453,7 @@
       </p:sp>
       <p:sp>
         <p:nvSpPr>
-          <p:cNvPr id="21" name="Text 18"/>
+          <p:cNvPr id="21" name="Text 17"/>
           <p:cNvSpPr/>
           <p:nvPr/>
         </p:nvSpPr>
@@ -4610,7 +4512,7 @@
       </p:sp>
       <p:sp>
         <p:nvSpPr>
-          <p:cNvPr id="22" name="Text 19"/>
+          <p:cNvPr id="22" name="Text 18"/>
           <p:cNvSpPr/>
           <p:nvPr/>
         </p:nvSpPr>
@@ -4652,7 +4554,7 @@
       </p:sp>
       <p:sp>
         <p:nvSpPr>
-          <p:cNvPr id="23" name="Text 20"/>
+          <p:cNvPr id="23" name="Text 19"/>
           <p:cNvSpPr/>
           <p:nvPr/>
         </p:nvSpPr>
@@ -4694,7 +4596,7 @@
       </p:sp>
       <p:sp>
         <p:nvSpPr>
-          <p:cNvPr id="24" name="Text 21"/>
+          <p:cNvPr id="24" name="Text 20"/>
           <p:cNvSpPr/>
           <p:nvPr/>
         </p:nvSpPr>
@@ -4736,7 +4638,7 @@
       </p:sp>
       <p:sp>
         <p:nvSpPr>
-          <p:cNvPr id="25" name="Text 22"/>
+          <p:cNvPr id="25" name="Text 21"/>
           <p:cNvSpPr/>
           <p:nvPr/>
         </p:nvSpPr>
@@ -4778,7 +4680,7 @@
       </p:sp>
       <p:sp>
         <p:nvSpPr>
-          <p:cNvPr id="26" name="Text 23"/>
+          <p:cNvPr id="26" name="Text 22"/>
           <p:cNvSpPr/>
           <p:nvPr/>
         </p:nvSpPr>
@@ -4810,172 +4712,7 @@
       </p:sp>
       <p:pic>
         <p:nvPicPr>
-          <p:cNvPr id="27" name="Image 1" descr="/Users/danwahlin/.copilot/session-state/56a7a0da-def8-48d4-b5e8-0ac3878cb8dd/files/slides-build/icons/GoTag-1A7F37.png">    </p:cNvPr>
-          <p:cNvPicPr>
-            <a:picLocks noChangeAspect="1"/>
-          </p:cNvPicPr>
-          <p:nvPr/>
-        </p:nvPicPr>
-        <p:blipFill>
-          <a:blip r:embed="rId3"/>
-          <a:stretch>
-            <a:fillRect/>
-          </a:stretch>
-        </p:blipFill>
-        <p:spPr>
-          <a:xfrm>
-            <a:off x="5035451" y="2137172"/>
-            <a:ext cx="215801" cy="215801"/>
-          </a:xfrm>
-          <a:prstGeom prst="rect">
-            <a:avLst/>
-          </a:prstGeom>
-        </p:spPr>
-      </p:pic>
-      <p:sp>
-        <p:nvSpPr>
-          <p:cNvPr id="28" name="Text 24"/>
-          <p:cNvSpPr/>
-          <p:nvPr/>
-        </p:nvSpPr>
-        <p:spPr>
-          <a:xfrm>
-            <a:off x="5486251" y="2014389"/>
-            <a:ext cx="2275400" cy="238125"/>
-          </a:xfrm>
-          <a:prstGeom prst="rect">
-            <a:avLst/>
-          </a:prstGeom>
-          <a:noFill/>
-          <a:ln/>
-        </p:spPr>
-        <p:txBody>
-          <a:bodyPr wrap="square" lIns="0" tIns="0" rIns="0" bIns="0" rtlCol="0" anchor="t"/>
-          <a:lstStyle/>
-          <a:p>
-            <a:pPr algn="l" indent="0" marL="0">
-              <a:buNone/>
-            </a:pPr>
-            <a:r>
-              <a:rPr lang="en-US" sz="1550" b="1" dirty="0">
-                <a:solidFill>
-                  <a:srgbClr val="0550AE"/>
-                </a:solidFill>
-                <a:latin typeface="Courier New" pitchFamily="34" charset="0"/>
-                <a:ea typeface="Courier New" pitchFamily="34" charset="-122"/>
-                <a:cs typeface="Courier New" pitchFamily="34" charset="-120"/>
-              </a:rPr>
-              <a:t>name</a:t>
-            </a:r>
-            <a:pPr algn="l" indent="0" marL="0">
-              <a:buNone/>
-            </a:pPr>
-            <a:r>
-              <a:rPr lang="en-US" sz="1550" dirty="0">
-                <a:solidFill>
-                  <a:srgbClr val="1F2328"/>
-                </a:solidFill>
-                <a:latin typeface="Arial" pitchFamily="34" charset="0"/>
-                <a:ea typeface="Arial" pitchFamily="34" charset="-122"/>
-                <a:cs typeface="Arial" pitchFamily="34" charset="-120"/>
-              </a:rPr>
-              <a:t> and </a:t>
-            </a:r>
-            <a:pPr algn="l" indent="0" marL="0">
-              <a:buNone/>
-            </a:pPr>
-            <a:r>
-              <a:rPr lang="en-US" sz="1550" b="1" dirty="0">
-                <a:solidFill>
-                  <a:srgbClr val="0550AE"/>
-                </a:solidFill>
-                <a:latin typeface="Courier New" pitchFamily="34" charset="0"/>
-                <a:ea typeface="Courier New" pitchFamily="34" charset="-122"/>
-                <a:cs typeface="Courier New" pitchFamily="34" charset="-120"/>
-              </a:rPr>
-              <a:t>description</a:t>
-            </a:r>
-            <a:endParaRPr lang="en-US" sz="1550" dirty="0"/>
-          </a:p>
-        </p:txBody>
-      </p:sp>
-      <p:sp>
-        <p:nvSpPr>
-          <p:cNvPr id="29" name="Text 25"/>
-          <p:cNvSpPr/>
-          <p:nvPr/>
-        </p:nvSpPr>
-        <p:spPr>
-          <a:xfrm>
-            <a:off x="5486251" y="2277814"/>
-            <a:ext cx="2275400" cy="198090"/>
-          </a:xfrm>
-          <a:prstGeom prst="rect">
-            <a:avLst/>
-          </a:prstGeom>
-          <a:noFill/>
-          <a:ln/>
-        </p:spPr>
-        <p:txBody>
-          <a:bodyPr wrap="square" lIns="0" tIns="0" rIns="0" bIns="0" rtlCol="0" anchor="t"/>
-          <a:lstStyle/>
-          <a:p>
-            <a:pPr algn="l" indent="0" marL="0">
-              <a:lnSpc>
-                <a:spcPts val="1560"/>
-              </a:lnSpc>
-              <a:buNone/>
-            </a:pPr>
-            <a:r>
-              <a:rPr lang="en-US" sz="1350" dirty="0">
-                <a:solidFill>
-                  <a:srgbClr val="59636E"/>
-                </a:solidFill>
-                <a:latin typeface="Arial" pitchFamily="34" charset="0"/>
-                <a:ea typeface="Arial" pitchFamily="34" charset="-122"/>
-                <a:cs typeface="Arial" pitchFamily="34" charset="-120"/>
-              </a:rPr>
-              <a:t>Shown in the agent picker.</a:t>
-            </a:r>
-            <a:endParaRPr lang="en-US" sz="1350" dirty="0"/>
-          </a:p>
-        </p:txBody>
-      </p:sp>
-      <p:sp>
-        <p:nvSpPr>
-          <p:cNvPr id="30" name="Text 26"/>
-          <p:cNvSpPr/>
-          <p:nvPr/>
-        </p:nvSpPr>
-        <p:spPr>
-          <a:xfrm>
-            <a:off x="4952851" y="2749451"/>
-            <a:ext cx="381000" cy="381000"/>
-          </a:xfrm>
-          <a:prstGeom prst="roundRect">
-            <a:avLst>
-              <a:gd name="adj" fmla="val 23333"/>
-            </a:avLst>
-          </a:prstGeom>
-          <a:solidFill>
-            <a:srgbClr val="DAFBE1"/>
-          </a:solidFill>
-          <a:ln/>
-        </p:spPr>
-        <p:txBody>
-          <a:bodyPr wrap="square" rtlCol="0" anchor="ctr"/>
-          <a:lstStyle/>
-          <a:p>
-            <a:pPr indent="0" marL="0">
-              <a:buNone/>
-            </a:pPr>
-            <a:endParaRPr lang="en-US" dirty="0"/>
-          </a:p>
-        </p:txBody>
-      </p:sp>
-      <p:pic>
-        <p:nvPicPr>
-          <p:cNvPr id="31" name="Image 2" descr="/Users/danwahlin/.copilot/session-state/56a7a0da-def8-48d4-b5e8-0ac3878cb8dd/files/slides-build/icons/GoLock-1A7F37.png">    </p:cNvPr>
+          <p:cNvPr id="27" name="Image 2" descr="/Users/danwahlin/.copilot/session-state/56a7a0da-def8-48d4-b5e8-0ac3878cb8dd/files/slides-build/icons/GoTag-1A7F37.png">    </p:cNvPr>
           <p:cNvPicPr>
             <a:picLocks noChangeAspect="1"/>
           </p:cNvPicPr>
@@ -4989,7 +4726,7 @@
         </p:blipFill>
         <p:spPr>
           <a:xfrm>
-            <a:off x="5035451" y="2832050"/>
+            <a:off x="5035451" y="2137172"/>
             <a:ext cx="215801" cy="215801"/>
           </a:xfrm>
           <a:prstGeom prst="rect">
@@ -4999,14 +4736,14 @@
       </p:pic>
       <p:sp>
         <p:nvSpPr>
-          <p:cNvPr id="32" name="Text 27"/>
-          <p:cNvSpPr/>
-          <p:nvPr/>
-        </p:nvSpPr>
-        <p:spPr>
-          <a:xfrm>
-            <a:off x="5486251" y="2704505"/>
-            <a:ext cx="2582501" cy="238125"/>
+          <p:cNvPr id="28" name="Text 23"/>
+          <p:cNvSpPr/>
+          <p:nvPr/>
+        </p:nvSpPr>
+        <p:spPr>
+          <a:xfrm>
+            <a:off x="5486251" y="2014389"/>
+            <a:ext cx="2275400" cy="238125"/>
           </a:xfrm>
           <a:prstGeom prst="rect">
             <a:avLst/>
@@ -5030,7 +4767,35 @@
                 <a:ea typeface="Courier New" pitchFamily="34" charset="-122"/>
                 <a:cs typeface="Courier New" pitchFamily="34" charset="-120"/>
               </a:rPr>
-              <a:t>tools</a:t>
+              <a:t>name</a:t>
+            </a:r>
+            <a:pPr algn="l" indent="0" marL="0">
+              <a:buNone/>
+            </a:pPr>
+            <a:r>
+              <a:rPr lang="en-US" sz="1550" dirty="0">
+                <a:solidFill>
+                  <a:srgbClr val="1F2328"/>
+                </a:solidFill>
+                <a:latin typeface="Arial" pitchFamily="34" charset="0"/>
+                <a:ea typeface="Arial" pitchFamily="34" charset="-122"/>
+                <a:cs typeface="Arial" pitchFamily="34" charset="-120"/>
+              </a:rPr>
+              <a:t> and </a:t>
+            </a:r>
+            <a:pPr algn="l" indent="0" marL="0">
+              <a:buNone/>
+            </a:pPr>
+            <a:r>
+              <a:rPr lang="en-US" sz="1550" b="1" dirty="0">
+                <a:solidFill>
+                  <a:srgbClr val="0550AE"/>
+                </a:solidFill>
+                <a:latin typeface="Courier New" pitchFamily="34" charset="0"/>
+                <a:ea typeface="Courier New" pitchFamily="34" charset="-122"/>
+                <a:cs typeface="Courier New" pitchFamily="34" charset="-120"/>
+              </a:rPr>
+              <a:t>description</a:t>
             </a:r>
             <a:endParaRPr lang="en-US" sz="1550" dirty="0"/>
           </a:p>
@@ -5038,14 +4803,14 @@
       </p:sp>
       <p:sp>
         <p:nvSpPr>
-          <p:cNvPr id="33" name="Text 28"/>
-          <p:cNvSpPr/>
-          <p:nvPr/>
-        </p:nvSpPr>
-        <p:spPr>
-          <a:xfrm>
-            <a:off x="5486251" y="2967930"/>
-            <a:ext cx="2582501" cy="207615"/>
+          <p:cNvPr id="29" name="Text 24"/>
+          <p:cNvSpPr/>
+          <p:nvPr/>
+        </p:nvSpPr>
+        <p:spPr>
+          <a:xfrm>
+            <a:off x="5486251" y="2277814"/>
+            <a:ext cx="2275400" cy="198090"/>
           </a:xfrm>
           <a:prstGeom prst="rect">
             <a:avLst/>
@@ -5064,23 +4829,6 @@
               <a:buNone/>
             </a:pPr>
             <a:r>
-              <a:rPr lang="en-US" sz="1350" b="1" dirty="0">
-                <a:solidFill>
-                  <a:srgbClr val="0550AE"/>
-                </a:solidFill>
-                <a:latin typeface="Courier New" pitchFamily="34" charset="0"/>
-                <a:ea typeface="Courier New" pitchFamily="34" charset="-122"/>
-                <a:cs typeface="Courier New" pitchFamily="34" charset="-120"/>
-              </a:rPr>
-              <a:t>read</a:t>
-            </a:r>
-            <a:pPr algn="l" indent="0" marL="0">
-              <a:lnSpc>
-                <a:spcPts val="1560"/>
-              </a:lnSpc>
-              <a:buNone/>
-            </a:pPr>
-            <a:r>
               <a:rPr lang="en-US" sz="1350" dirty="0">
                 <a:solidFill>
                   <a:srgbClr val="59636E"/>
@@ -5089,41 +4837,7 @@
                 <a:ea typeface="Arial" pitchFamily="34" charset="-122"/>
                 <a:cs typeface="Arial" pitchFamily="34" charset="-120"/>
               </a:rPr>
-              <a:t> and </a:t>
-            </a:r>
-            <a:pPr algn="l" indent="0" marL="0">
-              <a:lnSpc>
-                <a:spcPts val="1560"/>
-              </a:lnSpc>
-              <a:buNone/>
-            </a:pPr>
-            <a:r>
-              <a:rPr lang="en-US" sz="1350" b="1" dirty="0">
-                <a:solidFill>
-                  <a:srgbClr val="0550AE"/>
-                </a:solidFill>
-                <a:latin typeface="Courier New" pitchFamily="34" charset="0"/>
-                <a:ea typeface="Courier New" pitchFamily="34" charset="-122"/>
-                <a:cs typeface="Courier New" pitchFamily="34" charset="-120"/>
-              </a:rPr>
-              <a:t>search</a:t>
-            </a:r>
-            <a:pPr algn="l" indent="0" marL="0">
-              <a:lnSpc>
-                <a:spcPts val="1560"/>
-              </a:lnSpc>
-              <a:buNone/>
-            </a:pPr>
-            <a:r>
-              <a:rPr lang="en-US" sz="1350" dirty="0">
-                <a:solidFill>
-                  <a:srgbClr val="59636E"/>
-                </a:solidFill>
-                <a:latin typeface="Arial" pitchFamily="34" charset="0"/>
-                <a:ea typeface="Arial" pitchFamily="34" charset="-122"/>
-                <a:cs typeface="Arial" pitchFamily="34" charset="-120"/>
-              </a:rPr>
-              <a:t> only. No edits.</a:t>
+              <a:t>Shown in the agent picker.</a:t>
             </a:r>
             <a:endParaRPr lang="en-US" sz="1350" dirty="0"/>
           </a:p>
@@ -5131,13 +4845,13 @@
       </p:sp>
       <p:sp>
         <p:nvSpPr>
-          <p:cNvPr id="34" name="Text 29"/>
-          <p:cNvSpPr/>
-          <p:nvPr/>
-        </p:nvSpPr>
-        <p:spPr>
-          <a:xfrm>
-            <a:off x="4952851" y="3439567"/>
+          <p:cNvPr id="30" name="Text 25"/>
+          <p:cNvSpPr/>
+          <p:nvPr/>
+        </p:nvSpPr>
+        <p:spPr>
+          <a:xfrm>
+            <a:off x="4952851" y="2749451"/>
             <a:ext cx="381000" cy="381000"/>
           </a:xfrm>
           <a:prstGeom prst="roundRect">
@@ -5163,7 +4877,7 @@
       </p:sp>
       <p:pic>
         <p:nvPicPr>
-          <p:cNvPr id="35" name="Image 3" descr="/Users/danwahlin/.copilot/session-state/56a7a0da-def8-48d4-b5e8-0ac3878cb8dd/files/slides-build/icons/GoNote-1A7F37.png">    </p:cNvPr>
+          <p:cNvPr id="31" name="Image 3" descr="/Users/danwahlin/.copilot/session-state/56a7a0da-def8-48d4-b5e8-0ac3878cb8dd/files/slides-build/icons/GoLock-1A7F37.png">    </p:cNvPr>
           <p:cNvPicPr>
             <a:picLocks noChangeAspect="1"/>
           </p:cNvPicPr>
@@ -5177,6 +4891,194 @@
         </p:blipFill>
         <p:spPr>
           <a:xfrm>
+            <a:off x="5035451" y="2832050"/>
+            <a:ext cx="215801" cy="215801"/>
+          </a:xfrm>
+          <a:prstGeom prst="rect">
+            <a:avLst/>
+          </a:prstGeom>
+        </p:spPr>
+      </p:pic>
+      <p:sp>
+        <p:nvSpPr>
+          <p:cNvPr id="32" name="Text 26"/>
+          <p:cNvSpPr/>
+          <p:nvPr/>
+        </p:nvSpPr>
+        <p:spPr>
+          <a:xfrm>
+            <a:off x="5486251" y="2704505"/>
+            <a:ext cx="2582501" cy="238125"/>
+          </a:xfrm>
+          <a:prstGeom prst="rect">
+            <a:avLst/>
+          </a:prstGeom>
+          <a:noFill/>
+          <a:ln/>
+        </p:spPr>
+        <p:txBody>
+          <a:bodyPr wrap="square" lIns="0" tIns="0" rIns="0" bIns="0" rtlCol="0" anchor="t"/>
+          <a:lstStyle/>
+          <a:p>
+            <a:pPr algn="l" indent="0" marL="0">
+              <a:buNone/>
+            </a:pPr>
+            <a:r>
+              <a:rPr lang="en-US" sz="1550" b="1" dirty="0">
+                <a:solidFill>
+                  <a:srgbClr val="0550AE"/>
+                </a:solidFill>
+                <a:latin typeface="Courier New" pitchFamily="34" charset="0"/>
+                <a:ea typeface="Courier New" pitchFamily="34" charset="-122"/>
+                <a:cs typeface="Courier New" pitchFamily="34" charset="-120"/>
+              </a:rPr>
+              <a:t>tools</a:t>
+            </a:r>
+            <a:endParaRPr lang="en-US" sz="1550" dirty="0"/>
+          </a:p>
+        </p:txBody>
+      </p:sp>
+      <p:sp>
+        <p:nvSpPr>
+          <p:cNvPr id="33" name="Text 27"/>
+          <p:cNvSpPr/>
+          <p:nvPr/>
+        </p:nvSpPr>
+        <p:spPr>
+          <a:xfrm>
+            <a:off x="5486251" y="2967930"/>
+            <a:ext cx="2582501" cy="207615"/>
+          </a:xfrm>
+          <a:prstGeom prst="rect">
+            <a:avLst/>
+          </a:prstGeom>
+          <a:noFill/>
+          <a:ln/>
+        </p:spPr>
+        <p:txBody>
+          <a:bodyPr wrap="square" lIns="0" tIns="0" rIns="0" bIns="0" rtlCol="0" anchor="t"/>
+          <a:lstStyle/>
+          <a:p>
+            <a:pPr algn="l" indent="0" marL="0">
+              <a:lnSpc>
+                <a:spcPts val="1560"/>
+              </a:lnSpc>
+              <a:buNone/>
+            </a:pPr>
+            <a:r>
+              <a:rPr lang="en-US" sz="1350" b="1" dirty="0">
+                <a:solidFill>
+                  <a:srgbClr val="0550AE"/>
+                </a:solidFill>
+                <a:latin typeface="Courier New" pitchFamily="34" charset="0"/>
+                <a:ea typeface="Courier New" pitchFamily="34" charset="-122"/>
+                <a:cs typeface="Courier New" pitchFamily="34" charset="-120"/>
+              </a:rPr>
+              <a:t>read</a:t>
+            </a:r>
+            <a:pPr algn="l" indent="0" marL="0">
+              <a:lnSpc>
+                <a:spcPts val="1560"/>
+              </a:lnSpc>
+              <a:buNone/>
+            </a:pPr>
+            <a:r>
+              <a:rPr lang="en-US" sz="1350" dirty="0">
+                <a:solidFill>
+                  <a:srgbClr val="59636E"/>
+                </a:solidFill>
+                <a:latin typeface="Arial" pitchFamily="34" charset="0"/>
+                <a:ea typeface="Arial" pitchFamily="34" charset="-122"/>
+                <a:cs typeface="Arial" pitchFamily="34" charset="-120"/>
+              </a:rPr>
+              <a:t> and </a:t>
+            </a:r>
+            <a:pPr algn="l" indent="0" marL="0">
+              <a:lnSpc>
+                <a:spcPts val="1560"/>
+              </a:lnSpc>
+              <a:buNone/>
+            </a:pPr>
+            <a:r>
+              <a:rPr lang="en-US" sz="1350" b="1" dirty="0">
+                <a:solidFill>
+                  <a:srgbClr val="0550AE"/>
+                </a:solidFill>
+                <a:latin typeface="Courier New" pitchFamily="34" charset="0"/>
+                <a:ea typeface="Courier New" pitchFamily="34" charset="-122"/>
+                <a:cs typeface="Courier New" pitchFamily="34" charset="-120"/>
+              </a:rPr>
+              <a:t>search</a:t>
+            </a:r>
+            <a:pPr algn="l" indent="0" marL="0">
+              <a:lnSpc>
+                <a:spcPts val="1560"/>
+              </a:lnSpc>
+              <a:buNone/>
+            </a:pPr>
+            <a:r>
+              <a:rPr lang="en-US" sz="1350" dirty="0">
+                <a:solidFill>
+                  <a:srgbClr val="59636E"/>
+                </a:solidFill>
+                <a:latin typeface="Arial" pitchFamily="34" charset="0"/>
+                <a:ea typeface="Arial" pitchFamily="34" charset="-122"/>
+                <a:cs typeface="Arial" pitchFamily="34" charset="-120"/>
+              </a:rPr>
+              <a:t> only. No edits.</a:t>
+            </a:r>
+            <a:endParaRPr lang="en-US" sz="1350" dirty="0"/>
+          </a:p>
+        </p:txBody>
+      </p:sp>
+      <p:sp>
+        <p:nvSpPr>
+          <p:cNvPr id="34" name="Text 28"/>
+          <p:cNvSpPr/>
+          <p:nvPr/>
+        </p:nvSpPr>
+        <p:spPr>
+          <a:xfrm>
+            <a:off x="4952851" y="3439567"/>
+            <a:ext cx="381000" cy="381000"/>
+          </a:xfrm>
+          <a:prstGeom prst="roundRect">
+            <a:avLst>
+              <a:gd name="adj" fmla="val 23333"/>
+            </a:avLst>
+          </a:prstGeom>
+          <a:solidFill>
+            <a:srgbClr val="DAFBE1"/>
+          </a:solidFill>
+          <a:ln/>
+        </p:spPr>
+        <p:txBody>
+          <a:bodyPr wrap="square" rtlCol="0" anchor="ctr"/>
+          <a:lstStyle/>
+          <a:p>
+            <a:pPr indent="0" marL="0">
+              <a:buNone/>
+            </a:pPr>
+            <a:endParaRPr lang="en-US" dirty="0"/>
+          </a:p>
+        </p:txBody>
+      </p:sp>
+      <p:pic>
+        <p:nvPicPr>
+          <p:cNvPr id="35" name="Image 4" descr="/Users/danwahlin/.copilot/session-state/56a7a0da-def8-48d4-b5e8-0ac3878cb8dd/files/slides-build/icons/GoNote-1A7F37.png">    </p:cNvPr>
+          <p:cNvPicPr>
+            <a:picLocks noChangeAspect="1"/>
+          </p:cNvPicPr>
+          <p:nvPr/>
+        </p:nvPicPr>
+        <p:blipFill>
+          <a:blip r:embed="rId6"/>
+          <a:stretch>
+            <a:fillRect/>
+          </a:stretch>
+        </p:blipFill>
+        <p:spPr>
+          <a:xfrm>
             <a:off x="5035451" y="3522166"/>
             <a:ext cx="215801" cy="215801"/>
           </a:xfrm>
@@ -5187,7 +5089,7 @@
       </p:pic>
       <p:sp>
         <p:nvSpPr>
-          <p:cNvPr id="36" name="Text 30"/>
+          <p:cNvPr id="36" name="Text 29"/>
           <p:cNvSpPr/>
           <p:nvPr/>
         </p:nvSpPr>
@@ -5226,7 +5128,7 @@
       </p:sp>
       <p:sp>
         <p:nvSpPr>
-          <p:cNvPr id="37" name="Text 31"/>
+          <p:cNvPr id="37" name="Text 30"/>
           <p:cNvSpPr/>
           <p:nvPr/>
         </p:nvSpPr>
@@ -5298,112 +5200,9 @@
           <a:chExt cx="0" cy="0"/>
         </a:xfrm>
       </p:grpSpPr>
-      <p:sp>
-        <p:nvSpPr>
-          <p:cNvPr id="2" name="Text 0"/>
-          <p:cNvSpPr/>
-          <p:nvPr/>
-        </p:nvSpPr>
-        <p:spPr>
-          <a:xfrm>
-            <a:off x="0" y="0"/>
-            <a:ext cx="9144000" cy="76200"/>
-          </a:xfrm>
-          <a:prstGeom prst="rect">
-            <a:avLst/>
-          </a:prstGeom>
-          <a:solidFill>
-            <a:srgbClr val="8250DF"/>
-          </a:solidFill>
-          <a:ln/>
-        </p:spPr>
-        <p:txBody>
-          <a:bodyPr wrap="square" rtlCol="0" anchor="ctr"/>
-          <a:lstStyle/>
-          <a:p>
-            <a:pPr indent="0" marL="0">
-              <a:buNone/>
-            </a:pPr>
-            <a:endParaRPr lang="en-US" dirty="0"/>
-          </a:p>
-        </p:txBody>
-      </p:sp>
-      <p:sp>
-        <p:nvSpPr>
-          <p:cNvPr id="3" name="Text 1"/>
-          <p:cNvSpPr/>
-          <p:nvPr/>
-        </p:nvSpPr>
-        <p:spPr>
-          <a:xfrm>
-            <a:off x="7340501" y="177701"/>
-            <a:ext cx="1168301" cy="279350"/>
-          </a:xfrm>
-          <a:prstGeom prst="roundRect">
-            <a:avLst>
-              <a:gd name="adj" fmla="val 22731"/>
-            </a:avLst>
-          </a:prstGeom>
-          <a:solidFill>
-            <a:srgbClr val="1A7F37"/>
-          </a:solidFill>
-          <a:ln/>
-        </p:spPr>
-        <p:txBody>
-          <a:bodyPr wrap="square" rtlCol="0" anchor="ctr"/>
-          <a:lstStyle/>
-          <a:p>
-            <a:pPr indent="0" marL="0">
-              <a:buNone/>
-            </a:pPr>
-            <a:endParaRPr lang="en-US" dirty="0"/>
-          </a:p>
-        </p:txBody>
-      </p:sp>
-      <p:sp>
-        <p:nvSpPr>
-          <p:cNvPr id="4" name="Text 2"/>
-          <p:cNvSpPr/>
-          <p:nvPr/>
-        </p:nvSpPr>
-        <p:spPr>
-          <a:xfrm>
-            <a:off x="7461041" y="231577"/>
-            <a:ext cx="927071" cy="171450"/>
-          </a:xfrm>
-          <a:prstGeom prst="rect">
-            <a:avLst/>
-          </a:prstGeom>
-          <a:noFill/>
-          <a:ln/>
-        </p:spPr>
-        <p:txBody>
-          <a:bodyPr wrap="square" lIns="0" tIns="0" rIns="0" bIns="0" rtlCol="0" anchor="t"/>
-          <a:lstStyle/>
-          <a:p>
-            <a:pPr algn="ctr" indent="0" marL="0">
-              <a:buNone/>
-            </a:pPr>
-            <a:r>
-              <a:rPr lang="en-US" sz="1150" b="1" dirty="0">
-                <a:solidFill>
-                  <a:srgbClr val="FFFFFF"/>
-                </a:solidFill>
-                <a:latin typeface="Arial" pitchFamily="34" charset="0"/>
-                <a:ea typeface="Arial" pitchFamily="34" charset="-122"/>
-                <a:cs typeface="Arial" pitchFamily="34" charset="-120"/>
-              </a:rPr>
-              <a:t>CHAPTER 04</a:t>
-            </a:r>
-            <a:endParaRPr lang="en-US" sz="1150" dirty="0"/>
-          </a:p>
-        </p:txBody>
-      </p:sp>
       <p:pic>
         <p:nvPicPr>
-          <p:cNvPr id="5" name="Image 0" descr="/Users/danwahlin/.copilot/session-state/56a7a0da-def8-48d4-b5e8-0ac3878cb8dd/files/slides-build/icons/FaGithub-1F2328.png">
-            <a:hlinkClick r:id="rId2" tooltip="https://github.com/github/copilot-app-for-beginners/tree/main/04-skills-custom-agents"/>
-          </p:cNvPr>
+          <p:cNvPr id="2" name="Image 0" descr="/Users/danwahlin/.copilot/session-state/56a7a0da-def8-48d4-b5e8-0ac3878cb8dd/files/slides-build/img/grad-corner.png">    </p:cNvPr>
           <p:cNvPicPr>
             <a:picLocks noChangeAspect="1"/>
           </p:cNvPicPr>
@@ -5417,6 +5216,103 @@
         </p:blipFill>
         <p:spPr>
           <a:xfrm>
+            <a:off x="6349901" y="0"/>
+            <a:ext cx="2793950" cy="1308050"/>
+          </a:xfrm>
+          <a:prstGeom prst="rect">
+            <a:avLst/>
+          </a:prstGeom>
+        </p:spPr>
+      </p:pic>
+      <p:sp>
+        <p:nvSpPr>
+          <p:cNvPr id="3" name="Text 0"/>
+          <p:cNvSpPr/>
+          <p:nvPr/>
+        </p:nvSpPr>
+        <p:spPr>
+          <a:xfrm>
+            <a:off x="7340501" y="177701"/>
+            <a:ext cx="1168301" cy="279350"/>
+          </a:xfrm>
+          <a:prstGeom prst="roundRect">
+            <a:avLst>
+              <a:gd name="adj" fmla="val 22731"/>
+            </a:avLst>
+          </a:prstGeom>
+          <a:solidFill>
+            <a:srgbClr val="1A7F37"/>
+          </a:solidFill>
+          <a:ln/>
+        </p:spPr>
+        <p:txBody>
+          <a:bodyPr wrap="square" rtlCol="0" anchor="ctr"/>
+          <a:lstStyle/>
+          <a:p>
+            <a:pPr indent="0" marL="0">
+              <a:buNone/>
+            </a:pPr>
+            <a:endParaRPr lang="en-US" dirty="0"/>
+          </a:p>
+        </p:txBody>
+      </p:sp>
+      <p:sp>
+        <p:nvSpPr>
+          <p:cNvPr id="4" name="Text 1"/>
+          <p:cNvSpPr/>
+          <p:nvPr/>
+        </p:nvSpPr>
+        <p:spPr>
+          <a:xfrm>
+            <a:off x="7461041" y="231577"/>
+            <a:ext cx="927071" cy="171450"/>
+          </a:xfrm>
+          <a:prstGeom prst="rect">
+            <a:avLst/>
+          </a:prstGeom>
+          <a:noFill/>
+          <a:ln/>
+        </p:spPr>
+        <p:txBody>
+          <a:bodyPr wrap="square" lIns="0" tIns="0" rIns="0" bIns="0" rtlCol="0" anchor="t"/>
+          <a:lstStyle/>
+          <a:p>
+            <a:pPr algn="ctr" indent="0" marL="0">
+              <a:buNone/>
+            </a:pPr>
+            <a:r>
+              <a:rPr lang="en-US" sz="1150" b="1" dirty="0">
+                <a:solidFill>
+                  <a:srgbClr val="FFFFFF"/>
+                </a:solidFill>
+                <a:latin typeface="Arial" pitchFamily="34" charset="0"/>
+                <a:ea typeface="Arial" pitchFamily="34" charset="-122"/>
+                <a:cs typeface="Arial" pitchFamily="34" charset="-120"/>
+              </a:rPr>
+              <a:t>CHAPTER 04</a:t>
+            </a:r>
+            <a:endParaRPr lang="en-US" sz="1150" dirty="0"/>
+          </a:p>
+        </p:txBody>
+      </p:sp>
+      <p:pic>
+        <p:nvPicPr>
+          <p:cNvPr id="5" name="Image 1" descr="/Users/danwahlin/.copilot/session-state/56a7a0da-def8-48d4-b5e8-0ac3878cb8dd/files/slides-build/icons/FaGithub-1F2328.png">
+            <a:hlinkClick r:id="rId3" tooltip="https://github.com/github/copilot-app-for-beginners/tree/main/04-skills-custom-agents"/>
+          </p:cNvPr>
+          <p:cNvPicPr>
+            <a:picLocks noChangeAspect="1"/>
+          </p:cNvPicPr>
+          <p:nvPr/>
+        </p:nvPicPr>
+        <p:blipFill>
+          <a:blip r:embed="rId2"/>
+          <a:stretch>
+            <a:fillRect/>
+          </a:stretch>
+        </p:blipFill>
+        <p:spPr>
+          <a:xfrm>
             <a:off x="8610600" y="165050"/>
             <a:ext cx="304800" cy="304800"/>
           </a:xfrm>
@@ -5427,7 +5323,7 @@
       </p:pic>
       <p:sp>
         <p:nvSpPr>
-          <p:cNvPr id="6" name="Text 3"/>
+          <p:cNvPr id="6" name="Text 2"/>
           <p:cNvSpPr/>
           <p:nvPr/>
         </p:nvSpPr>
@@ -5466,7 +5362,7 @@
       </p:sp>
       <p:sp>
         <p:nvSpPr>
-          <p:cNvPr id="7" name="Text 4"/>
+          <p:cNvPr id="7" name="Text 3"/>
           <p:cNvSpPr/>
           <p:nvPr/>
         </p:nvSpPr>
@@ -5511,7 +5407,7 @@
       </p:sp>
       <p:sp>
         <p:nvSpPr>
-          <p:cNvPr id="8" name="Text 5"/>
+          <p:cNvPr id="8" name="Text 4"/>
           <p:cNvSpPr/>
           <p:nvPr/>
         </p:nvSpPr>
@@ -5556,7 +5452,7 @@
       </p:sp>
       <p:sp>
         <p:nvSpPr>
-          <p:cNvPr id="9" name="Text 6"/>
+          <p:cNvPr id="9" name="Text 5"/>
           <p:cNvSpPr/>
           <p:nvPr/>
         </p:nvSpPr>
@@ -5599,14 +5495,14 @@
       </p:sp>
       <p:pic>
         <p:nvPicPr>
-          <p:cNvPr id="10" name="Image 1" descr="/Users/danwahlin/.copilot/session-state/56a7a0da-def8-48d4-b5e8-0ac3878cb8dd/files/slides-build/img/04-agent-picker-crop.png">    </p:cNvPr>
+          <p:cNvPr id="10" name="Image 2" descr="/Users/danwahlin/.copilot/session-state/56a7a0da-def8-48d4-b5e8-0ac3878cb8dd/files/slides-build/img/04-agent-picker-crop.png">    </p:cNvPr>
           <p:cNvPicPr>
             <a:picLocks noChangeAspect="1"/>
           </p:cNvPicPr>
           <p:nvPr/>
         </p:nvPicPr>
         <p:blipFill>
-          <a:blip r:embed="rId3"/>
+          <a:blip r:embed="rId4"/>
           <a:stretch>
             <a:fillRect/>
           </a:stretch>
@@ -5623,7 +5519,7 @@
       </p:pic>
       <p:sp>
         <p:nvSpPr>
-          <p:cNvPr id="11" name="Text 7"/>
+          <p:cNvPr id="11" name="Text 6"/>
           <p:cNvSpPr/>
           <p:nvPr/>
         </p:nvSpPr>
@@ -5659,7 +5555,7 @@
       </p:sp>
       <p:sp>
         <p:nvSpPr>
-          <p:cNvPr id="12" name="Text 8"/>
+          <p:cNvPr id="12" name="Text 7"/>
           <p:cNvSpPr/>
           <p:nvPr/>
         </p:nvSpPr>
@@ -5691,7 +5587,7 @@
       </p:sp>
       <p:sp>
         <p:nvSpPr>
-          <p:cNvPr id="13" name="Text 9"/>
+          <p:cNvPr id="13" name="Text 8"/>
           <p:cNvSpPr/>
           <p:nvPr/>
         </p:nvSpPr>
@@ -5730,7 +5626,7 @@
       </p:sp>
       <p:sp>
         <p:nvSpPr>
-          <p:cNvPr id="14" name="Text 10"/>
+          <p:cNvPr id="14" name="Text 9"/>
           <p:cNvSpPr/>
           <p:nvPr/>
         </p:nvSpPr>
@@ -5772,7 +5668,7 @@
       </p:sp>
       <p:sp>
         <p:nvSpPr>
-          <p:cNvPr id="15" name="Text 11"/>
+          <p:cNvPr id="15" name="Text 10"/>
           <p:cNvSpPr/>
           <p:nvPr/>
         </p:nvSpPr>
@@ -5814,7 +5710,7 @@
       </p:sp>
       <p:sp>
         <p:nvSpPr>
-          <p:cNvPr id="16" name="Text 12"/>
+          <p:cNvPr id="16" name="Text 11"/>
           <p:cNvSpPr/>
           <p:nvPr/>
         </p:nvSpPr>
@@ -5850,7 +5746,7 @@
       </p:sp>
       <p:sp>
         <p:nvSpPr>
-          <p:cNvPr id="17" name="Text 13"/>
+          <p:cNvPr id="17" name="Text 12"/>
           <p:cNvSpPr/>
           <p:nvPr/>
         </p:nvSpPr>
@@ -5882,7 +5778,7 @@
       </p:sp>
       <p:sp>
         <p:nvSpPr>
-          <p:cNvPr id="18" name="Text 14"/>
+          <p:cNvPr id="18" name="Text 13"/>
           <p:cNvSpPr/>
           <p:nvPr/>
         </p:nvSpPr>
@@ -5921,7 +5817,7 @@
       </p:sp>
       <p:sp>
         <p:nvSpPr>
-          <p:cNvPr id="19" name="Text 15"/>
+          <p:cNvPr id="19" name="Text 14"/>
           <p:cNvSpPr/>
           <p:nvPr/>
         </p:nvSpPr>
@@ -5963,7 +5859,7 @@
       </p:sp>
       <p:sp>
         <p:nvSpPr>
-          <p:cNvPr id="20" name="Text 16"/>
+          <p:cNvPr id="20" name="Text 15"/>
           <p:cNvSpPr/>
           <p:nvPr/>
         </p:nvSpPr>
@@ -6039,7 +5935,7 @@
       </p:sp>
       <p:sp>
         <p:nvSpPr>
-          <p:cNvPr id="21" name="Text 17"/>
+          <p:cNvPr id="21" name="Text 16"/>
           <p:cNvSpPr/>
           <p:nvPr/>
         </p:nvSpPr>
@@ -6075,7 +5971,7 @@
       </p:sp>
       <p:sp>
         <p:nvSpPr>
-          <p:cNvPr id="22" name="Text 18"/>
+          <p:cNvPr id="22" name="Text 17"/>
           <p:cNvSpPr/>
           <p:nvPr/>
         </p:nvSpPr>
@@ -6107,7 +6003,7 @@
       </p:sp>
       <p:sp>
         <p:nvSpPr>
-          <p:cNvPr id="23" name="Text 19"/>
+          <p:cNvPr id="23" name="Text 18"/>
           <p:cNvSpPr/>
           <p:nvPr/>
         </p:nvSpPr>
@@ -6146,7 +6042,7 @@
       </p:sp>
       <p:sp>
         <p:nvSpPr>
-          <p:cNvPr id="24" name="Text 20"/>
+          <p:cNvPr id="24" name="Text 19"/>
           <p:cNvSpPr/>
           <p:nvPr/>
         </p:nvSpPr>
@@ -6188,7 +6084,7 @@
       </p:sp>
       <p:sp>
         <p:nvSpPr>
-          <p:cNvPr id="25" name="Text 21"/>
+          <p:cNvPr id="25" name="Text 20"/>
           <p:cNvSpPr/>
           <p:nvPr/>
         </p:nvSpPr>
@@ -6260,112 +6156,9 @@
           <a:chExt cx="0" cy="0"/>
         </a:xfrm>
       </p:grpSpPr>
-      <p:sp>
-        <p:nvSpPr>
-          <p:cNvPr id="2" name="Text 0"/>
-          <p:cNvSpPr/>
-          <p:nvPr/>
-        </p:nvSpPr>
-        <p:spPr>
-          <a:xfrm>
-            <a:off x="0" y="0"/>
-            <a:ext cx="9144000" cy="76200"/>
-          </a:xfrm>
-          <a:prstGeom prst="rect">
-            <a:avLst/>
-          </a:prstGeom>
-          <a:solidFill>
-            <a:srgbClr val="8250DF"/>
-          </a:solidFill>
-          <a:ln/>
-        </p:spPr>
-        <p:txBody>
-          <a:bodyPr wrap="square" rtlCol="0" anchor="ctr"/>
-          <a:lstStyle/>
-          <a:p>
-            <a:pPr indent="0" marL="0">
-              <a:buNone/>
-            </a:pPr>
-            <a:endParaRPr lang="en-US" dirty="0"/>
-          </a:p>
-        </p:txBody>
-      </p:sp>
-      <p:sp>
-        <p:nvSpPr>
-          <p:cNvPr id="3" name="Text 1"/>
-          <p:cNvSpPr/>
-          <p:nvPr/>
-        </p:nvSpPr>
-        <p:spPr>
-          <a:xfrm>
-            <a:off x="7340501" y="177701"/>
-            <a:ext cx="1168301" cy="279350"/>
-          </a:xfrm>
-          <a:prstGeom prst="roundRect">
-            <a:avLst>
-              <a:gd name="adj" fmla="val 22731"/>
-            </a:avLst>
-          </a:prstGeom>
-          <a:solidFill>
-            <a:srgbClr val="1A7F37"/>
-          </a:solidFill>
-          <a:ln/>
-        </p:spPr>
-        <p:txBody>
-          <a:bodyPr wrap="square" rtlCol="0" anchor="ctr"/>
-          <a:lstStyle/>
-          <a:p>
-            <a:pPr indent="0" marL="0">
-              <a:buNone/>
-            </a:pPr>
-            <a:endParaRPr lang="en-US" dirty="0"/>
-          </a:p>
-        </p:txBody>
-      </p:sp>
-      <p:sp>
-        <p:nvSpPr>
-          <p:cNvPr id="4" name="Text 2"/>
-          <p:cNvSpPr/>
-          <p:nvPr/>
-        </p:nvSpPr>
-        <p:spPr>
-          <a:xfrm>
-            <a:off x="7461041" y="231577"/>
-            <a:ext cx="927071" cy="171450"/>
-          </a:xfrm>
-          <a:prstGeom prst="rect">
-            <a:avLst/>
-          </a:prstGeom>
-          <a:noFill/>
-          <a:ln/>
-        </p:spPr>
-        <p:txBody>
-          <a:bodyPr wrap="square" lIns="0" tIns="0" rIns="0" bIns="0" rtlCol="0" anchor="t"/>
-          <a:lstStyle/>
-          <a:p>
-            <a:pPr algn="ctr" indent="0" marL="0">
-              <a:buNone/>
-            </a:pPr>
-            <a:r>
-              <a:rPr lang="en-US" sz="1150" b="1" dirty="0">
-                <a:solidFill>
-                  <a:srgbClr val="FFFFFF"/>
-                </a:solidFill>
-                <a:latin typeface="Arial" pitchFamily="34" charset="0"/>
-                <a:ea typeface="Arial" pitchFamily="34" charset="-122"/>
-                <a:cs typeface="Arial" pitchFamily="34" charset="-120"/>
-              </a:rPr>
-              <a:t>CHAPTER 04</a:t>
-            </a:r>
-            <a:endParaRPr lang="en-US" sz="1150" dirty="0"/>
-          </a:p>
-        </p:txBody>
-      </p:sp>
       <p:pic>
         <p:nvPicPr>
-          <p:cNvPr id="5" name="Image 0" descr="/Users/danwahlin/.copilot/session-state/56a7a0da-def8-48d4-b5e8-0ac3878cb8dd/files/slides-build/icons/FaGithub-1F2328.png">
-            <a:hlinkClick r:id="rId2" tooltip="https://github.com/github/copilot-app-for-beginners/tree/main/04-skills-custom-agents"/>
-          </p:cNvPr>
+          <p:cNvPr id="2" name="Image 0" descr="/Users/danwahlin/.copilot/session-state/56a7a0da-def8-48d4-b5e8-0ac3878cb8dd/files/slides-build/img/grad-corner.png">    </p:cNvPr>
           <p:cNvPicPr>
             <a:picLocks noChangeAspect="1"/>
           </p:cNvPicPr>
@@ -6379,6 +6172,103 @@
         </p:blipFill>
         <p:spPr>
           <a:xfrm>
+            <a:off x="6349901" y="0"/>
+            <a:ext cx="2793950" cy="1308050"/>
+          </a:xfrm>
+          <a:prstGeom prst="rect">
+            <a:avLst/>
+          </a:prstGeom>
+        </p:spPr>
+      </p:pic>
+      <p:sp>
+        <p:nvSpPr>
+          <p:cNvPr id="3" name="Text 0"/>
+          <p:cNvSpPr/>
+          <p:nvPr/>
+        </p:nvSpPr>
+        <p:spPr>
+          <a:xfrm>
+            <a:off x="7340501" y="177701"/>
+            <a:ext cx="1168301" cy="279350"/>
+          </a:xfrm>
+          <a:prstGeom prst="roundRect">
+            <a:avLst>
+              <a:gd name="adj" fmla="val 22731"/>
+            </a:avLst>
+          </a:prstGeom>
+          <a:solidFill>
+            <a:srgbClr val="1A7F37"/>
+          </a:solidFill>
+          <a:ln/>
+        </p:spPr>
+        <p:txBody>
+          <a:bodyPr wrap="square" rtlCol="0" anchor="ctr"/>
+          <a:lstStyle/>
+          <a:p>
+            <a:pPr indent="0" marL="0">
+              <a:buNone/>
+            </a:pPr>
+            <a:endParaRPr lang="en-US" dirty="0"/>
+          </a:p>
+        </p:txBody>
+      </p:sp>
+      <p:sp>
+        <p:nvSpPr>
+          <p:cNvPr id="4" name="Text 1"/>
+          <p:cNvSpPr/>
+          <p:nvPr/>
+        </p:nvSpPr>
+        <p:spPr>
+          <a:xfrm>
+            <a:off x="7461041" y="231577"/>
+            <a:ext cx="927071" cy="171450"/>
+          </a:xfrm>
+          <a:prstGeom prst="rect">
+            <a:avLst/>
+          </a:prstGeom>
+          <a:noFill/>
+          <a:ln/>
+        </p:spPr>
+        <p:txBody>
+          <a:bodyPr wrap="square" lIns="0" tIns="0" rIns="0" bIns="0" rtlCol="0" anchor="t"/>
+          <a:lstStyle/>
+          <a:p>
+            <a:pPr algn="ctr" indent="0" marL="0">
+              <a:buNone/>
+            </a:pPr>
+            <a:r>
+              <a:rPr lang="en-US" sz="1150" b="1" dirty="0">
+                <a:solidFill>
+                  <a:srgbClr val="FFFFFF"/>
+                </a:solidFill>
+                <a:latin typeface="Arial" pitchFamily="34" charset="0"/>
+                <a:ea typeface="Arial" pitchFamily="34" charset="-122"/>
+                <a:cs typeface="Arial" pitchFamily="34" charset="-120"/>
+              </a:rPr>
+              <a:t>CHAPTER 04</a:t>
+            </a:r>
+            <a:endParaRPr lang="en-US" sz="1150" dirty="0"/>
+          </a:p>
+        </p:txBody>
+      </p:sp>
+      <p:pic>
+        <p:nvPicPr>
+          <p:cNvPr id="5" name="Image 1" descr="/Users/danwahlin/.copilot/session-state/56a7a0da-def8-48d4-b5e8-0ac3878cb8dd/files/slides-build/icons/FaGithub-1F2328.png">
+            <a:hlinkClick r:id="rId3" tooltip="https://github.com/github/copilot-app-for-beginners/tree/main/04-skills-custom-agents"/>
+          </p:cNvPr>
+          <p:cNvPicPr>
+            <a:picLocks noChangeAspect="1"/>
+          </p:cNvPicPr>
+          <p:nvPr/>
+        </p:nvPicPr>
+        <p:blipFill>
+          <a:blip r:embed="rId2"/>
+          <a:stretch>
+            <a:fillRect/>
+          </a:stretch>
+        </p:blipFill>
+        <p:spPr>
+          <a:xfrm>
             <a:off x="8610600" y="165050"/>
             <a:ext cx="304800" cy="304800"/>
           </a:xfrm>
@@ -6389,7 +6279,7 @@
       </p:pic>
       <p:sp>
         <p:nvSpPr>
-          <p:cNvPr id="6" name="Text 3"/>
+          <p:cNvPr id="6" name="Text 2"/>
           <p:cNvSpPr/>
           <p:nvPr/>
         </p:nvSpPr>
@@ -6428,7 +6318,7 @@
       </p:sp>
       <p:sp>
         <p:nvSpPr>
-          <p:cNvPr id="7" name="Text 4"/>
+          <p:cNvPr id="7" name="Text 3"/>
           <p:cNvSpPr/>
           <p:nvPr/>
         </p:nvSpPr>
@@ -6473,7 +6363,7 @@
       </p:sp>
       <p:sp>
         <p:nvSpPr>
-          <p:cNvPr id="8" name="Text 5"/>
+          <p:cNvPr id="8" name="Text 4"/>
           <p:cNvSpPr/>
           <p:nvPr/>
         </p:nvSpPr>
@@ -6509,7 +6399,7 @@
       </p:sp>
       <p:sp>
         <p:nvSpPr>
-          <p:cNvPr id="9" name="Text 6"/>
+          <p:cNvPr id="9" name="Text 5"/>
           <p:cNvSpPr/>
           <p:nvPr/>
         </p:nvSpPr>
@@ -6541,14 +6431,14 @@
       </p:sp>
       <p:pic>
         <p:nvPicPr>
-          <p:cNvPr id="10" name="Image 1" descr="/Users/danwahlin/.copilot/session-state/56a7a0da-def8-48d4-b5e8-0ac3878cb8dd/files/slides-build/icons/GoLock-1A7F37.png">    </p:cNvPr>
+          <p:cNvPr id="10" name="Image 2" descr="/Users/danwahlin/.copilot/session-state/56a7a0da-def8-48d4-b5e8-0ac3878cb8dd/files/slides-build/icons/GoLock-1A7F37.png">    </p:cNvPr>
           <p:cNvPicPr>
             <a:picLocks noChangeAspect="1"/>
           </p:cNvPicPr>
           <p:nvPr/>
         </p:nvPicPr>
         <p:blipFill>
-          <a:blip r:embed="rId3"/>
+          <a:blip r:embed="rId4"/>
           <a:stretch>
             <a:fillRect/>
           </a:stretch>
@@ -6565,7 +6455,7 @@
       </p:pic>
       <p:sp>
         <p:nvSpPr>
-          <p:cNvPr id="11" name="Text 7"/>
+          <p:cNvPr id="11" name="Text 6"/>
           <p:cNvSpPr/>
           <p:nvPr/>
         </p:nvSpPr>
@@ -6624,7 +6514,7 @@
       </p:sp>
       <p:sp>
         <p:nvSpPr>
-          <p:cNvPr id="12" name="Text 8"/>
+          <p:cNvPr id="12" name="Text 7"/>
           <p:cNvSpPr/>
           <p:nvPr/>
         </p:nvSpPr>
@@ -6717,7 +6607,7 @@
       </p:sp>
       <p:sp>
         <p:nvSpPr>
-          <p:cNvPr id="13" name="Text 9"/>
+          <p:cNvPr id="13" name="Text 8"/>
           <p:cNvSpPr/>
           <p:nvPr/>
         </p:nvSpPr>
@@ -6753,7 +6643,7 @@
       </p:sp>
       <p:sp>
         <p:nvSpPr>
-          <p:cNvPr id="14" name="Text 10"/>
+          <p:cNvPr id="14" name="Text 9"/>
           <p:cNvSpPr/>
           <p:nvPr/>
         </p:nvSpPr>
@@ -6785,14 +6675,14 @@
       </p:sp>
       <p:pic>
         <p:nvPicPr>
-          <p:cNvPr id="15" name="Image 2" descr="/Users/danwahlin/.copilot/session-state/56a7a0da-def8-48d4-b5e8-0ac3878cb8dd/files/slides-build/icons/GoUnlock-CF222E.png">    </p:cNvPr>
+          <p:cNvPr id="15" name="Image 3" descr="/Users/danwahlin/.copilot/session-state/56a7a0da-def8-48d4-b5e8-0ac3878cb8dd/files/slides-build/icons/GoUnlock-CF222E.png">    </p:cNvPr>
           <p:cNvPicPr>
             <a:picLocks noChangeAspect="1"/>
           </p:cNvPicPr>
           <p:nvPr/>
         </p:nvPicPr>
         <p:blipFill>
-          <a:blip r:embed="rId4"/>
+          <a:blip r:embed="rId5"/>
           <a:stretch>
             <a:fillRect/>
           </a:stretch>
@@ -6809,7 +6699,7 @@
       </p:pic>
       <p:sp>
         <p:nvSpPr>
-          <p:cNvPr id="16" name="Text 11"/>
+          <p:cNvPr id="16" name="Text 10"/>
           <p:cNvSpPr/>
           <p:nvPr/>
         </p:nvSpPr>
@@ -6851,7 +6741,7 @@
       </p:sp>
       <p:sp>
         <p:nvSpPr>
-          <p:cNvPr id="17" name="Text 12"/>
+          <p:cNvPr id="17" name="Text 11"/>
           <p:cNvSpPr/>
           <p:nvPr/>
         </p:nvSpPr>
@@ -6893,7 +6783,7 @@
       </p:sp>
       <p:sp>
         <p:nvSpPr>
-          <p:cNvPr id="18" name="Text 13"/>
+          <p:cNvPr id="18" name="Text 12"/>
           <p:cNvSpPr/>
           <p:nvPr/>
         </p:nvSpPr>
@@ -6929,7 +6819,7 @@
       </p:sp>
       <p:sp>
         <p:nvSpPr>
-          <p:cNvPr id="19" name="Text 14"/>
+          <p:cNvPr id="19" name="Text 13"/>
           <p:cNvSpPr/>
           <p:nvPr/>
         </p:nvSpPr>
@@ -6961,14 +6851,14 @@
       </p:sp>
       <p:pic>
         <p:nvPicPr>
-          <p:cNvPr id="20" name="Image 3" descr="/Users/danwahlin/.copilot/session-state/56a7a0da-def8-48d4-b5e8-0ac3878cb8dd/files/slides-build/icons/GoPerson-0969DA.png">    </p:cNvPr>
+          <p:cNvPr id="20" name="Image 4" descr="/Users/danwahlin/.copilot/session-state/56a7a0da-def8-48d4-b5e8-0ac3878cb8dd/files/slides-build/icons/GoPerson-0969DA.png">    </p:cNvPr>
           <p:cNvPicPr>
             <a:picLocks noChangeAspect="1"/>
           </p:cNvPicPr>
           <p:nvPr/>
         </p:nvPicPr>
         <p:blipFill>
-          <a:blip r:embed="rId5"/>
+          <a:blip r:embed="rId6"/>
           <a:stretch>
             <a:fillRect/>
           </a:stretch>
@@ -6985,7 +6875,7 @@
       </p:pic>
       <p:sp>
         <p:nvSpPr>
-          <p:cNvPr id="21" name="Text 15"/>
+          <p:cNvPr id="21" name="Text 14"/>
           <p:cNvSpPr/>
           <p:nvPr/>
         </p:nvSpPr>
@@ -7027,7 +6917,7 @@
       </p:sp>
       <p:sp>
         <p:nvSpPr>
-          <p:cNvPr id="22" name="Text 16"/>
+          <p:cNvPr id="22" name="Text 15"/>
           <p:cNvSpPr/>
           <p:nvPr/>
         </p:nvSpPr>
@@ -7099,112 +6989,9 @@
           <a:chExt cx="0" cy="0"/>
         </a:xfrm>
       </p:grpSpPr>
-      <p:sp>
-        <p:nvSpPr>
-          <p:cNvPr id="2" name="Text 0"/>
-          <p:cNvSpPr/>
-          <p:nvPr/>
-        </p:nvSpPr>
-        <p:spPr>
-          <a:xfrm>
-            <a:off x="0" y="0"/>
-            <a:ext cx="9144000" cy="76200"/>
-          </a:xfrm>
-          <a:prstGeom prst="rect">
-            <a:avLst/>
-          </a:prstGeom>
-          <a:solidFill>
-            <a:srgbClr val="BC4C00"/>
-          </a:solidFill>
-          <a:ln/>
-        </p:spPr>
-        <p:txBody>
-          <a:bodyPr wrap="square" rtlCol="0" anchor="ctr"/>
-          <a:lstStyle/>
-          <a:p>
-            <a:pPr indent="0" marL="0">
-              <a:buNone/>
-            </a:pPr>
-            <a:endParaRPr lang="en-US" dirty="0"/>
-          </a:p>
-        </p:txBody>
-      </p:sp>
-      <p:sp>
-        <p:nvSpPr>
-          <p:cNvPr id="3" name="Text 1"/>
-          <p:cNvSpPr/>
-          <p:nvPr/>
-        </p:nvSpPr>
-        <p:spPr>
-          <a:xfrm>
-            <a:off x="7340501" y="177701"/>
-            <a:ext cx="1168301" cy="279350"/>
-          </a:xfrm>
-          <a:prstGeom prst="roundRect">
-            <a:avLst>
-              <a:gd name="adj" fmla="val 22731"/>
-            </a:avLst>
-          </a:prstGeom>
-          <a:solidFill>
-            <a:srgbClr val="1A7F37"/>
-          </a:solidFill>
-          <a:ln/>
-        </p:spPr>
-        <p:txBody>
-          <a:bodyPr wrap="square" rtlCol="0" anchor="ctr"/>
-          <a:lstStyle/>
-          <a:p>
-            <a:pPr indent="0" marL="0">
-              <a:buNone/>
-            </a:pPr>
-            <a:endParaRPr lang="en-US" dirty="0"/>
-          </a:p>
-        </p:txBody>
-      </p:sp>
-      <p:sp>
-        <p:nvSpPr>
-          <p:cNvPr id="4" name="Text 2"/>
-          <p:cNvSpPr/>
-          <p:nvPr/>
-        </p:nvSpPr>
-        <p:spPr>
-          <a:xfrm>
-            <a:off x="7461041" y="231577"/>
-            <a:ext cx="927071" cy="171450"/>
-          </a:xfrm>
-          <a:prstGeom prst="rect">
-            <a:avLst/>
-          </a:prstGeom>
-          <a:noFill/>
-          <a:ln/>
-        </p:spPr>
-        <p:txBody>
-          <a:bodyPr wrap="square" lIns="0" tIns="0" rIns="0" bIns="0" rtlCol="0" anchor="t"/>
-          <a:lstStyle/>
-          <a:p>
-            <a:pPr algn="ctr" indent="0" marL="0">
-              <a:buNone/>
-            </a:pPr>
-            <a:r>
-              <a:rPr lang="en-US" sz="1150" b="1" dirty="0">
-                <a:solidFill>
-                  <a:srgbClr val="FFFFFF"/>
-                </a:solidFill>
-                <a:latin typeface="Arial" pitchFamily="34" charset="0"/>
-                <a:ea typeface="Arial" pitchFamily="34" charset="-122"/>
-                <a:cs typeface="Arial" pitchFamily="34" charset="-120"/>
-              </a:rPr>
-              <a:t>CHAPTER 04</a:t>
-            </a:r>
-            <a:endParaRPr lang="en-US" sz="1150" dirty="0"/>
-          </a:p>
-        </p:txBody>
-      </p:sp>
       <p:pic>
         <p:nvPicPr>
-          <p:cNvPr id="5" name="Image 0" descr="/Users/danwahlin/.copilot/session-state/56a7a0da-def8-48d4-b5e8-0ac3878cb8dd/files/slides-build/icons/FaGithub-1F2328.png">
-            <a:hlinkClick r:id="rId2" tooltip="https://github.com/github/copilot-app-for-beginners/tree/main/04-skills-custom-agents"/>
-          </p:cNvPr>
+          <p:cNvPr id="2" name="Image 0" descr="/Users/danwahlin/.copilot/session-state/56a7a0da-def8-48d4-b5e8-0ac3878cb8dd/files/slides-build/img/grad-corner.png">    </p:cNvPr>
           <p:cNvPicPr>
             <a:picLocks noChangeAspect="1"/>
           </p:cNvPicPr>
@@ -7218,6 +7005,103 @@
         </p:blipFill>
         <p:spPr>
           <a:xfrm>
+            <a:off x="6349901" y="0"/>
+            <a:ext cx="2793950" cy="1308050"/>
+          </a:xfrm>
+          <a:prstGeom prst="rect">
+            <a:avLst/>
+          </a:prstGeom>
+        </p:spPr>
+      </p:pic>
+      <p:sp>
+        <p:nvSpPr>
+          <p:cNvPr id="3" name="Text 0"/>
+          <p:cNvSpPr/>
+          <p:nvPr/>
+        </p:nvSpPr>
+        <p:spPr>
+          <a:xfrm>
+            <a:off x="7340501" y="177701"/>
+            <a:ext cx="1168301" cy="279350"/>
+          </a:xfrm>
+          <a:prstGeom prst="roundRect">
+            <a:avLst>
+              <a:gd name="adj" fmla="val 22731"/>
+            </a:avLst>
+          </a:prstGeom>
+          <a:solidFill>
+            <a:srgbClr val="1A7F37"/>
+          </a:solidFill>
+          <a:ln/>
+        </p:spPr>
+        <p:txBody>
+          <a:bodyPr wrap="square" rtlCol="0" anchor="ctr"/>
+          <a:lstStyle/>
+          <a:p>
+            <a:pPr indent="0" marL="0">
+              <a:buNone/>
+            </a:pPr>
+            <a:endParaRPr lang="en-US" dirty="0"/>
+          </a:p>
+        </p:txBody>
+      </p:sp>
+      <p:sp>
+        <p:nvSpPr>
+          <p:cNvPr id="4" name="Text 1"/>
+          <p:cNvSpPr/>
+          <p:nvPr/>
+        </p:nvSpPr>
+        <p:spPr>
+          <a:xfrm>
+            <a:off x="7461041" y="231577"/>
+            <a:ext cx="927071" cy="171450"/>
+          </a:xfrm>
+          <a:prstGeom prst="rect">
+            <a:avLst/>
+          </a:prstGeom>
+          <a:noFill/>
+          <a:ln/>
+        </p:spPr>
+        <p:txBody>
+          <a:bodyPr wrap="square" lIns="0" tIns="0" rIns="0" bIns="0" rtlCol="0" anchor="t"/>
+          <a:lstStyle/>
+          <a:p>
+            <a:pPr algn="ctr" indent="0" marL="0">
+              <a:buNone/>
+            </a:pPr>
+            <a:r>
+              <a:rPr lang="en-US" sz="1150" b="1" dirty="0">
+                <a:solidFill>
+                  <a:srgbClr val="FFFFFF"/>
+                </a:solidFill>
+                <a:latin typeface="Arial" pitchFamily="34" charset="0"/>
+                <a:ea typeface="Arial" pitchFamily="34" charset="-122"/>
+                <a:cs typeface="Arial" pitchFamily="34" charset="-120"/>
+              </a:rPr>
+              <a:t>CHAPTER 04</a:t>
+            </a:r>
+            <a:endParaRPr lang="en-US" sz="1150" dirty="0"/>
+          </a:p>
+        </p:txBody>
+      </p:sp>
+      <p:pic>
+        <p:nvPicPr>
+          <p:cNvPr id="5" name="Image 1" descr="/Users/danwahlin/.copilot/session-state/56a7a0da-def8-48d4-b5e8-0ac3878cb8dd/files/slides-build/icons/FaGithub-1F2328.png">
+            <a:hlinkClick r:id="rId3" tooltip="https://github.com/github/copilot-app-for-beginners/tree/main/04-skills-custom-agents"/>
+          </p:cNvPr>
+          <p:cNvPicPr>
+            <a:picLocks noChangeAspect="1"/>
+          </p:cNvPicPr>
+          <p:nvPr/>
+        </p:nvPicPr>
+        <p:blipFill>
+          <a:blip r:embed="rId2"/>
+          <a:stretch>
+            <a:fillRect/>
+          </a:stretch>
+        </p:blipFill>
+        <p:spPr>
+          <a:xfrm>
             <a:off x="8610600" y="165050"/>
             <a:ext cx="304800" cy="304800"/>
           </a:xfrm>
@@ -7228,7 +7112,7 @@
       </p:pic>
       <p:sp>
         <p:nvSpPr>
-          <p:cNvPr id="6" name="Text 3"/>
+          <p:cNvPr id="6" name="Text 2"/>
           <p:cNvSpPr/>
           <p:nvPr/>
         </p:nvSpPr>
@@ -7267,7 +7151,7 @@
       </p:sp>
       <p:sp>
         <p:nvSpPr>
-          <p:cNvPr id="7" name="Text 4"/>
+          <p:cNvPr id="7" name="Text 3"/>
           <p:cNvSpPr/>
           <p:nvPr/>
         </p:nvSpPr>
@@ -7312,7 +7196,7 @@
       </p:sp>
       <p:sp>
         <p:nvSpPr>
-          <p:cNvPr id="8" name="Text 5"/>
+          <p:cNvPr id="8" name="Text 4"/>
           <p:cNvSpPr/>
           <p:nvPr/>
         </p:nvSpPr>
@@ -7357,7 +7241,7 @@
       </p:sp>
       <p:sp>
         <p:nvSpPr>
-          <p:cNvPr id="9" name="Text 6"/>
+          <p:cNvPr id="9" name="Text 5"/>
           <p:cNvSpPr/>
           <p:nvPr/>
         </p:nvSpPr>
@@ -7393,7 +7277,7 @@
       </p:sp>
       <p:sp>
         <p:nvSpPr>
-          <p:cNvPr id="10" name="Shape 7"/>
+          <p:cNvPr id="10" name="Shape 6"/>
           <p:cNvSpPr/>
           <p:nvPr/>
         </p:nvSpPr>
@@ -7416,7 +7300,7 @@
       </p:sp>
       <p:sp>
         <p:nvSpPr>
-          <p:cNvPr id="11" name="Text 8"/>
+          <p:cNvPr id="11" name="Text 7"/>
           <p:cNvSpPr/>
           <p:nvPr/>
         </p:nvSpPr>
@@ -7448,7 +7332,7 @@
       </p:sp>
       <p:sp>
         <p:nvSpPr>
-          <p:cNvPr id="12" name="Text 9"/>
+          <p:cNvPr id="12" name="Text 8"/>
           <p:cNvSpPr/>
           <p:nvPr/>
         </p:nvSpPr>
@@ -7487,7 +7371,7 @@
       </p:sp>
       <p:sp>
         <p:nvSpPr>
-          <p:cNvPr id="13" name="Text 10"/>
+          <p:cNvPr id="13" name="Text 9"/>
           <p:cNvSpPr/>
           <p:nvPr/>
         </p:nvSpPr>
@@ -7529,7 +7413,7 @@
       </p:sp>
       <p:sp>
         <p:nvSpPr>
-          <p:cNvPr id="14" name="Text 11"/>
+          <p:cNvPr id="14" name="Text 10"/>
           <p:cNvSpPr/>
           <p:nvPr/>
         </p:nvSpPr>
@@ -7605,7 +7489,7 @@
       </p:sp>
       <p:sp>
         <p:nvSpPr>
-          <p:cNvPr id="15" name="Shape 12"/>
+          <p:cNvPr id="15" name="Shape 11"/>
           <p:cNvSpPr/>
           <p:nvPr/>
         </p:nvSpPr>
@@ -7628,7 +7512,7 @@
       </p:sp>
       <p:sp>
         <p:nvSpPr>
-          <p:cNvPr id="16" name="Text 13"/>
+          <p:cNvPr id="16" name="Text 12"/>
           <p:cNvSpPr/>
           <p:nvPr/>
         </p:nvSpPr>
@@ -7660,7 +7544,7 @@
       </p:sp>
       <p:sp>
         <p:nvSpPr>
-          <p:cNvPr id="17" name="Text 14"/>
+          <p:cNvPr id="17" name="Text 13"/>
           <p:cNvSpPr/>
           <p:nvPr/>
         </p:nvSpPr>
@@ -7699,7 +7583,7 @@
       </p:sp>
       <p:sp>
         <p:nvSpPr>
-          <p:cNvPr id="18" name="Text 15"/>
+          <p:cNvPr id="18" name="Text 14"/>
           <p:cNvSpPr/>
           <p:nvPr/>
         </p:nvSpPr>
@@ -7741,7 +7625,7 @@
       </p:sp>
       <p:sp>
         <p:nvSpPr>
-          <p:cNvPr id="19" name="Text 16"/>
+          <p:cNvPr id="19" name="Text 15"/>
           <p:cNvSpPr/>
           <p:nvPr/>
         </p:nvSpPr>
@@ -7783,7 +7667,7 @@
       </p:sp>
       <p:sp>
         <p:nvSpPr>
-          <p:cNvPr id="20" name="Shape 17"/>
+          <p:cNvPr id="20" name="Shape 16"/>
           <p:cNvSpPr/>
           <p:nvPr/>
         </p:nvSpPr>
@@ -7806,7 +7690,7 @@
       </p:sp>
       <p:sp>
         <p:nvSpPr>
-          <p:cNvPr id="21" name="Text 18"/>
+          <p:cNvPr id="21" name="Text 17"/>
           <p:cNvSpPr/>
           <p:nvPr/>
         </p:nvSpPr>
@@ -7838,7 +7722,7 @@
       </p:sp>
       <p:sp>
         <p:nvSpPr>
-          <p:cNvPr id="22" name="Text 19"/>
+          <p:cNvPr id="22" name="Text 18"/>
           <p:cNvSpPr/>
           <p:nvPr/>
         </p:nvSpPr>
@@ -7877,7 +7761,7 @@
       </p:sp>
       <p:sp>
         <p:nvSpPr>
-          <p:cNvPr id="23" name="Text 20"/>
+          <p:cNvPr id="23" name="Text 19"/>
           <p:cNvSpPr/>
           <p:nvPr/>
         </p:nvSpPr>
@@ -7919,7 +7803,7 @@
       </p:sp>
       <p:sp>
         <p:nvSpPr>
-          <p:cNvPr id="24" name="Text 21"/>
+          <p:cNvPr id="24" name="Text 20"/>
           <p:cNvSpPr/>
           <p:nvPr/>
         </p:nvSpPr>
@@ -7961,7 +7845,7 @@
       </p:sp>
       <p:sp>
         <p:nvSpPr>
-          <p:cNvPr id="25" name="Text 22"/>
+          <p:cNvPr id="25" name="Text 21"/>
           <p:cNvSpPr/>
           <p:nvPr/>
         </p:nvSpPr>
@@ -7993,7 +7877,7 @@
       </p:sp>
       <p:sp>
         <p:nvSpPr>
-          <p:cNvPr id="26" name="Text 23"/>
+          <p:cNvPr id="26" name="Text 22"/>
           <p:cNvSpPr/>
           <p:nvPr/>
         </p:nvSpPr>
@@ -8032,7 +7916,7 @@
       </p:sp>
       <p:sp>
         <p:nvSpPr>
-          <p:cNvPr id="27" name="Text 24"/>
+          <p:cNvPr id="27" name="Text 23"/>
           <p:cNvSpPr/>
           <p:nvPr/>
         </p:nvSpPr>
@@ -8074,7 +7958,7 @@
       </p:sp>
       <p:sp>
         <p:nvSpPr>
-          <p:cNvPr id="28" name="Text 25"/>
+          <p:cNvPr id="28" name="Text 24"/>
           <p:cNvSpPr/>
           <p:nvPr/>
         </p:nvSpPr>
@@ -8116,7 +8000,7 @@
       </p:sp>
       <p:sp>
         <p:nvSpPr>
-          <p:cNvPr id="29" name="Text 26"/>
+          <p:cNvPr id="29" name="Text 25"/>
           <p:cNvSpPr/>
           <p:nvPr/>
         </p:nvSpPr>
@@ -8152,7 +8036,7 @@
       </p:sp>
       <p:sp>
         <p:nvSpPr>
-          <p:cNvPr id="30" name="Text 27"/>
+          <p:cNvPr id="30" name="Text 26"/>
           <p:cNvSpPr/>
           <p:nvPr/>
         </p:nvSpPr>
@@ -8184,14 +8068,14 @@
       </p:sp>
       <p:pic>
         <p:nvPicPr>
-          <p:cNvPr id="31" name="Image 1" descr="/Users/danwahlin/.copilot/session-state/56a7a0da-def8-48d4-b5e8-0ac3878cb8dd/files/slides-build/icons/GoGoal-BC4C00.png">    </p:cNvPr>
+          <p:cNvPr id="31" name="Image 2" descr="/Users/danwahlin/.copilot/session-state/56a7a0da-def8-48d4-b5e8-0ac3878cb8dd/files/slides-build/icons/GoGoal-BC4C00.png">    </p:cNvPr>
           <p:cNvPicPr>
             <a:picLocks noChangeAspect="1"/>
           </p:cNvPicPr>
           <p:nvPr/>
         </p:nvPicPr>
         <p:blipFill>
-          <a:blip r:embed="rId3"/>
+          <a:blip r:embed="rId4"/>
           <a:stretch>
             <a:fillRect/>
           </a:stretch>
@@ -8208,7 +8092,7 @@
       </p:pic>
       <p:sp>
         <p:nvSpPr>
-          <p:cNvPr id="32" name="Text 28"/>
+          <p:cNvPr id="32" name="Text 27"/>
           <p:cNvSpPr/>
           <p:nvPr/>
         </p:nvSpPr>
@@ -8250,7 +8134,7 @@
       </p:sp>
       <p:sp>
         <p:nvSpPr>
-          <p:cNvPr id="33" name="Text 29"/>
+          <p:cNvPr id="33" name="Text 28"/>
           <p:cNvSpPr/>
           <p:nvPr/>
         </p:nvSpPr>
@@ -8322,112 +8206,9 @@
           <a:chExt cx="0" cy="0"/>
         </a:xfrm>
       </p:grpSpPr>
-      <p:sp>
-        <p:nvSpPr>
-          <p:cNvPr id="2" name="Text 0"/>
-          <p:cNvSpPr/>
-          <p:nvPr/>
-        </p:nvSpPr>
-        <p:spPr>
-          <a:xfrm>
-            <a:off x="0" y="0"/>
-            <a:ext cx="9144000" cy="76200"/>
-          </a:xfrm>
-          <a:prstGeom prst="rect">
-            <a:avLst/>
-          </a:prstGeom>
-          <a:solidFill>
-            <a:srgbClr val="1A7F37"/>
-          </a:solidFill>
-          <a:ln/>
-        </p:spPr>
-        <p:txBody>
-          <a:bodyPr wrap="square" rtlCol="0" anchor="ctr"/>
-          <a:lstStyle/>
-          <a:p>
-            <a:pPr indent="0" marL="0">
-              <a:buNone/>
-            </a:pPr>
-            <a:endParaRPr lang="en-US" dirty="0"/>
-          </a:p>
-        </p:txBody>
-      </p:sp>
-      <p:sp>
-        <p:nvSpPr>
-          <p:cNvPr id="3" name="Text 1"/>
-          <p:cNvSpPr/>
-          <p:nvPr/>
-        </p:nvSpPr>
-        <p:spPr>
-          <a:xfrm>
-            <a:off x="7340501" y="177701"/>
-            <a:ext cx="1168301" cy="279350"/>
-          </a:xfrm>
-          <a:prstGeom prst="roundRect">
-            <a:avLst>
-              <a:gd name="adj" fmla="val 22731"/>
-            </a:avLst>
-          </a:prstGeom>
-          <a:solidFill>
-            <a:srgbClr val="1A7F37"/>
-          </a:solidFill>
-          <a:ln/>
-        </p:spPr>
-        <p:txBody>
-          <a:bodyPr wrap="square" rtlCol="0" anchor="ctr"/>
-          <a:lstStyle/>
-          <a:p>
-            <a:pPr indent="0" marL="0">
-              <a:buNone/>
-            </a:pPr>
-            <a:endParaRPr lang="en-US" dirty="0"/>
-          </a:p>
-        </p:txBody>
-      </p:sp>
-      <p:sp>
-        <p:nvSpPr>
-          <p:cNvPr id="4" name="Text 2"/>
-          <p:cNvSpPr/>
-          <p:nvPr/>
-        </p:nvSpPr>
-        <p:spPr>
-          <a:xfrm>
-            <a:off x="7461041" y="231577"/>
-            <a:ext cx="927071" cy="171450"/>
-          </a:xfrm>
-          <a:prstGeom prst="rect">
-            <a:avLst/>
-          </a:prstGeom>
-          <a:noFill/>
-          <a:ln/>
-        </p:spPr>
-        <p:txBody>
-          <a:bodyPr wrap="square" lIns="0" tIns="0" rIns="0" bIns="0" rtlCol="0" anchor="t"/>
-          <a:lstStyle/>
-          <a:p>
-            <a:pPr algn="ctr" indent="0" marL="0">
-              <a:buNone/>
-            </a:pPr>
-            <a:r>
-              <a:rPr lang="en-US" sz="1150" b="1" dirty="0">
-                <a:solidFill>
-                  <a:srgbClr val="FFFFFF"/>
-                </a:solidFill>
-                <a:latin typeface="Arial" pitchFamily="34" charset="0"/>
-                <a:ea typeface="Arial" pitchFamily="34" charset="-122"/>
-                <a:cs typeface="Arial" pitchFamily="34" charset="-120"/>
-              </a:rPr>
-              <a:t>CHAPTER 04</a:t>
-            </a:r>
-            <a:endParaRPr lang="en-US" sz="1150" dirty="0"/>
-          </a:p>
-        </p:txBody>
-      </p:sp>
       <p:pic>
         <p:nvPicPr>
-          <p:cNvPr id="5" name="Image 0" descr="/Users/danwahlin/.copilot/session-state/56a7a0da-def8-48d4-b5e8-0ac3878cb8dd/files/slides-build/icons/FaGithub-1F2328.png">
-            <a:hlinkClick r:id="rId2" tooltip="https://github.com/github/copilot-app-for-beginners/tree/main/04-skills-custom-agents"/>
-          </p:cNvPr>
+          <p:cNvPr id="2" name="Image 0" descr="/Users/danwahlin/.copilot/session-state/56a7a0da-def8-48d4-b5e8-0ac3878cb8dd/files/slides-build/img/grad-corner.png">    </p:cNvPr>
           <p:cNvPicPr>
             <a:picLocks noChangeAspect="1"/>
           </p:cNvPicPr>
@@ -8441,6 +8222,103 @@
         </p:blipFill>
         <p:spPr>
           <a:xfrm>
+            <a:off x="6349901" y="0"/>
+            <a:ext cx="2793950" cy="1308050"/>
+          </a:xfrm>
+          <a:prstGeom prst="rect">
+            <a:avLst/>
+          </a:prstGeom>
+        </p:spPr>
+      </p:pic>
+      <p:sp>
+        <p:nvSpPr>
+          <p:cNvPr id="3" name="Text 0"/>
+          <p:cNvSpPr/>
+          <p:nvPr/>
+        </p:nvSpPr>
+        <p:spPr>
+          <a:xfrm>
+            <a:off x="7340501" y="177701"/>
+            <a:ext cx="1168301" cy="279350"/>
+          </a:xfrm>
+          <a:prstGeom prst="roundRect">
+            <a:avLst>
+              <a:gd name="adj" fmla="val 22731"/>
+            </a:avLst>
+          </a:prstGeom>
+          <a:solidFill>
+            <a:srgbClr val="1A7F37"/>
+          </a:solidFill>
+          <a:ln/>
+        </p:spPr>
+        <p:txBody>
+          <a:bodyPr wrap="square" rtlCol="0" anchor="ctr"/>
+          <a:lstStyle/>
+          <a:p>
+            <a:pPr indent="0" marL="0">
+              <a:buNone/>
+            </a:pPr>
+            <a:endParaRPr lang="en-US" dirty="0"/>
+          </a:p>
+        </p:txBody>
+      </p:sp>
+      <p:sp>
+        <p:nvSpPr>
+          <p:cNvPr id="4" name="Text 1"/>
+          <p:cNvSpPr/>
+          <p:nvPr/>
+        </p:nvSpPr>
+        <p:spPr>
+          <a:xfrm>
+            <a:off x="7461041" y="231577"/>
+            <a:ext cx="927071" cy="171450"/>
+          </a:xfrm>
+          <a:prstGeom prst="rect">
+            <a:avLst/>
+          </a:prstGeom>
+          <a:noFill/>
+          <a:ln/>
+        </p:spPr>
+        <p:txBody>
+          <a:bodyPr wrap="square" lIns="0" tIns="0" rIns="0" bIns="0" rtlCol="0" anchor="t"/>
+          <a:lstStyle/>
+          <a:p>
+            <a:pPr algn="ctr" indent="0" marL="0">
+              <a:buNone/>
+            </a:pPr>
+            <a:r>
+              <a:rPr lang="en-US" sz="1150" b="1" dirty="0">
+                <a:solidFill>
+                  <a:srgbClr val="FFFFFF"/>
+                </a:solidFill>
+                <a:latin typeface="Arial" pitchFamily="34" charset="0"/>
+                <a:ea typeface="Arial" pitchFamily="34" charset="-122"/>
+                <a:cs typeface="Arial" pitchFamily="34" charset="-120"/>
+              </a:rPr>
+              <a:t>CHAPTER 04</a:t>
+            </a:r>
+            <a:endParaRPr lang="en-US" sz="1150" dirty="0"/>
+          </a:p>
+        </p:txBody>
+      </p:sp>
+      <p:pic>
+        <p:nvPicPr>
+          <p:cNvPr id="5" name="Image 1" descr="/Users/danwahlin/.copilot/session-state/56a7a0da-def8-48d4-b5e8-0ac3878cb8dd/files/slides-build/icons/FaGithub-1F2328.png">
+            <a:hlinkClick r:id="rId3" tooltip="https://github.com/github/copilot-app-for-beginners/tree/main/04-skills-custom-agents"/>
+          </p:cNvPr>
+          <p:cNvPicPr>
+            <a:picLocks noChangeAspect="1"/>
+          </p:cNvPicPr>
+          <p:nvPr/>
+        </p:nvPicPr>
+        <p:blipFill>
+          <a:blip r:embed="rId2"/>
+          <a:stretch>
+            <a:fillRect/>
+          </a:stretch>
+        </p:blipFill>
+        <p:spPr>
+          <a:xfrm>
             <a:off x="8610600" y="165050"/>
             <a:ext cx="304800" cy="304800"/>
           </a:xfrm>
@@ -8451,7 +8329,7 @@
       </p:pic>
       <p:sp>
         <p:nvSpPr>
-          <p:cNvPr id="6" name="Text 3"/>
+          <p:cNvPr id="6" name="Text 2"/>
           <p:cNvSpPr/>
           <p:nvPr/>
         </p:nvSpPr>
@@ -8490,7 +8368,7 @@
       </p:sp>
       <p:sp>
         <p:nvSpPr>
-          <p:cNvPr id="7" name="Text 4"/>
+          <p:cNvPr id="7" name="Text 3"/>
           <p:cNvSpPr/>
           <p:nvPr/>
         </p:nvSpPr>
@@ -8535,7 +8413,7 @@
       </p:sp>
       <p:sp>
         <p:nvSpPr>
-          <p:cNvPr id="8" name="Text 5"/>
+          <p:cNvPr id="8" name="Text 4"/>
           <p:cNvSpPr/>
           <p:nvPr/>
         </p:nvSpPr>
@@ -8571,7 +8449,7 @@
       </p:sp>
       <p:sp>
         <p:nvSpPr>
-          <p:cNvPr id="9" name="Text 6"/>
+          <p:cNvPr id="9" name="Text 5"/>
           <p:cNvSpPr/>
           <p:nvPr/>
         </p:nvSpPr>
@@ -8603,7 +8481,7 @@
       </p:sp>
       <p:sp>
         <p:nvSpPr>
-          <p:cNvPr id="10" name="Text 7"/>
+          <p:cNvPr id="10" name="Text 6"/>
           <p:cNvSpPr/>
           <p:nvPr/>
         </p:nvSpPr>
@@ -8642,7 +8520,7 @@
       </p:sp>
       <p:sp>
         <p:nvSpPr>
-          <p:cNvPr id="11" name="Text 8"/>
+          <p:cNvPr id="11" name="Text 7"/>
           <p:cNvSpPr/>
           <p:nvPr/>
         </p:nvSpPr>
@@ -8684,7 +8562,7 @@
       </p:sp>
       <p:sp>
         <p:nvSpPr>
-          <p:cNvPr id="12" name="Text 9"/>
+          <p:cNvPr id="12" name="Text 8"/>
           <p:cNvSpPr/>
           <p:nvPr/>
         </p:nvSpPr>
@@ -8720,7 +8598,7 @@
       </p:sp>
       <p:sp>
         <p:nvSpPr>
-          <p:cNvPr id="13" name="Text 10"/>
+          <p:cNvPr id="13" name="Text 9"/>
           <p:cNvSpPr/>
           <p:nvPr/>
         </p:nvSpPr>
@@ -8752,7 +8630,7 @@
       </p:sp>
       <p:sp>
         <p:nvSpPr>
-          <p:cNvPr id="14" name="Text 11"/>
+          <p:cNvPr id="14" name="Text 10"/>
           <p:cNvSpPr/>
           <p:nvPr/>
         </p:nvSpPr>
@@ -8791,7 +8669,7 @@
       </p:sp>
       <p:sp>
         <p:nvSpPr>
-          <p:cNvPr id="15" name="Text 12"/>
+          <p:cNvPr id="15" name="Text 11"/>
           <p:cNvSpPr/>
           <p:nvPr/>
         </p:nvSpPr>
@@ -8833,7 +8711,7 @@
       </p:sp>
       <p:sp>
         <p:nvSpPr>
-          <p:cNvPr id="16" name="Text 13"/>
+          <p:cNvPr id="16" name="Text 12"/>
           <p:cNvSpPr/>
           <p:nvPr/>
         </p:nvSpPr>
@@ -8869,7 +8747,7 @@
       </p:sp>
       <p:sp>
         <p:nvSpPr>
-          <p:cNvPr id="17" name="Text 14"/>
+          <p:cNvPr id="17" name="Text 13"/>
           <p:cNvSpPr/>
           <p:nvPr/>
         </p:nvSpPr>
@@ -8901,7 +8779,7 @@
       </p:sp>
       <p:sp>
         <p:nvSpPr>
-          <p:cNvPr id="18" name="Text 15"/>
+          <p:cNvPr id="18" name="Text 14"/>
           <p:cNvSpPr/>
           <p:nvPr/>
         </p:nvSpPr>
@@ -8940,7 +8818,7 @@
       </p:sp>
       <p:sp>
         <p:nvSpPr>
-          <p:cNvPr id="19" name="Text 16"/>
+          <p:cNvPr id="19" name="Text 15"/>
           <p:cNvSpPr/>
           <p:nvPr/>
         </p:nvSpPr>
@@ -9016,7 +8894,7 @@
       </p:sp>
       <p:sp>
         <p:nvSpPr>
-          <p:cNvPr id="20" name="Text 17"/>
+          <p:cNvPr id="20" name="Text 16"/>
           <p:cNvSpPr/>
           <p:nvPr/>
         </p:nvSpPr>
@@ -9052,7 +8930,7 @@
       </p:sp>
       <p:sp>
         <p:nvSpPr>
-          <p:cNvPr id="21" name="Text 18"/>
+          <p:cNvPr id="21" name="Text 17"/>
           <p:cNvSpPr/>
           <p:nvPr/>
         </p:nvSpPr>
@@ -9084,7 +8962,7 @@
       </p:sp>
       <p:sp>
         <p:nvSpPr>
-          <p:cNvPr id="22" name="Text 19"/>
+          <p:cNvPr id="22" name="Text 18"/>
           <p:cNvSpPr/>
           <p:nvPr/>
         </p:nvSpPr>
@@ -9123,7 +9001,7 @@
       </p:sp>
       <p:sp>
         <p:nvSpPr>
-          <p:cNvPr id="23" name="Text 20"/>
+          <p:cNvPr id="23" name="Text 19"/>
           <p:cNvSpPr/>
           <p:nvPr/>
         </p:nvSpPr>
@@ -9165,7 +9043,7 @@
       </p:sp>
       <p:sp>
         <p:nvSpPr>
-          <p:cNvPr id="24" name="Text 21"/>
+          <p:cNvPr id="24" name="Text 20"/>
           <p:cNvSpPr/>
           <p:nvPr/>
         </p:nvSpPr>
@@ -9201,7 +9079,7 @@
       </p:sp>
       <p:sp>
         <p:nvSpPr>
-          <p:cNvPr id="25" name="Text 22"/>
+          <p:cNvPr id="25" name="Text 21"/>
           <p:cNvSpPr/>
           <p:nvPr/>
         </p:nvSpPr>
@@ -9233,14 +9111,14 @@
       </p:sp>
       <p:pic>
         <p:nvPicPr>
-          <p:cNvPr id="26" name="Image 1" descr="/Users/danwahlin/.copilot/session-state/56a7a0da-def8-48d4-b5e8-0ac3878cb8dd/files/slides-build/icons/FaGithub-0969DA.png">    </p:cNvPr>
+          <p:cNvPr id="26" name="Image 2" descr="/Users/danwahlin/.copilot/session-state/56a7a0da-def8-48d4-b5e8-0ac3878cb8dd/files/slides-build/icons/FaGithub-0969DA.png">    </p:cNvPr>
           <p:cNvPicPr>
             <a:picLocks noChangeAspect="1"/>
           </p:cNvPicPr>
           <p:nvPr/>
         </p:nvPicPr>
         <p:blipFill>
-          <a:blip r:embed="rId3"/>
+          <a:blip r:embed="rId4"/>
           <a:stretch>
             <a:fillRect/>
           </a:stretch>
@@ -9257,7 +9135,7 @@
       </p:pic>
       <p:sp>
         <p:nvSpPr>
-          <p:cNvPr id="27" name="Text 23"/>
+          <p:cNvPr id="27" name="Text 22"/>
           <p:cNvSpPr/>
           <p:nvPr/>
         </p:nvSpPr>
@@ -9296,7 +9174,7 @@
       </p:sp>
       <p:sp>
         <p:nvSpPr>
-          <p:cNvPr id="28" name="Text 24"/>
+          <p:cNvPr id="28" name="Text 23"/>
           <p:cNvSpPr/>
           <p:nvPr/>
         </p:nvSpPr>
@@ -9326,7 +9204,7 @@
                 <a:latin typeface="Arial" pitchFamily="34" charset="0"/>
                 <a:ea typeface="Arial" pitchFamily="34" charset="-122"/>
                 <a:cs typeface="Arial" pitchFamily="34" charset="-120"/>
-                <a:hlinkClick r:id="rId4" invalidUrl="" action="" tgtFrame="" tooltip="https://github.com/github/copilot-app-for-beginners/tree/main/04-skills-custom-agents" history="1" highlightClick="0" endSnd="0">
+                <a:hlinkClick r:id="rId5" invalidUrl="" action="" tgtFrame="" tooltip="https://github.com/github/copilot-app-for-beginners/tree/main/04-skills-custom-agents" history="1" highlightClick="0" endSnd="0">
                   <a:extLst>
                     <a:ext uri="{A12FA001-AC4F-418D-AE19-62706E023703}">
                       <ahyp:hlinkClr xmlns:ahyp="http://schemas.microsoft.com/office/drawing/2018/hyperlinkcolor" val="tx"/>
@@ -9342,7 +9220,7 @@
       </p:sp>
       <p:sp>
         <p:nvSpPr>
-          <p:cNvPr id="29" name="Text 25"/>
+          <p:cNvPr id="29" name="Text 24"/>
           <p:cNvSpPr/>
           <p:nvPr/>
         </p:nvSpPr>
@@ -9381,7 +9259,7 @@
       </p:sp>
       <p:sp>
         <p:nvSpPr>
-          <p:cNvPr id="30" name="Text 26"/>
+          <p:cNvPr id="30" name="Text 25"/>
           <p:cNvSpPr/>
           <p:nvPr/>
         </p:nvSpPr>
@@ -9411,7 +9289,7 @@
                 <a:latin typeface="Arial" pitchFamily="34" charset="0"/>
                 <a:ea typeface="Arial" pitchFamily="34" charset="-122"/>
                 <a:cs typeface="Arial" pitchFamily="34" charset="-120"/>
-                <a:hlinkClick r:id="rId5" invalidUrl="" action="" tgtFrame="" tooltip="https://github.com/github/copilot-app-for-beginners/tree/main/05-mcp-plugins" history="1" highlightClick="0" endSnd="0">
+                <a:hlinkClick r:id="rId6" invalidUrl="" action="" tgtFrame="" tooltip="https://github.com/github/copilot-app-for-beginners/tree/main/05-mcp-plugins" history="1" highlightClick="0" endSnd="0">
                   <a:extLst>
                     <a:ext uri="{A12FA001-AC4F-418D-AE19-62706E023703}">
                       <ahyp:hlinkClr xmlns:ahyp="http://schemas.microsoft.com/office/drawing/2018/hyperlinkcolor" val="tx"/>
@@ -9457,112 +9335,9 @@
           <a:chExt cx="0" cy="0"/>
         </a:xfrm>
       </p:grpSpPr>
-      <p:sp>
-        <p:nvSpPr>
-          <p:cNvPr id="2" name="Text 0"/>
-          <p:cNvSpPr/>
-          <p:nvPr/>
-        </p:nvSpPr>
-        <p:spPr>
-          <a:xfrm>
-            <a:off x="0" y="0"/>
-            <a:ext cx="9144000" cy="76200"/>
-          </a:xfrm>
-          <a:prstGeom prst="rect">
-            <a:avLst/>
-          </a:prstGeom>
-          <a:solidFill>
-            <a:srgbClr val="1A7F37"/>
-          </a:solidFill>
-          <a:ln/>
-        </p:spPr>
-        <p:txBody>
-          <a:bodyPr wrap="square" rtlCol="0" anchor="ctr"/>
-          <a:lstStyle/>
-          <a:p>
-            <a:pPr indent="0" marL="0">
-              <a:buNone/>
-            </a:pPr>
-            <a:endParaRPr lang="en-US" dirty="0"/>
-          </a:p>
-        </p:txBody>
-      </p:sp>
-      <p:sp>
-        <p:nvSpPr>
-          <p:cNvPr id="3" name="Text 1"/>
-          <p:cNvSpPr/>
-          <p:nvPr/>
-        </p:nvSpPr>
-        <p:spPr>
-          <a:xfrm>
-            <a:off x="7340501" y="177701"/>
-            <a:ext cx="1168301" cy="279350"/>
-          </a:xfrm>
-          <a:prstGeom prst="roundRect">
-            <a:avLst>
-              <a:gd name="adj" fmla="val 22731"/>
-            </a:avLst>
-          </a:prstGeom>
-          <a:solidFill>
-            <a:srgbClr val="1A7F37"/>
-          </a:solidFill>
-          <a:ln/>
-        </p:spPr>
-        <p:txBody>
-          <a:bodyPr wrap="square" rtlCol="0" anchor="ctr"/>
-          <a:lstStyle/>
-          <a:p>
-            <a:pPr indent="0" marL="0">
-              <a:buNone/>
-            </a:pPr>
-            <a:endParaRPr lang="en-US" dirty="0"/>
-          </a:p>
-        </p:txBody>
-      </p:sp>
-      <p:sp>
-        <p:nvSpPr>
-          <p:cNvPr id="4" name="Text 2"/>
-          <p:cNvSpPr/>
-          <p:nvPr/>
-        </p:nvSpPr>
-        <p:spPr>
-          <a:xfrm>
-            <a:off x="7461041" y="231577"/>
-            <a:ext cx="927071" cy="171450"/>
-          </a:xfrm>
-          <a:prstGeom prst="rect">
-            <a:avLst/>
-          </a:prstGeom>
-          <a:noFill/>
-          <a:ln/>
-        </p:spPr>
-        <p:txBody>
-          <a:bodyPr wrap="square" lIns="0" tIns="0" rIns="0" bIns="0" rtlCol="0" anchor="t"/>
-          <a:lstStyle/>
-          <a:p>
-            <a:pPr algn="ctr" indent="0" marL="0">
-              <a:buNone/>
-            </a:pPr>
-            <a:r>
-              <a:rPr lang="en-US" sz="1150" b="1" dirty="0">
-                <a:solidFill>
-                  <a:srgbClr val="FFFFFF"/>
-                </a:solidFill>
-                <a:latin typeface="Arial" pitchFamily="34" charset="0"/>
-                <a:ea typeface="Arial" pitchFamily="34" charset="-122"/>
-                <a:cs typeface="Arial" pitchFamily="34" charset="-120"/>
-              </a:rPr>
-              <a:t>CHAPTER 04</a:t>
-            </a:r>
-            <a:endParaRPr lang="en-US" sz="1150" dirty="0"/>
-          </a:p>
-        </p:txBody>
-      </p:sp>
       <p:pic>
         <p:nvPicPr>
-          <p:cNvPr id="5" name="Image 0" descr="/Users/danwahlin/.copilot/session-state/56a7a0da-def8-48d4-b5e8-0ac3878cb8dd/files/slides-build/icons/FaGithub-1F2328.png">
-            <a:hlinkClick r:id="rId2" tooltip="https://github.com/github/copilot-app-for-beginners/tree/main/04-skills-custom-agents"/>
-          </p:cNvPr>
+          <p:cNvPr id="2" name="Image 0" descr="/Users/danwahlin/.copilot/session-state/56a7a0da-def8-48d4-b5e8-0ac3878cb8dd/files/slides-build/img/grad-corner.png">    </p:cNvPr>
           <p:cNvPicPr>
             <a:picLocks noChangeAspect="1"/>
           </p:cNvPicPr>
@@ -9576,6 +9351,103 @@
         </p:blipFill>
         <p:spPr>
           <a:xfrm>
+            <a:off x="6349901" y="0"/>
+            <a:ext cx="2793950" cy="1308050"/>
+          </a:xfrm>
+          <a:prstGeom prst="rect">
+            <a:avLst/>
+          </a:prstGeom>
+        </p:spPr>
+      </p:pic>
+      <p:sp>
+        <p:nvSpPr>
+          <p:cNvPr id="3" name="Text 0"/>
+          <p:cNvSpPr/>
+          <p:nvPr/>
+        </p:nvSpPr>
+        <p:spPr>
+          <a:xfrm>
+            <a:off x="7340501" y="177701"/>
+            <a:ext cx="1168301" cy="279350"/>
+          </a:xfrm>
+          <a:prstGeom prst="roundRect">
+            <a:avLst>
+              <a:gd name="adj" fmla="val 22731"/>
+            </a:avLst>
+          </a:prstGeom>
+          <a:solidFill>
+            <a:srgbClr val="1A7F37"/>
+          </a:solidFill>
+          <a:ln/>
+        </p:spPr>
+        <p:txBody>
+          <a:bodyPr wrap="square" rtlCol="0" anchor="ctr"/>
+          <a:lstStyle/>
+          <a:p>
+            <a:pPr indent="0" marL="0">
+              <a:buNone/>
+            </a:pPr>
+            <a:endParaRPr lang="en-US" dirty="0"/>
+          </a:p>
+        </p:txBody>
+      </p:sp>
+      <p:sp>
+        <p:nvSpPr>
+          <p:cNvPr id="4" name="Text 1"/>
+          <p:cNvSpPr/>
+          <p:nvPr/>
+        </p:nvSpPr>
+        <p:spPr>
+          <a:xfrm>
+            <a:off x="7461041" y="231577"/>
+            <a:ext cx="927071" cy="171450"/>
+          </a:xfrm>
+          <a:prstGeom prst="rect">
+            <a:avLst/>
+          </a:prstGeom>
+          <a:noFill/>
+          <a:ln/>
+        </p:spPr>
+        <p:txBody>
+          <a:bodyPr wrap="square" lIns="0" tIns="0" rIns="0" bIns="0" rtlCol="0" anchor="t"/>
+          <a:lstStyle/>
+          <a:p>
+            <a:pPr algn="ctr" indent="0" marL="0">
+              <a:buNone/>
+            </a:pPr>
+            <a:r>
+              <a:rPr lang="en-US" sz="1150" b="1" dirty="0">
+                <a:solidFill>
+                  <a:srgbClr val="FFFFFF"/>
+                </a:solidFill>
+                <a:latin typeface="Arial" pitchFamily="34" charset="0"/>
+                <a:ea typeface="Arial" pitchFamily="34" charset="-122"/>
+                <a:cs typeface="Arial" pitchFamily="34" charset="-120"/>
+              </a:rPr>
+              <a:t>CHAPTER 04</a:t>
+            </a:r>
+            <a:endParaRPr lang="en-US" sz="1150" dirty="0"/>
+          </a:p>
+        </p:txBody>
+      </p:sp>
+      <p:pic>
+        <p:nvPicPr>
+          <p:cNvPr id="5" name="Image 1" descr="/Users/danwahlin/.copilot/session-state/56a7a0da-def8-48d4-b5e8-0ac3878cb8dd/files/slides-build/icons/FaGithub-1F2328.png">
+            <a:hlinkClick r:id="rId3" tooltip="https://github.com/github/copilot-app-for-beginners/tree/main/04-skills-custom-agents"/>
+          </p:cNvPr>
+          <p:cNvPicPr>
+            <a:picLocks noChangeAspect="1"/>
+          </p:cNvPicPr>
+          <p:nvPr/>
+        </p:nvPicPr>
+        <p:blipFill>
+          <a:blip r:embed="rId2"/>
+          <a:stretch>
+            <a:fillRect/>
+          </a:stretch>
+        </p:blipFill>
+        <p:spPr>
+          <a:xfrm>
             <a:off x="8610600" y="165050"/>
             <a:ext cx="304800" cy="304800"/>
           </a:xfrm>
@@ -9586,7 +9458,7 @@
       </p:pic>
       <p:sp>
         <p:nvSpPr>
-          <p:cNvPr id="6" name="Text 3"/>
+          <p:cNvPr id="6" name="Text 2"/>
           <p:cNvSpPr/>
           <p:nvPr/>
         </p:nvSpPr>
@@ -9625,7 +9497,7 @@
       </p:sp>
       <p:sp>
         <p:nvSpPr>
-          <p:cNvPr id="7" name="Text 4"/>
+          <p:cNvPr id="7" name="Text 3"/>
           <p:cNvSpPr/>
           <p:nvPr/>
         </p:nvSpPr>
@@ -9670,7 +9542,7 @@
       </p:sp>
       <p:sp>
         <p:nvSpPr>
-          <p:cNvPr id="8" name="Text 5"/>
+          <p:cNvPr id="8" name="Text 4"/>
           <p:cNvSpPr/>
           <p:nvPr/>
         </p:nvSpPr>
@@ -9702,7 +9574,7 @@
       </p:sp>
       <p:sp>
         <p:nvSpPr>
-          <p:cNvPr id="9" name="Shape 6"/>
+          <p:cNvPr id="9" name="Shape 5"/>
           <p:cNvSpPr/>
           <p:nvPr/>
         </p:nvSpPr>
@@ -9725,7 +9597,7 @@
       </p:sp>
       <p:sp>
         <p:nvSpPr>
-          <p:cNvPr id="10" name="Shape 7"/>
+          <p:cNvPr id="10" name="Shape 6"/>
           <p:cNvSpPr/>
           <p:nvPr/>
         </p:nvSpPr>
@@ -9748,7 +9620,7 @@
       </p:sp>
       <p:sp>
         <p:nvSpPr>
-          <p:cNvPr id="11" name="Shape 8"/>
+          <p:cNvPr id="11" name="Shape 7"/>
           <p:cNvSpPr/>
           <p:nvPr/>
         </p:nvSpPr>
@@ -9771,7 +9643,7 @@
       </p:sp>
       <p:sp>
         <p:nvSpPr>
-          <p:cNvPr id="12" name="Shape 9"/>
+          <p:cNvPr id="12" name="Shape 8"/>
           <p:cNvSpPr/>
           <p:nvPr/>
         </p:nvSpPr>
@@ -9794,7 +9666,7 @@
       </p:sp>
       <p:sp>
         <p:nvSpPr>
-          <p:cNvPr id="13" name="Text 10"/>
+          <p:cNvPr id="13" name="Text 9"/>
           <p:cNvSpPr/>
           <p:nvPr/>
         </p:nvSpPr>
@@ -9833,7 +9705,7 @@
       </p:sp>
       <p:sp>
         <p:nvSpPr>
-          <p:cNvPr id="14" name="Text 11"/>
+          <p:cNvPr id="14" name="Text 10"/>
           <p:cNvSpPr/>
           <p:nvPr/>
         </p:nvSpPr>
@@ -9872,7 +9744,7 @@
       </p:sp>
       <p:sp>
         <p:nvSpPr>
-          <p:cNvPr id="15" name="Text 12"/>
+          <p:cNvPr id="15" name="Text 11"/>
           <p:cNvSpPr/>
           <p:nvPr/>
         </p:nvSpPr>
@@ -9914,7 +9786,7 @@
       </p:sp>
       <p:sp>
         <p:nvSpPr>
-          <p:cNvPr id="16" name="Text 13"/>
+          <p:cNvPr id="16" name="Text 12"/>
           <p:cNvSpPr/>
           <p:nvPr/>
         </p:nvSpPr>
@@ -9946,7 +9818,7 @@
       </p:sp>
       <p:sp>
         <p:nvSpPr>
-          <p:cNvPr id="17" name="Shape 14"/>
+          <p:cNvPr id="17" name="Shape 13"/>
           <p:cNvSpPr/>
           <p:nvPr/>
         </p:nvSpPr>
@@ -9969,7 +9841,7 @@
       </p:sp>
       <p:sp>
         <p:nvSpPr>
-          <p:cNvPr id="18" name="Shape 15"/>
+          <p:cNvPr id="18" name="Shape 14"/>
           <p:cNvSpPr/>
           <p:nvPr/>
         </p:nvSpPr>
@@ -9992,7 +9864,7 @@
       </p:sp>
       <p:sp>
         <p:nvSpPr>
-          <p:cNvPr id="19" name="Shape 16"/>
+          <p:cNvPr id="19" name="Shape 15"/>
           <p:cNvSpPr/>
           <p:nvPr/>
         </p:nvSpPr>
@@ -10015,7 +9887,7 @@
       </p:sp>
       <p:sp>
         <p:nvSpPr>
-          <p:cNvPr id="20" name="Shape 17"/>
+          <p:cNvPr id="20" name="Shape 16"/>
           <p:cNvSpPr/>
           <p:nvPr/>
         </p:nvSpPr>
@@ -10038,7 +9910,7 @@
       </p:sp>
       <p:sp>
         <p:nvSpPr>
-          <p:cNvPr id="21" name="Text 18"/>
+          <p:cNvPr id="21" name="Text 17"/>
           <p:cNvSpPr/>
           <p:nvPr/>
         </p:nvSpPr>
@@ -10077,7 +9949,7 @@
       </p:sp>
       <p:sp>
         <p:nvSpPr>
-          <p:cNvPr id="22" name="Text 19"/>
+          <p:cNvPr id="22" name="Text 18"/>
           <p:cNvSpPr/>
           <p:nvPr/>
         </p:nvSpPr>
@@ -10116,7 +9988,7 @@
       </p:sp>
       <p:sp>
         <p:nvSpPr>
-          <p:cNvPr id="23" name="Text 20"/>
+          <p:cNvPr id="23" name="Text 19"/>
           <p:cNvSpPr/>
           <p:nvPr/>
         </p:nvSpPr>
@@ -10188,112 +10060,9 @@
           <a:chExt cx="0" cy="0"/>
         </a:xfrm>
       </p:grpSpPr>
-      <p:sp>
-        <p:nvSpPr>
-          <p:cNvPr id="2" name="Text 0"/>
-          <p:cNvSpPr/>
-          <p:nvPr/>
-        </p:nvSpPr>
-        <p:spPr>
-          <a:xfrm>
-            <a:off x="0" y="0"/>
-            <a:ext cx="9144000" cy="76200"/>
-          </a:xfrm>
-          <a:prstGeom prst="rect">
-            <a:avLst/>
-          </a:prstGeom>
-          <a:solidFill>
-            <a:srgbClr val="1A7F37"/>
-          </a:solidFill>
-          <a:ln/>
-        </p:spPr>
-        <p:txBody>
-          <a:bodyPr wrap="square" rtlCol="0" anchor="ctr"/>
-          <a:lstStyle/>
-          <a:p>
-            <a:pPr indent="0" marL="0">
-              <a:buNone/>
-            </a:pPr>
-            <a:endParaRPr lang="en-US" dirty="0"/>
-          </a:p>
-        </p:txBody>
-      </p:sp>
-      <p:sp>
-        <p:nvSpPr>
-          <p:cNvPr id="3" name="Text 1"/>
-          <p:cNvSpPr/>
-          <p:nvPr/>
-        </p:nvSpPr>
-        <p:spPr>
-          <a:xfrm>
-            <a:off x="7340501" y="177701"/>
-            <a:ext cx="1168301" cy="279350"/>
-          </a:xfrm>
-          <a:prstGeom prst="roundRect">
-            <a:avLst>
-              <a:gd name="adj" fmla="val 22731"/>
-            </a:avLst>
-          </a:prstGeom>
-          <a:solidFill>
-            <a:srgbClr val="1A7F37"/>
-          </a:solidFill>
-          <a:ln/>
-        </p:spPr>
-        <p:txBody>
-          <a:bodyPr wrap="square" rtlCol="0" anchor="ctr"/>
-          <a:lstStyle/>
-          <a:p>
-            <a:pPr indent="0" marL="0">
-              <a:buNone/>
-            </a:pPr>
-            <a:endParaRPr lang="en-US" dirty="0"/>
-          </a:p>
-        </p:txBody>
-      </p:sp>
-      <p:sp>
-        <p:nvSpPr>
-          <p:cNvPr id="4" name="Text 2"/>
-          <p:cNvSpPr/>
-          <p:nvPr/>
-        </p:nvSpPr>
-        <p:spPr>
-          <a:xfrm>
-            <a:off x="7461041" y="231577"/>
-            <a:ext cx="927071" cy="171450"/>
-          </a:xfrm>
-          <a:prstGeom prst="rect">
-            <a:avLst/>
-          </a:prstGeom>
-          <a:noFill/>
-          <a:ln/>
-        </p:spPr>
-        <p:txBody>
-          <a:bodyPr wrap="square" lIns="0" tIns="0" rIns="0" bIns="0" rtlCol="0" anchor="t"/>
-          <a:lstStyle/>
-          <a:p>
-            <a:pPr algn="ctr" indent="0" marL="0">
-              <a:buNone/>
-            </a:pPr>
-            <a:r>
-              <a:rPr lang="en-US" sz="1150" b="1" dirty="0">
-                <a:solidFill>
-                  <a:srgbClr val="FFFFFF"/>
-                </a:solidFill>
-                <a:latin typeface="Arial" pitchFamily="34" charset="0"/>
-                <a:ea typeface="Arial" pitchFamily="34" charset="-122"/>
-                <a:cs typeface="Arial" pitchFamily="34" charset="-120"/>
-              </a:rPr>
-              <a:t>CHAPTER 04</a:t>
-            </a:r>
-            <a:endParaRPr lang="en-US" sz="1150" dirty="0"/>
-          </a:p>
-        </p:txBody>
-      </p:sp>
       <p:pic>
         <p:nvPicPr>
-          <p:cNvPr id="5" name="Image 0" descr="/Users/danwahlin/.copilot/session-state/56a7a0da-def8-48d4-b5e8-0ac3878cb8dd/files/slides-build/icons/FaGithub-1F2328.png">
-            <a:hlinkClick r:id="rId2" tooltip="https://github.com/github/copilot-app-for-beginners/tree/main/04-skills-custom-agents"/>
-          </p:cNvPr>
+          <p:cNvPr id="2" name="Image 0" descr="/Users/danwahlin/.copilot/session-state/56a7a0da-def8-48d4-b5e8-0ac3878cb8dd/files/slides-build/img/grad-corner.png">    </p:cNvPr>
           <p:cNvPicPr>
             <a:picLocks noChangeAspect="1"/>
           </p:cNvPicPr>
@@ -10307,6 +10076,103 @@
         </p:blipFill>
         <p:spPr>
           <a:xfrm>
+            <a:off x="6349901" y="0"/>
+            <a:ext cx="2793950" cy="1308050"/>
+          </a:xfrm>
+          <a:prstGeom prst="rect">
+            <a:avLst/>
+          </a:prstGeom>
+        </p:spPr>
+      </p:pic>
+      <p:sp>
+        <p:nvSpPr>
+          <p:cNvPr id="3" name="Text 0"/>
+          <p:cNvSpPr/>
+          <p:nvPr/>
+        </p:nvSpPr>
+        <p:spPr>
+          <a:xfrm>
+            <a:off x="7340501" y="177701"/>
+            <a:ext cx="1168301" cy="279350"/>
+          </a:xfrm>
+          <a:prstGeom prst="roundRect">
+            <a:avLst>
+              <a:gd name="adj" fmla="val 22731"/>
+            </a:avLst>
+          </a:prstGeom>
+          <a:solidFill>
+            <a:srgbClr val="1A7F37"/>
+          </a:solidFill>
+          <a:ln/>
+        </p:spPr>
+        <p:txBody>
+          <a:bodyPr wrap="square" rtlCol="0" anchor="ctr"/>
+          <a:lstStyle/>
+          <a:p>
+            <a:pPr indent="0" marL="0">
+              <a:buNone/>
+            </a:pPr>
+            <a:endParaRPr lang="en-US" dirty="0"/>
+          </a:p>
+        </p:txBody>
+      </p:sp>
+      <p:sp>
+        <p:nvSpPr>
+          <p:cNvPr id="4" name="Text 1"/>
+          <p:cNvSpPr/>
+          <p:nvPr/>
+        </p:nvSpPr>
+        <p:spPr>
+          <a:xfrm>
+            <a:off x="7461041" y="231577"/>
+            <a:ext cx="927071" cy="171450"/>
+          </a:xfrm>
+          <a:prstGeom prst="rect">
+            <a:avLst/>
+          </a:prstGeom>
+          <a:noFill/>
+          <a:ln/>
+        </p:spPr>
+        <p:txBody>
+          <a:bodyPr wrap="square" lIns="0" tIns="0" rIns="0" bIns="0" rtlCol="0" anchor="t"/>
+          <a:lstStyle/>
+          <a:p>
+            <a:pPr algn="ctr" indent="0" marL="0">
+              <a:buNone/>
+            </a:pPr>
+            <a:r>
+              <a:rPr lang="en-US" sz="1150" b="1" dirty="0">
+                <a:solidFill>
+                  <a:srgbClr val="FFFFFF"/>
+                </a:solidFill>
+                <a:latin typeface="Arial" pitchFamily="34" charset="0"/>
+                <a:ea typeface="Arial" pitchFamily="34" charset="-122"/>
+                <a:cs typeface="Arial" pitchFamily="34" charset="-120"/>
+              </a:rPr>
+              <a:t>CHAPTER 04</a:t>
+            </a:r>
+            <a:endParaRPr lang="en-US" sz="1150" dirty="0"/>
+          </a:p>
+        </p:txBody>
+      </p:sp>
+      <p:pic>
+        <p:nvPicPr>
+          <p:cNvPr id="5" name="Image 1" descr="/Users/danwahlin/.copilot/session-state/56a7a0da-def8-48d4-b5e8-0ac3878cb8dd/files/slides-build/icons/FaGithub-1F2328.png">
+            <a:hlinkClick r:id="rId3" tooltip="https://github.com/github/copilot-app-for-beginners/tree/main/04-skills-custom-agents"/>
+          </p:cNvPr>
+          <p:cNvPicPr>
+            <a:picLocks noChangeAspect="1"/>
+          </p:cNvPicPr>
+          <p:nvPr/>
+        </p:nvPicPr>
+        <p:blipFill>
+          <a:blip r:embed="rId2"/>
+          <a:stretch>
+            <a:fillRect/>
+          </a:stretch>
+        </p:blipFill>
+        <p:spPr>
+          <a:xfrm>
             <a:off x="8610600" y="165050"/>
             <a:ext cx="304800" cy="304800"/>
           </a:xfrm>
@@ -10317,7 +10183,7 @@
       </p:pic>
       <p:sp>
         <p:nvSpPr>
-          <p:cNvPr id="6" name="Text 3"/>
+          <p:cNvPr id="6" name="Text 2"/>
           <p:cNvSpPr/>
           <p:nvPr/>
         </p:nvSpPr>
@@ -10356,7 +10222,7 @@
       </p:sp>
       <p:sp>
         <p:nvSpPr>
-          <p:cNvPr id="7" name="Text 4"/>
+          <p:cNvPr id="7" name="Text 3"/>
           <p:cNvSpPr/>
           <p:nvPr/>
         </p:nvSpPr>
@@ -10401,7 +10267,7 @@
       </p:sp>
       <p:sp>
         <p:nvSpPr>
-          <p:cNvPr id="8" name="Text 5"/>
+          <p:cNvPr id="8" name="Text 4"/>
           <p:cNvSpPr/>
           <p:nvPr/>
         </p:nvSpPr>
@@ -10446,7 +10312,7 @@
       </p:sp>
       <p:sp>
         <p:nvSpPr>
-          <p:cNvPr id="9" name="Text 6"/>
+          <p:cNvPr id="9" name="Text 5"/>
           <p:cNvSpPr/>
           <p:nvPr/>
         </p:nvSpPr>
@@ -10482,7 +10348,7 @@
       </p:sp>
       <p:sp>
         <p:nvSpPr>
-          <p:cNvPr id="10" name="Text 7"/>
+          <p:cNvPr id="10" name="Text 6"/>
           <p:cNvSpPr/>
           <p:nvPr/>
         </p:nvSpPr>
@@ -10512,7 +10378,7 @@
       </p:sp>
       <p:sp>
         <p:nvSpPr>
-          <p:cNvPr id="11" name="Shape 8"/>
+          <p:cNvPr id="11" name="Shape 7"/>
           <p:cNvSpPr/>
           <p:nvPr/>
         </p:nvSpPr>
@@ -10535,7 +10401,7 @@
       </p:sp>
       <p:sp>
         <p:nvSpPr>
-          <p:cNvPr id="12" name="Text 9"/>
+          <p:cNvPr id="12" name="Text 8"/>
           <p:cNvSpPr/>
           <p:nvPr/>
         </p:nvSpPr>
@@ -10577,7 +10443,7 @@
       </p:sp>
       <p:sp>
         <p:nvSpPr>
-          <p:cNvPr id="13" name="Text 10"/>
+          <p:cNvPr id="13" name="Text 9"/>
           <p:cNvSpPr/>
           <p:nvPr/>
         </p:nvSpPr>
@@ -10619,7 +10485,7 @@
       </p:sp>
       <p:sp>
         <p:nvSpPr>
-          <p:cNvPr id="14" name="Text 11"/>
+          <p:cNvPr id="14" name="Text 10"/>
           <p:cNvSpPr/>
           <p:nvPr/>
         </p:nvSpPr>
@@ -10661,7 +10527,7 @@
       </p:sp>
       <p:sp>
         <p:nvSpPr>
-          <p:cNvPr id="15" name="Shape 12"/>
+          <p:cNvPr id="15" name="Shape 11"/>
           <p:cNvSpPr/>
           <p:nvPr/>
         </p:nvSpPr>
@@ -10684,7 +10550,7 @@
       </p:sp>
       <p:sp>
         <p:nvSpPr>
-          <p:cNvPr id="16" name="Text 13"/>
+          <p:cNvPr id="16" name="Text 12"/>
           <p:cNvSpPr/>
           <p:nvPr/>
         </p:nvSpPr>
@@ -10726,7 +10592,7 @@
       </p:sp>
       <p:sp>
         <p:nvSpPr>
-          <p:cNvPr id="17" name="Text 14"/>
+          <p:cNvPr id="17" name="Text 13"/>
           <p:cNvSpPr/>
           <p:nvPr/>
         </p:nvSpPr>
@@ -10768,7 +10634,7 @@
       </p:sp>
       <p:sp>
         <p:nvSpPr>
-          <p:cNvPr id="18" name="Text 15"/>
+          <p:cNvPr id="18" name="Text 14"/>
           <p:cNvSpPr/>
           <p:nvPr/>
         </p:nvSpPr>
@@ -10810,7 +10676,7 @@
       </p:sp>
       <p:sp>
         <p:nvSpPr>
-          <p:cNvPr id="19" name="Shape 16"/>
+          <p:cNvPr id="19" name="Shape 15"/>
           <p:cNvSpPr/>
           <p:nvPr/>
         </p:nvSpPr>
@@ -10833,7 +10699,7 @@
       </p:sp>
       <p:sp>
         <p:nvSpPr>
-          <p:cNvPr id="20" name="Text 17"/>
+          <p:cNvPr id="20" name="Text 16"/>
           <p:cNvSpPr/>
           <p:nvPr/>
         </p:nvSpPr>
@@ -10875,7 +10741,7 @@
       </p:sp>
       <p:sp>
         <p:nvSpPr>
-          <p:cNvPr id="21" name="Text 18"/>
+          <p:cNvPr id="21" name="Text 17"/>
           <p:cNvSpPr/>
           <p:nvPr/>
         </p:nvSpPr>
@@ -10917,7 +10783,7 @@
       </p:sp>
       <p:sp>
         <p:nvSpPr>
-          <p:cNvPr id="22" name="Text 19"/>
+          <p:cNvPr id="22" name="Text 18"/>
           <p:cNvSpPr/>
           <p:nvPr/>
         </p:nvSpPr>
@@ -10959,7 +10825,7 @@
       </p:sp>
       <p:sp>
         <p:nvSpPr>
-          <p:cNvPr id="23" name="Shape 20"/>
+          <p:cNvPr id="23" name="Shape 19"/>
           <p:cNvSpPr/>
           <p:nvPr/>
         </p:nvSpPr>
@@ -10982,7 +10848,7 @@
       </p:sp>
       <p:sp>
         <p:nvSpPr>
-          <p:cNvPr id="24" name="Text 21"/>
+          <p:cNvPr id="24" name="Text 20"/>
           <p:cNvSpPr/>
           <p:nvPr/>
         </p:nvSpPr>
@@ -11024,7 +10890,7 @@
       </p:sp>
       <p:sp>
         <p:nvSpPr>
-          <p:cNvPr id="25" name="Text 22"/>
+          <p:cNvPr id="25" name="Text 21"/>
           <p:cNvSpPr/>
           <p:nvPr/>
         </p:nvSpPr>
@@ -11066,7 +10932,7 @@
       </p:sp>
       <p:sp>
         <p:nvSpPr>
-          <p:cNvPr id="26" name="Text 23"/>
+          <p:cNvPr id="26" name="Text 22"/>
           <p:cNvSpPr/>
           <p:nvPr/>
         </p:nvSpPr>
@@ -11108,7 +10974,7 @@
       </p:sp>
       <p:sp>
         <p:nvSpPr>
-          <p:cNvPr id="27" name="Text 24"/>
+          <p:cNvPr id="27" name="Text 23"/>
           <p:cNvSpPr/>
           <p:nvPr/>
         </p:nvSpPr>
@@ -11150,7 +11016,7 @@
       </p:sp>
       <p:sp>
         <p:nvSpPr>
-          <p:cNvPr id="28" name="Text 25"/>
+          <p:cNvPr id="28" name="Text 24"/>
           <p:cNvSpPr/>
           <p:nvPr/>
         </p:nvSpPr>
@@ -11192,7 +11058,7 @@
       </p:sp>
       <p:sp>
         <p:nvSpPr>
-          <p:cNvPr id="29" name="Text 26"/>
+          <p:cNvPr id="29" name="Text 25"/>
           <p:cNvSpPr/>
           <p:nvPr/>
         </p:nvSpPr>
@@ -11383,82 +11249,9 @@
           </a:p>
         </p:txBody>
       </p:sp>
-      <p:sp>
-        <p:nvSpPr>
-          <p:cNvPr id="5" name="Text 3"/>
-          <p:cNvSpPr/>
-          <p:nvPr/>
-        </p:nvSpPr>
-        <p:spPr>
-          <a:xfrm>
-            <a:off x="7340501" y="177701"/>
-            <a:ext cx="1168301" cy="279350"/>
-          </a:xfrm>
-          <a:prstGeom prst="roundRect">
-            <a:avLst>
-              <a:gd name="adj" fmla="val 22731"/>
-            </a:avLst>
-          </a:prstGeom>
-          <a:solidFill>
-            <a:srgbClr val="1A7F37"/>
-          </a:solidFill>
-          <a:ln/>
-        </p:spPr>
-        <p:txBody>
-          <a:bodyPr wrap="square" rtlCol="0" anchor="ctr"/>
-          <a:lstStyle/>
-          <a:p>
-            <a:pPr indent="0" marL="0">
-              <a:buNone/>
-            </a:pPr>
-            <a:endParaRPr lang="en-US" dirty="0"/>
-          </a:p>
-        </p:txBody>
-      </p:sp>
-      <p:sp>
-        <p:nvSpPr>
-          <p:cNvPr id="6" name="Text 4"/>
-          <p:cNvSpPr/>
-          <p:nvPr/>
-        </p:nvSpPr>
-        <p:spPr>
-          <a:xfrm>
-            <a:off x="7461041" y="231577"/>
-            <a:ext cx="927071" cy="171450"/>
-          </a:xfrm>
-          <a:prstGeom prst="rect">
-            <a:avLst/>
-          </a:prstGeom>
-          <a:noFill/>
-          <a:ln/>
-        </p:spPr>
-        <p:txBody>
-          <a:bodyPr wrap="square" lIns="0" tIns="0" rIns="0" bIns="0" rtlCol="0" anchor="t"/>
-          <a:lstStyle/>
-          <a:p>
-            <a:pPr algn="ctr" indent="0" marL="0">
-              <a:buNone/>
-            </a:pPr>
-            <a:r>
-              <a:rPr lang="en-US" sz="1150" b="1" dirty="0">
-                <a:solidFill>
-                  <a:srgbClr val="FFFFFF"/>
-                </a:solidFill>
-                <a:latin typeface="Arial" pitchFamily="34" charset="0"/>
-                <a:ea typeface="Arial" pitchFamily="34" charset="-122"/>
-                <a:cs typeface="Arial" pitchFamily="34" charset="-120"/>
-              </a:rPr>
-              <a:t>CHAPTER 04</a:t>
-            </a:r>
-            <a:endParaRPr lang="en-US" sz="1150" dirty="0"/>
-          </a:p>
-        </p:txBody>
-      </p:sp>
       <p:pic>
         <p:nvPicPr>
-          <p:cNvPr id="7" name="Image 0" descr="/Users/danwahlin/.copilot/session-state/56a7a0da-def8-48d4-b5e8-0ac3878cb8dd/files/slides-build/icons/FaGithub-1F2328.png">
-            <a:hlinkClick r:id="rId2" tooltip="https://github.com/github/copilot-app-for-beginners/tree/main/04-skills-custom-agents"/>
-          </p:cNvPr>
+          <p:cNvPr id="5" name="Image 0" descr="/Users/danwahlin/.copilot/session-state/56a7a0da-def8-48d4-b5e8-0ac3878cb8dd/files/slides-build/img/grad-corner.png">    </p:cNvPr>
           <p:cNvPicPr>
             <a:picLocks noChangeAspect="1"/>
           </p:cNvPicPr>
@@ -11472,6 +11265,103 @@
         </p:blipFill>
         <p:spPr>
           <a:xfrm>
+            <a:off x="6349901" y="0"/>
+            <a:ext cx="2793950" cy="1308050"/>
+          </a:xfrm>
+          <a:prstGeom prst="rect">
+            <a:avLst/>
+          </a:prstGeom>
+        </p:spPr>
+      </p:pic>
+      <p:sp>
+        <p:nvSpPr>
+          <p:cNvPr id="6" name="Text 3"/>
+          <p:cNvSpPr/>
+          <p:nvPr/>
+        </p:nvSpPr>
+        <p:spPr>
+          <a:xfrm>
+            <a:off x="7340501" y="177701"/>
+            <a:ext cx="1168301" cy="279350"/>
+          </a:xfrm>
+          <a:prstGeom prst="roundRect">
+            <a:avLst>
+              <a:gd name="adj" fmla="val 22731"/>
+            </a:avLst>
+          </a:prstGeom>
+          <a:solidFill>
+            <a:srgbClr val="1A7F37"/>
+          </a:solidFill>
+          <a:ln/>
+        </p:spPr>
+        <p:txBody>
+          <a:bodyPr wrap="square" rtlCol="0" anchor="ctr"/>
+          <a:lstStyle/>
+          <a:p>
+            <a:pPr indent="0" marL="0">
+              <a:buNone/>
+            </a:pPr>
+            <a:endParaRPr lang="en-US" dirty="0"/>
+          </a:p>
+        </p:txBody>
+      </p:sp>
+      <p:sp>
+        <p:nvSpPr>
+          <p:cNvPr id="7" name="Text 4"/>
+          <p:cNvSpPr/>
+          <p:nvPr/>
+        </p:nvSpPr>
+        <p:spPr>
+          <a:xfrm>
+            <a:off x="7461041" y="231577"/>
+            <a:ext cx="927071" cy="171450"/>
+          </a:xfrm>
+          <a:prstGeom prst="rect">
+            <a:avLst/>
+          </a:prstGeom>
+          <a:noFill/>
+          <a:ln/>
+        </p:spPr>
+        <p:txBody>
+          <a:bodyPr wrap="square" lIns="0" tIns="0" rIns="0" bIns="0" rtlCol="0" anchor="t"/>
+          <a:lstStyle/>
+          <a:p>
+            <a:pPr algn="ctr" indent="0" marL="0">
+              <a:buNone/>
+            </a:pPr>
+            <a:r>
+              <a:rPr lang="en-US" sz="1150" b="1" dirty="0">
+                <a:solidFill>
+                  <a:srgbClr val="FFFFFF"/>
+                </a:solidFill>
+                <a:latin typeface="Arial" pitchFamily="34" charset="0"/>
+                <a:ea typeface="Arial" pitchFamily="34" charset="-122"/>
+                <a:cs typeface="Arial" pitchFamily="34" charset="-120"/>
+              </a:rPr>
+              <a:t>CHAPTER 04</a:t>
+            </a:r>
+            <a:endParaRPr lang="en-US" sz="1150" dirty="0"/>
+          </a:p>
+        </p:txBody>
+      </p:sp>
+      <p:pic>
+        <p:nvPicPr>
+          <p:cNvPr id="8" name="Image 1" descr="/Users/danwahlin/.copilot/session-state/56a7a0da-def8-48d4-b5e8-0ac3878cb8dd/files/slides-build/icons/FaGithub-1F2328.png">
+            <a:hlinkClick r:id="rId3" tooltip="https://github.com/github/copilot-app-for-beginners/tree/main/04-skills-custom-agents"/>
+          </p:cNvPr>
+          <p:cNvPicPr>
+            <a:picLocks noChangeAspect="1"/>
+          </p:cNvPicPr>
+          <p:nvPr/>
+        </p:nvPicPr>
+        <p:blipFill>
+          <a:blip r:embed="rId2"/>
+          <a:stretch>
+            <a:fillRect/>
+          </a:stretch>
+        </p:blipFill>
+        <p:spPr>
+          <a:xfrm>
             <a:off x="8610600" y="165050"/>
             <a:ext cx="304800" cy="304800"/>
           </a:xfrm>
@@ -11482,7 +11372,7 @@
       </p:pic>
       <p:sp>
         <p:nvSpPr>
-          <p:cNvPr id="8" name="Text 5"/>
+          <p:cNvPr id="9" name="Text 5"/>
           <p:cNvSpPr/>
           <p:nvPr/>
         </p:nvSpPr>
@@ -11521,7 +11411,7 @@
       </p:sp>
       <p:sp>
         <p:nvSpPr>
-          <p:cNvPr id="9" name="Text 6"/>
+          <p:cNvPr id="10" name="Text 6"/>
           <p:cNvSpPr/>
           <p:nvPr/>
         </p:nvSpPr>
@@ -11566,7 +11456,7 @@
       </p:sp>
       <p:sp>
         <p:nvSpPr>
-          <p:cNvPr id="10" name="Text 7"/>
+          <p:cNvPr id="11" name="Text 7"/>
           <p:cNvSpPr/>
           <p:nvPr/>
         </p:nvSpPr>
@@ -11598,7 +11488,7 @@
       </p:sp>
       <p:sp>
         <p:nvSpPr>
-          <p:cNvPr id="11" name="Text 8"/>
+          <p:cNvPr id="12" name="Text 8"/>
           <p:cNvSpPr/>
           <p:nvPr/>
         </p:nvSpPr>
@@ -11670,112 +11560,9 @@
           <a:chExt cx="0" cy="0"/>
         </a:xfrm>
       </p:grpSpPr>
-      <p:sp>
-        <p:nvSpPr>
-          <p:cNvPr id="2" name="Text 0"/>
-          <p:cNvSpPr/>
-          <p:nvPr/>
-        </p:nvSpPr>
-        <p:spPr>
-          <a:xfrm>
-            <a:off x="0" y="0"/>
-            <a:ext cx="9144000" cy="76200"/>
-          </a:xfrm>
-          <a:prstGeom prst="rect">
-            <a:avLst/>
-          </a:prstGeom>
-          <a:solidFill>
-            <a:srgbClr val="9A6700"/>
-          </a:solidFill>
-          <a:ln/>
-        </p:spPr>
-        <p:txBody>
-          <a:bodyPr wrap="square" rtlCol="0" anchor="ctr"/>
-          <a:lstStyle/>
-          <a:p>
-            <a:pPr indent="0" marL="0">
-              <a:buNone/>
-            </a:pPr>
-            <a:endParaRPr lang="en-US" dirty="0"/>
-          </a:p>
-        </p:txBody>
-      </p:sp>
-      <p:sp>
-        <p:nvSpPr>
-          <p:cNvPr id="3" name="Text 1"/>
-          <p:cNvSpPr/>
-          <p:nvPr/>
-        </p:nvSpPr>
-        <p:spPr>
-          <a:xfrm>
-            <a:off x="7340501" y="177701"/>
-            <a:ext cx="1168301" cy="279350"/>
-          </a:xfrm>
-          <a:prstGeom prst="roundRect">
-            <a:avLst>
-              <a:gd name="adj" fmla="val 22731"/>
-            </a:avLst>
-          </a:prstGeom>
-          <a:solidFill>
-            <a:srgbClr val="1A7F37"/>
-          </a:solidFill>
-          <a:ln/>
-        </p:spPr>
-        <p:txBody>
-          <a:bodyPr wrap="square" rtlCol="0" anchor="ctr"/>
-          <a:lstStyle/>
-          <a:p>
-            <a:pPr indent="0" marL="0">
-              <a:buNone/>
-            </a:pPr>
-            <a:endParaRPr lang="en-US" dirty="0"/>
-          </a:p>
-        </p:txBody>
-      </p:sp>
-      <p:sp>
-        <p:nvSpPr>
-          <p:cNvPr id="4" name="Text 2"/>
-          <p:cNvSpPr/>
-          <p:nvPr/>
-        </p:nvSpPr>
-        <p:spPr>
-          <a:xfrm>
-            <a:off x="7461041" y="231577"/>
-            <a:ext cx="927071" cy="171450"/>
-          </a:xfrm>
-          <a:prstGeom prst="rect">
-            <a:avLst/>
-          </a:prstGeom>
-          <a:noFill/>
-          <a:ln/>
-        </p:spPr>
-        <p:txBody>
-          <a:bodyPr wrap="square" lIns="0" tIns="0" rIns="0" bIns="0" rtlCol="0" anchor="t"/>
-          <a:lstStyle/>
-          <a:p>
-            <a:pPr algn="ctr" indent="0" marL="0">
-              <a:buNone/>
-            </a:pPr>
-            <a:r>
-              <a:rPr lang="en-US" sz="1150" b="1" dirty="0">
-                <a:solidFill>
-                  <a:srgbClr val="FFFFFF"/>
-                </a:solidFill>
-                <a:latin typeface="Arial" pitchFamily="34" charset="0"/>
-                <a:ea typeface="Arial" pitchFamily="34" charset="-122"/>
-                <a:cs typeface="Arial" pitchFamily="34" charset="-120"/>
-              </a:rPr>
-              <a:t>CHAPTER 04</a:t>
-            </a:r>
-            <a:endParaRPr lang="en-US" sz="1150" dirty="0"/>
-          </a:p>
-        </p:txBody>
-      </p:sp>
       <p:pic>
         <p:nvPicPr>
-          <p:cNvPr id="5" name="Image 0" descr="/Users/danwahlin/.copilot/session-state/56a7a0da-def8-48d4-b5e8-0ac3878cb8dd/files/slides-build/icons/FaGithub-1F2328.png">
-            <a:hlinkClick r:id="rId2" tooltip="https://github.com/github/copilot-app-for-beginners/tree/main/04-skills-custom-agents"/>
-          </p:cNvPr>
+          <p:cNvPr id="2" name="Image 0" descr="/Users/danwahlin/.copilot/session-state/56a7a0da-def8-48d4-b5e8-0ac3878cb8dd/files/slides-build/img/grad-corner.png">    </p:cNvPr>
           <p:cNvPicPr>
             <a:picLocks noChangeAspect="1"/>
           </p:cNvPicPr>
@@ -11789,6 +11576,103 @@
         </p:blipFill>
         <p:spPr>
           <a:xfrm>
+            <a:off x="6349901" y="0"/>
+            <a:ext cx="2793950" cy="1308050"/>
+          </a:xfrm>
+          <a:prstGeom prst="rect">
+            <a:avLst/>
+          </a:prstGeom>
+        </p:spPr>
+      </p:pic>
+      <p:sp>
+        <p:nvSpPr>
+          <p:cNvPr id="3" name="Text 0"/>
+          <p:cNvSpPr/>
+          <p:nvPr/>
+        </p:nvSpPr>
+        <p:spPr>
+          <a:xfrm>
+            <a:off x="7340501" y="177701"/>
+            <a:ext cx="1168301" cy="279350"/>
+          </a:xfrm>
+          <a:prstGeom prst="roundRect">
+            <a:avLst>
+              <a:gd name="adj" fmla="val 22731"/>
+            </a:avLst>
+          </a:prstGeom>
+          <a:solidFill>
+            <a:srgbClr val="1A7F37"/>
+          </a:solidFill>
+          <a:ln/>
+        </p:spPr>
+        <p:txBody>
+          <a:bodyPr wrap="square" rtlCol="0" anchor="ctr"/>
+          <a:lstStyle/>
+          <a:p>
+            <a:pPr indent="0" marL="0">
+              <a:buNone/>
+            </a:pPr>
+            <a:endParaRPr lang="en-US" dirty="0"/>
+          </a:p>
+        </p:txBody>
+      </p:sp>
+      <p:sp>
+        <p:nvSpPr>
+          <p:cNvPr id="4" name="Text 1"/>
+          <p:cNvSpPr/>
+          <p:nvPr/>
+        </p:nvSpPr>
+        <p:spPr>
+          <a:xfrm>
+            <a:off x="7461041" y="231577"/>
+            <a:ext cx="927071" cy="171450"/>
+          </a:xfrm>
+          <a:prstGeom prst="rect">
+            <a:avLst/>
+          </a:prstGeom>
+          <a:noFill/>
+          <a:ln/>
+        </p:spPr>
+        <p:txBody>
+          <a:bodyPr wrap="square" lIns="0" tIns="0" rIns="0" bIns="0" rtlCol="0" anchor="t"/>
+          <a:lstStyle/>
+          <a:p>
+            <a:pPr algn="ctr" indent="0" marL="0">
+              <a:buNone/>
+            </a:pPr>
+            <a:r>
+              <a:rPr lang="en-US" sz="1150" b="1" dirty="0">
+                <a:solidFill>
+                  <a:srgbClr val="FFFFFF"/>
+                </a:solidFill>
+                <a:latin typeface="Arial" pitchFamily="34" charset="0"/>
+                <a:ea typeface="Arial" pitchFamily="34" charset="-122"/>
+                <a:cs typeface="Arial" pitchFamily="34" charset="-120"/>
+              </a:rPr>
+              <a:t>CHAPTER 04</a:t>
+            </a:r>
+            <a:endParaRPr lang="en-US" sz="1150" dirty="0"/>
+          </a:p>
+        </p:txBody>
+      </p:sp>
+      <p:pic>
+        <p:nvPicPr>
+          <p:cNvPr id="5" name="Image 1" descr="/Users/danwahlin/.copilot/session-state/56a7a0da-def8-48d4-b5e8-0ac3878cb8dd/files/slides-build/icons/FaGithub-1F2328.png">
+            <a:hlinkClick r:id="rId3" tooltip="https://github.com/github/copilot-app-for-beginners/tree/main/04-skills-custom-agents"/>
+          </p:cNvPr>
+          <p:cNvPicPr>
+            <a:picLocks noChangeAspect="1"/>
+          </p:cNvPicPr>
+          <p:nvPr/>
+        </p:nvPicPr>
+        <p:blipFill>
+          <a:blip r:embed="rId2"/>
+          <a:stretch>
+            <a:fillRect/>
+          </a:stretch>
+        </p:blipFill>
+        <p:spPr>
+          <a:xfrm>
             <a:off x="8610600" y="165050"/>
             <a:ext cx="304800" cy="304800"/>
           </a:xfrm>
@@ -11799,7 +11683,7 @@
       </p:pic>
       <p:sp>
         <p:nvSpPr>
-          <p:cNvPr id="6" name="Text 3"/>
+          <p:cNvPr id="6" name="Text 2"/>
           <p:cNvSpPr/>
           <p:nvPr/>
         </p:nvSpPr>
@@ -11838,7 +11722,7 @@
       </p:sp>
       <p:sp>
         <p:nvSpPr>
-          <p:cNvPr id="7" name="Text 4"/>
+          <p:cNvPr id="7" name="Text 3"/>
           <p:cNvSpPr/>
           <p:nvPr/>
         </p:nvSpPr>
@@ -11883,7 +11767,7 @@
       </p:sp>
       <p:sp>
         <p:nvSpPr>
-          <p:cNvPr id="8" name="Text 5"/>
+          <p:cNvPr id="8" name="Text 4"/>
           <p:cNvSpPr/>
           <p:nvPr/>
         </p:nvSpPr>
@@ -11928,7 +11812,7 @@
       </p:sp>
       <p:sp>
         <p:nvSpPr>
-          <p:cNvPr id="9" name="Text 6"/>
+          <p:cNvPr id="9" name="Text 5"/>
           <p:cNvSpPr/>
           <p:nvPr/>
         </p:nvSpPr>
@@ -11971,63 +11855,7 @@
       </p:sp>
       <p:pic>
         <p:nvPicPr>
-          <p:cNvPr id="10" name="Image 1" descr="/Users/danwahlin/.copilot/session-state/56a7a0da-def8-48d4-b5e8-0ac3878cb8dd/files/slides-build/img/04-song-chart-skills.jpg">    </p:cNvPr>
-          <p:cNvPicPr>
-            <a:picLocks noChangeAspect="1"/>
-          </p:cNvPicPr>
-          <p:nvPr/>
-        </p:nvPicPr>
-        <p:blipFill>
-          <a:blip r:embed="rId3"/>
-          <a:stretch>
-            <a:fillRect/>
-          </a:stretch>
-        </p:blipFill>
-        <p:spPr>
-          <a:xfrm>
-            <a:off x="558701" y="1747986"/>
-            <a:ext cx="4089350" cy="2726680"/>
-          </a:xfrm>
-          <a:prstGeom prst="rect">
-            <a:avLst/>
-          </a:prstGeom>
-        </p:spPr>
-      </p:pic>
-      <p:sp>
-        <p:nvSpPr>
-          <p:cNvPr id="11" name="Text 7"/>
-          <p:cNvSpPr/>
-          <p:nvPr/>
-        </p:nvSpPr>
-        <p:spPr>
-          <a:xfrm>
-            <a:off x="5003750" y="1986260"/>
-            <a:ext cx="381000" cy="381000"/>
-          </a:xfrm>
-          <a:prstGeom prst="roundRect">
-            <a:avLst>
-              <a:gd name="adj" fmla="val 23333"/>
-            </a:avLst>
-          </a:prstGeom>
-          <a:solidFill>
-            <a:srgbClr val="FBEFFF"/>
-          </a:solidFill>
-          <a:ln/>
-        </p:spPr>
-        <p:txBody>
-          <a:bodyPr wrap="square" rtlCol="0" anchor="ctr"/>
-          <a:lstStyle/>
-          <a:p>
-            <a:pPr indent="0" marL="0">
-              <a:buNone/>
-            </a:pPr>
-            <a:endParaRPr lang="en-US" dirty="0"/>
-          </a:p>
-        </p:txBody>
-      </p:sp>
-      <p:pic>
-        <p:nvPicPr>
-          <p:cNvPr id="12" name="Image 2" descr="/Users/danwahlin/.copilot/session-state/56a7a0da-def8-48d4-b5e8-0ac3878cb8dd/files/slides-build/icons/GoChecklist-8250DF.png">    </p:cNvPr>
+          <p:cNvPr id="10" name="Image 2" descr="/Users/danwahlin/.copilot/session-state/56a7a0da-def8-48d4-b5e8-0ac3878cb8dd/files/slides-build/img/04-song-chart-skills.jpg">    </p:cNvPr>
           <p:cNvPicPr>
             <a:picLocks noChangeAspect="1"/>
           </p:cNvPicPr>
@@ -12041,8 +11869,8 @@
         </p:blipFill>
         <p:spPr>
           <a:xfrm>
-            <a:off x="5086350" y="2068860"/>
-            <a:ext cx="215801" cy="215801"/>
+            <a:off x="558701" y="1747986"/>
+            <a:ext cx="4089350" cy="2726680"/>
           </a:xfrm>
           <a:prstGeom prst="rect">
             <a:avLst/>
@@ -12051,94 +11879,13 @@
       </p:pic>
       <p:sp>
         <p:nvSpPr>
-          <p:cNvPr id="13" name="Text 8"/>
-          <p:cNvSpPr/>
-          <p:nvPr/>
-        </p:nvSpPr>
-        <p:spPr>
-          <a:xfrm>
-            <a:off x="5537150" y="1950839"/>
-            <a:ext cx="2449672" cy="228600"/>
-          </a:xfrm>
-          <a:prstGeom prst="rect">
-            <a:avLst/>
-          </a:prstGeom>
-          <a:noFill/>
-          <a:ln/>
-        </p:spPr>
-        <p:txBody>
-          <a:bodyPr wrap="square" lIns="0" tIns="0" rIns="0" bIns="0" rtlCol="0" anchor="t"/>
-          <a:lstStyle/>
-          <a:p>
-            <a:pPr algn="l" indent="0" marL="0">
-              <a:buNone/>
-            </a:pPr>
-            <a:r>
-              <a:rPr lang="en-US" sz="1550" b="1" dirty="0">
-                <a:solidFill>
-                  <a:srgbClr val="1F2328"/>
-                </a:solidFill>
-                <a:latin typeface="Arial" pitchFamily="34" charset="0"/>
-                <a:ea typeface="Arial" pitchFamily="34" charset="-122"/>
-                <a:cs typeface="Arial" pitchFamily="34" charset="-120"/>
-              </a:rPr>
-              <a:t>A skill is the chart</a:t>
-            </a:r>
-            <a:endParaRPr lang="en-US" sz="1550" dirty="0"/>
-          </a:p>
-        </p:txBody>
-      </p:sp>
-      <p:sp>
-        <p:nvSpPr>
-          <p:cNvPr id="14" name="Text 9"/>
-          <p:cNvSpPr/>
-          <p:nvPr/>
-        </p:nvSpPr>
-        <p:spPr>
-          <a:xfrm>
-            <a:off x="5537150" y="2204740"/>
-            <a:ext cx="2449672" cy="198090"/>
-          </a:xfrm>
-          <a:prstGeom prst="rect">
-            <a:avLst/>
-          </a:prstGeom>
-          <a:noFill/>
-          <a:ln/>
-        </p:spPr>
-        <p:txBody>
-          <a:bodyPr wrap="square" lIns="0" tIns="0" rIns="0" bIns="0" rtlCol="0" anchor="t"/>
-          <a:lstStyle/>
-          <a:p>
-            <a:pPr algn="l" indent="0" marL="0">
-              <a:lnSpc>
-                <a:spcPts val="1560"/>
-              </a:lnSpc>
-              <a:buNone/>
-            </a:pPr>
-            <a:r>
-              <a:rPr lang="en-US" sz="1350" dirty="0">
-                <a:solidFill>
-                  <a:srgbClr val="59636E"/>
-                </a:solidFill>
-                <a:latin typeface="Arial" pitchFamily="34" charset="0"/>
-                <a:ea typeface="Arial" pitchFamily="34" charset="-122"/>
-                <a:cs typeface="Arial" pitchFamily="34" charset="-120"/>
-              </a:rPr>
-              <a:t>Instructions for a repeated task.</a:t>
-            </a:r>
-            <a:endParaRPr lang="en-US" sz="1350" dirty="0"/>
-          </a:p>
-        </p:txBody>
-      </p:sp>
-      <p:sp>
-        <p:nvSpPr>
-          <p:cNvPr id="15" name="Text 10"/>
-          <p:cNvSpPr/>
-          <p:nvPr/>
-        </p:nvSpPr>
-        <p:spPr>
-          <a:xfrm>
-            <a:off x="5003750" y="2920752"/>
+          <p:cNvPr id="11" name="Text 6"/>
+          <p:cNvSpPr/>
+          <p:nvPr/>
+        </p:nvSpPr>
+        <p:spPr>
+          <a:xfrm>
+            <a:off x="5003750" y="1986260"/>
             <a:ext cx="381000" cy="381000"/>
           </a:xfrm>
           <a:prstGeom prst="roundRect">
@@ -12147,7 +11894,7 @@
             </a:avLst>
           </a:prstGeom>
           <a:solidFill>
-            <a:srgbClr val="DAFBE1"/>
+            <a:srgbClr val="FBEFFF"/>
           </a:solidFill>
           <a:ln/>
         </p:spPr>
@@ -12164,7 +11911,7 @@
       </p:sp>
       <p:pic>
         <p:nvPicPr>
-          <p:cNvPr id="16" name="Image 3" descr="/Users/danwahlin/.copilot/session-state/56a7a0da-def8-48d4-b5e8-0ac3878cb8dd/files/slides-build/icons/GoPerson-1A7F37.png">    </p:cNvPr>
+          <p:cNvPr id="12" name="Image 3" descr="/Users/danwahlin/.copilot/session-state/56a7a0da-def8-48d4-b5e8-0ac3878cb8dd/files/slides-build/icons/GoChecklist-8250DF.png">    </p:cNvPr>
           <p:cNvPicPr>
             <a:picLocks noChangeAspect="1"/>
           </p:cNvPicPr>
@@ -12178,7 +11925,7 @@
         </p:blipFill>
         <p:spPr>
           <a:xfrm>
-            <a:off x="5086350" y="3003352"/>
+            <a:off x="5086350" y="2068860"/>
             <a:ext cx="215801" cy="215801"/>
           </a:xfrm>
           <a:prstGeom prst="rect">
@@ -12188,14 +11935,14 @@
       </p:pic>
       <p:sp>
         <p:nvSpPr>
-          <p:cNvPr id="17" name="Text 11"/>
-          <p:cNvSpPr/>
-          <p:nvPr/>
-        </p:nvSpPr>
-        <p:spPr>
-          <a:xfrm>
-            <a:off x="5537150" y="2885331"/>
-            <a:ext cx="2409444" cy="228600"/>
+          <p:cNvPr id="13" name="Text 7"/>
+          <p:cNvSpPr/>
+          <p:nvPr/>
+        </p:nvSpPr>
+        <p:spPr>
+          <a:xfrm>
+            <a:off x="5537150" y="1950839"/>
+            <a:ext cx="2449672" cy="228600"/>
           </a:xfrm>
           <a:prstGeom prst="rect">
             <a:avLst/>
@@ -12219,7 +11966,7 @@
                 <a:ea typeface="Arial" pitchFamily="34" charset="-122"/>
                 <a:cs typeface="Arial" pitchFamily="34" charset="-120"/>
               </a:rPr>
-              <a:t>An agent is the specialist</a:t>
+              <a:t>A skill is the chart</a:t>
             </a:r>
             <a:endParaRPr lang="en-US" sz="1550" dirty="0"/>
           </a:p>
@@ -12227,14 +11974,14 @@
       </p:sp>
       <p:sp>
         <p:nvSpPr>
-          <p:cNvPr id="18" name="Text 12"/>
-          <p:cNvSpPr/>
-          <p:nvPr/>
-        </p:nvSpPr>
-        <p:spPr>
-          <a:xfrm>
-            <a:off x="5537150" y="3139232"/>
-            <a:ext cx="2409444" cy="198090"/>
+          <p:cNvPr id="14" name="Text 8"/>
+          <p:cNvSpPr/>
+          <p:nvPr/>
+        </p:nvSpPr>
+        <p:spPr>
+          <a:xfrm>
+            <a:off x="5537150" y="2204740"/>
+            <a:ext cx="2449672" cy="198090"/>
           </a:xfrm>
           <a:prstGeom prst="rect">
             <a:avLst/>
@@ -12261,7 +12008,7 @@
                 <a:ea typeface="Arial" pitchFamily="34" charset="-122"/>
                 <a:cs typeface="Arial" pitchFamily="34" charset="-120"/>
               </a:rPr>
-              <a:t>A role with the right tools.</a:t>
+              <a:t>Instructions for a repeated task.</a:t>
             </a:r>
             <a:endParaRPr lang="en-US" sz="1350" dirty="0"/>
           </a:p>
@@ -12269,13 +12016,13 @@
       </p:sp>
       <p:sp>
         <p:nvSpPr>
-          <p:cNvPr id="19" name="Text 13"/>
-          <p:cNvSpPr/>
-          <p:nvPr/>
-        </p:nvSpPr>
-        <p:spPr>
-          <a:xfrm>
-            <a:off x="5003750" y="3855244"/>
+          <p:cNvPr id="15" name="Text 9"/>
+          <p:cNvSpPr/>
+          <p:nvPr/>
+        </p:nvSpPr>
+        <p:spPr>
+          <a:xfrm>
+            <a:off x="5003750" y="2920752"/>
             <a:ext cx="381000" cy="381000"/>
           </a:xfrm>
           <a:prstGeom prst="roundRect">
@@ -12284,7 +12031,7 @@
             </a:avLst>
           </a:prstGeom>
           <a:solidFill>
-            <a:srgbClr val="DDF4FF"/>
+            <a:srgbClr val="DAFBE1"/>
           </a:solidFill>
           <a:ln/>
         </p:spPr>
@@ -12301,7 +12048,7 @@
       </p:sp>
       <p:pic>
         <p:nvPicPr>
-          <p:cNvPr id="20" name="Image 4" descr="/Users/danwahlin/.copilot/session-state/56a7a0da-def8-48d4-b5e8-0ac3878cb8dd/files/slides-build/icons/GoEye-0969DA.png">    </p:cNvPr>
+          <p:cNvPr id="16" name="Image 4" descr="/Users/danwahlin/.copilot/session-state/56a7a0da-def8-48d4-b5e8-0ac3878cb8dd/files/slides-build/icons/GoPerson-1A7F37.png">    </p:cNvPr>
           <p:cNvPicPr>
             <a:picLocks noChangeAspect="1"/>
           </p:cNvPicPr>
@@ -12315,6 +12062,143 @@
         </p:blipFill>
         <p:spPr>
           <a:xfrm>
+            <a:off x="5086350" y="3003352"/>
+            <a:ext cx="215801" cy="215801"/>
+          </a:xfrm>
+          <a:prstGeom prst="rect">
+            <a:avLst/>
+          </a:prstGeom>
+        </p:spPr>
+      </p:pic>
+      <p:sp>
+        <p:nvSpPr>
+          <p:cNvPr id="17" name="Text 10"/>
+          <p:cNvSpPr/>
+          <p:nvPr/>
+        </p:nvSpPr>
+        <p:spPr>
+          <a:xfrm>
+            <a:off x="5537150" y="2885331"/>
+            <a:ext cx="2409444" cy="228600"/>
+          </a:xfrm>
+          <a:prstGeom prst="rect">
+            <a:avLst/>
+          </a:prstGeom>
+          <a:noFill/>
+          <a:ln/>
+        </p:spPr>
+        <p:txBody>
+          <a:bodyPr wrap="square" lIns="0" tIns="0" rIns="0" bIns="0" rtlCol="0" anchor="t"/>
+          <a:lstStyle/>
+          <a:p>
+            <a:pPr algn="l" indent="0" marL="0">
+              <a:buNone/>
+            </a:pPr>
+            <a:r>
+              <a:rPr lang="en-US" sz="1550" b="1" dirty="0">
+                <a:solidFill>
+                  <a:srgbClr val="1F2328"/>
+                </a:solidFill>
+                <a:latin typeface="Arial" pitchFamily="34" charset="0"/>
+                <a:ea typeface="Arial" pitchFamily="34" charset="-122"/>
+                <a:cs typeface="Arial" pitchFamily="34" charset="-120"/>
+              </a:rPr>
+              <a:t>An agent is the specialist</a:t>
+            </a:r>
+            <a:endParaRPr lang="en-US" sz="1550" dirty="0"/>
+          </a:p>
+        </p:txBody>
+      </p:sp>
+      <p:sp>
+        <p:nvSpPr>
+          <p:cNvPr id="18" name="Text 11"/>
+          <p:cNvSpPr/>
+          <p:nvPr/>
+        </p:nvSpPr>
+        <p:spPr>
+          <a:xfrm>
+            <a:off x="5537150" y="3139232"/>
+            <a:ext cx="2409444" cy="198090"/>
+          </a:xfrm>
+          <a:prstGeom prst="rect">
+            <a:avLst/>
+          </a:prstGeom>
+          <a:noFill/>
+          <a:ln/>
+        </p:spPr>
+        <p:txBody>
+          <a:bodyPr wrap="square" lIns="0" tIns="0" rIns="0" bIns="0" rtlCol="0" anchor="t"/>
+          <a:lstStyle/>
+          <a:p>
+            <a:pPr algn="l" indent="0" marL="0">
+              <a:lnSpc>
+                <a:spcPts val="1560"/>
+              </a:lnSpc>
+              <a:buNone/>
+            </a:pPr>
+            <a:r>
+              <a:rPr lang="en-US" sz="1350" dirty="0">
+                <a:solidFill>
+                  <a:srgbClr val="59636E"/>
+                </a:solidFill>
+                <a:latin typeface="Arial" pitchFamily="34" charset="0"/>
+                <a:ea typeface="Arial" pitchFamily="34" charset="-122"/>
+                <a:cs typeface="Arial" pitchFamily="34" charset="-120"/>
+              </a:rPr>
+              <a:t>A role with the right tools.</a:t>
+            </a:r>
+            <a:endParaRPr lang="en-US" sz="1350" dirty="0"/>
+          </a:p>
+        </p:txBody>
+      </p:sp>
+      <p:sp>
+        <p:nvSpPr>
+          <p:cNvPr id="19" name="Text 12"/>
+          <p:cNvSpPr/>
+          <p:nvPr/>
+        </p:nvSpPr>
+        <p:spPr>
+          <a:xfrm>
+            <a:off x="5003750" y="3855244"/>
+            <a:ext cx="381000" cy="381000"/>
+          </a:xfrm>
+          <a:prstGeom prst="roundRect">
+            <a:avLst>
+              <a:gd name="adj" fmla="val 23333"/>
+            </a:avLst>
+          </a:prstGeom>
+          <a:solidFill>
+            <a:srgbClr val="DDF4FF"/>
+          </a:solidFill>
+          <a:ln/>
+        </p:spPr>
+        <p:txBody>
+          <a:bodyPr wrap="square" rtlCol="0" anchor="ctr"/>
+          <a:lstStyle/>
+          <a:p>
+            <a:pPr indent="0" marL="0">
+              <a:buNone/>
+            </a:pPr>
+            <a:endParaRPr lang="en-US" dirty="0"/>
+          </a:p>
+        </p:txBody>
+      </p:sp>
+      <p:pic>
+        <p:nvPicPr>
+          <p:cNvPr id="20" name="Image 5" descr="/Users/danwahlin/.copilot/session-state/56a7a0da-def8-48d4-b5e8-0ac3878cb8dd/files/slides-build/icons/GoEye-0969DA.png">    </p:cNvPr>
+          <p:cNvPicPr>
+            <a:picLocks noChangeAspect="1"/>
+          </p:cNvPicPr>
+          <p:nvPr/>
+        </p:nvPicPr>
+        <p:blipFill>
+          <a:blip r:embed="rId7"/>
+          <a:stretch>
+            <a:fillRect/>
+          </a:stretch>
+        </p:blipFill>
+        <p:spPr>
+          <a:xfrm>
             <a:off x="5086350" y="3937843"/>
             <a:ext cx="215801" cy="215801"/>
           </a:xfrm>
@@ -12325,7 +12209,7 @@
       </p:pic>
       <p:sp>
         <p:nvSpPr>
-          <p:cNvPr id="21" name="Text 14"/>
+          <p:cNvPr id="21" name="Text 13"/>
           <p:cNvSpPr/>
           <p:nvPr/>
         </p:nvSpPr>
@@ -12364,7 +12248,7 @@
       </p:sp>
       <p:sp>
         <p:nvSpPr>
-          <p:cNvPr id="22" name="Text 15"/>
+          <p:cNvPr id="22" name="Text 14"/>
           <p:cNvSpPr/>
           <p:nvPr/>
         </p:nvSpPr>
@@ -12436,112 +12320,9 @@
           <a:chExt cx="0" cy="0"/>
         </a:xfrm>
       </p:grpSpPr>
-      <p:sp>
-        <p:nvSpPr>
-          <p:cNvPr id="2" name="Text 0"/>
-          <p:cNvSpPr/>
-          <p:nvPr/>
-        </p:nvSpPr>
-        <p:spPr>
-          <a:xfrm>
-            <a:off x="0" y="0"/>
-            <a:ext cx="9144000" cy="76200"/>
-          </a:xfrm>
-          <a:prstGeom prst="rect">
-            <a:avLst/>
-          </a:prstGeom>
-          <a:solidFill>
-            <a:srgbClr val="0969DA"/>
-          </a:solidFill>
-          <a:ln/>
-        </p:spPr>
-        <p:txBody>
-          <a:bodyPr wrap="square" rtlCol="0" anchor="ctr"/>
-          <a:lstStyle/>
-          <a:p>
-            <a:pPr indent="0" marL="0">
-              <a:buNone/>
-            </a:pPr>
-            <a:endParaRPr lang="en-US" dirty="0"/>
-          </a:p>
-        </p:txBody>
-      </p:sp>
-      <p:sp>
-        <p:nvSpPr>
-          <p:cNvPr id="3" name="Text 1"/>
-          <p:cNvSpPr/>
-          <p:nvPr/>
-        </p:nvSpPr>
-        <p:spPr>
-          <a:xfrm>
-            <a:off x="7340501" y="177701"/>
-            <a:ext cx="1168301" cy="279350"/>
-          </a:xfrm>
-          <a:prstGeom prst="roundRect">
-            <a:avLst>
-              <a:gd name="adj" fmla="val 22731"/>
-            </a:avLst>
-          </a:prstGeom>
-          <a:solidFill>
-            <a:srgbClr val="1A7F37"/>
-          </a:solidFill>
-          <a:ln/>
-        </p:spPr>
-        <p:txBody>
-          <a:bodyPr wrap="square" rtlCol="0" anchor="ctr"/>
-          <a:lstStyle/>
-          <a:p>
-            <a:pPr indent="0" marL="0">
-              <a:buNone/>
-            </a:pPr>
-            <a:endParaRPr lang="en-US" dirty="0"/>
-          </a:p>
-        </p:txBody>
-      </p:sp>
-      <p:sp>
-        <p:nvSpPr>
-          <p:cNvPr id="4" name="Text 2"/>
-          <p:cNvSpPr/>
-          <p:nvPr/>
-        </p:nvSpPr>
-        <p:spPr>
-          <a:xfrm>
-            <a:off x="7461041" y="231577"/>
-            <a:ext cx="927071" cy="171450"/>
-          </a:xfrm>
-          <a:prstGeom prst="rect">
-            <a:avLst/>
-          </a:prstGeom>
-          <a:noFill/>
-          <a:ln/>
-        </p:spPr>
-        <p:txBody>
-          <a:bodyPr wrap="square" lIns="0" tIns="0" rIns="0" bIns="0" rtlCol="0" anchor="t"/>
-          <a:lstStyle/>
-          <a:p>
-            <a:pPr algn="ctr" indent="0" marL="0">
-              <a:buNone/>
-            </a:pPr>
-            <a:r>
-              <a:rPr lang="en-US" sz="1150" b="1" dirty="0">
-                <a:solidFill>
-                  <a:srgbClr val="FFFFFF"/>
-                </a:solidFill>
-                <a:latin typeface="Arial" pitchFamily="34" charset="0"/>
-                <a:ea typeface="Arial" pitchFamily="34" charset="-122"/>
-                <a:cs typeface="Arial" pitchFamily="34" charset="-120"/>
-              </a:rPr>
-              <a:t>CHAPTER 04</a:t>
-            </a:r>
-            <a:endParaRPr lang="en-US" sz="1150" dirty="0"/>
-          </a:p>
-        </p:txBody>
-      </p:sp>
       <p:pic>
         <p:nvPicPr>
-          <p:cNvPr id="5" name="Image 0" descr="/Users/danwahlin/.copilot/session-state/56a7a0da-def8-48d4-b5e8-0ac3878cb8dd/files/slides-build/icons/FaGithub-1F2328.png">
-            <a:hlinkClick r:id="rId2" tooltip="https://github.com/github/copilot-app-for-beginners/tree/main/04-skills-custom-agents"/>
-          </p:cNvPr>
+          <p:cNvPr id="2" name="Image 0" descr="/Users/danwahlin/.copilot/session-state/56a7a0da-def8-48d4-b5e8-0ac3878cb8dd/files/slides-build/img/grad-corner.png">    </p:cNvPr>
           <p:cNvPicPr>
             <a:picLocks noChangeAspect="1"/>
           </p:cNvPicPr>
@@ -12555,6 +12336,103 @@
         </p:blipFill>
         <p:spPr>
           <a:xfrm>
+            <a:off x="6349901" y="0"/>
+            <a:ext cx="2793950" cy="1308050"/>
+          </a:xfrm>
+          <a:prstGeom prst="rect">
+            <a:avLst/>
+          </a:prstGeom>
+        </p:spPr>
+      </p:pic>
+      <p:sp>
+        <p:nvSpPr>
+          <p:cNvPr id="3" name="Text 0"/>
+          <p:cNvSpPr/>
+          <p:nvPr/>
+        </p:nvSpPr>
+        <p:spPr>
+          <a:xfrm>
+            <a:off x="7340501" y="177701"/>
+            <a:ext cx="1168301" cy="279350"/>
+          </a:xfrm>
+          <a:prstGeom prst="roundRect">
+            <a:avLst>
+              <a:gd name="adj" fmla="val 22731"/>
+            </a:avLst>
+          </a:prstGeom>
+          <a:solidFill>
+            <a:srgbClr val="1A7F37"/>
+          </a:solidFill>
+          <a:ln/>
+        </p:spPr>
+        <p:txBody>
+          <a:bodyPr wrap="square" rtlCol="0" anchor="ctr"/>
+          <a:lstStyle/>
+          <a:p>
+            <a:pPr indent="0" marL="0">
+              <a:buNone/>
+            </a:pPr>
+            <a:endParaRPr lang="en-US" dirty="0"/>
+          </a:p>
+        </p:txBody>
+      </p:sp>
+      <p:sp>
+        <p:nvSpPr>
+          <p:cNvPr id="4" name="Text 1"/>
+          <p:cNvSpPr/>
+          <p:nvPr/>
+        </p:nvSpPr>
+        <p:spPr>
+          <a:xfrm>
+            <a:off x="7461041" y="231577"/>
+            <a:ext cx="927071" cy="171450"/>
+          </a:xfrm>
+          <a:prstGeom prst="rect">
+            <a:avLst/>
+          </a:prstGeom>
+          <a:noFill/>
+          <a:ln/>
+        </p:spPr>
+        <p:txBody>
+          <a:bodyPr wrap="square" lIns="0" tIns="0" rIns="0" bIns="0" rtlCol="0" anchor="t"/>
+          <a:lstStyle/>
+          <a:p>
+            <a:pPr algn="ctr" indent="0" marL="0">
+              <a:buNone/>
+            </a:pPr>
+            <a:r>
+              <a:rPr lang="en-US" sz="1150" b="1" dirty="0">
+                <a:solidFill>
+                  <a:srgbClr val="FFFFFF"/>
+                </a:solidFill>
+                <a:latin typeface="Arial" pitchFamily="34" charset="0"/>
+                <a:ea typeface="Arial" pitchFamily="34" charset="-122"/>
+                <a:cs typeface="Arial" pitchFamily="34" charset="-120"/>
+              </a:rPr>
+              <a:t>CHAPTER 04</a:t>
+            </a:r>
+            <a:endParaRPr lang="en-US" sz="1150" dirty="0"/>
+          </a:p>
+        </p:txBody>
+      </p:sp>
+      <p:pic>
+        <p:nvPicPr>
+          <p:cNvPr id="5" name="Image 1" descr="/Users/danwahlin/.copilot/session-state/56a7a0da-def8-48d4-b5e8-0ac3878cb8dd/files/slides-build/icons/FaGithub-1F2328.png">
+            <a:hlinkClick r:id="rId3" tooltip="https://github.com/github/copilot-app-for-beginners/tree/main/04-skills-custom-agents"/>
+          </p:cNvPr>
+          <p:cNvPicPr>
+            <a:picLocks noChangeAspect="1"/>
+          </p:cNvPicPr>
+          <p:nvPr/>
+        </p:nvPicPr>
+        <p:blipFill>
+          <a:blip r:embed="rId2"/>
+          <a:stretch>
+            <a:fillRect/>
+          </a:stretch>
+        </p:blipFill>
+        <p:spPr>
+          <a:xfrm>
             <a:off x="8610600" y="165050"/>
             <a:ext cx="304800" cy="304800"/>
           </a:xfrm>
@@ -12565,7 +12443,7 @@
       </p:pic>
       <p:sp>
         <p:nvSpPr>
-          <p:cNvPr id="6" name="Text 3"/>
+          <p:cNvPr id="6" name="Text 2"/>
           <p:cNvSpPr/>
           <p:nvPr/>
         </p:nvSpPr>
@@ -12604,7 +12482,7 @@
       </p:sp>
       <p:sp>
         <p:nvSpPr>
-          <p:cNvPr id="7" name="Text 4"/>
+          <p:cNvPr id="7" name="Text 3"/>
           <p:cNvSpPr/>
           <p:nvPr/>
         </p:nvSpPr>
@@ -12649,7 +12527,7 @@
       </p:sp>
       <p:sp>
         <p:nvSpPr>
-          <p:cNvPr id="8" name="Text 5"/>
+          <p:cNvPr id="8" name="Text 4"/>
           <p:cNvSpPr/>
           <p:nvPr/>
         </p:nvSpPr>
@@ -12692,63 +12570,7 @@
       </p:sp>
       <p:pic>
         <p:nvPicPr>
-          <p:cNvPr id="9" name="Image 1" descr="/Users/danwahlin/.copilot/session-state/56a7a0da-def8-48d4-b5e8-0ac3878cb8dd/files/slides-build/img/04-skill-vs-one-off-prompt.jpg">    </p:cNvPr>
-          <p:cNvPicPr>
-            <a:picLocks noChangeAspect="1"/>
-          </p:cNvPicPr>
-          <p:nvPr/>
-        </p:nvPicPr>
-        <p:blipFill>
-          <a:blip r:embed="rId3"/>
-          <a:stretch>
-            <a:fillRect/>
-          </a:stretch>
-        </p:blipFill>
-        <p:spPr>
-          <a:xfrm>
-            <a:off x="558701" y="1468636"/>
-            <a:ext cx="4089350" cy="2726680"/>
-          </a:xfrm>
-          <a:prstGeom prst="rect">
-            <a:avLst/>
-          </a:prstGeom>
-        </p:spPr>
-      </p:pic>
-      <p:sp>
-        <p:nvSpPr>
-          <p:cNvPr id="10" name="Text 6"/>
-          <p:cNvSpPr/>
-          <p:nvPr/>
-        </p:nvSpPr>
-        <p:spPr>
-          <a:xfrm>
-            <a:off x="5003750" y="1937891"/>
-            <a:ext cx="381000" cy="381000"/>
-          </a:xfrm>
-          <a:prstGeom prst="roundRect">
-            <a:avLst>
-              <a:gd name="adj" fmla="val 23333"/>
-            </a:avLst>
-          </a:prstGeom>
-          <a:solidFill>
-            <a:srgbClr val="F6F8FA"/>
-          </a:solidFill>
-          <a:ln/>
-        </p:spPr>
-        <p:txBody>
-          <a:bodyPr wrap="square" rtlCol="0" anchor="ctr"/>
-          <a:lstStyle/>
-          <a:p>
-            <a:pPr indent="0" marL="0">
-              <a:buNone/>
-            </a:pPr>
-            <a:endParaRPr lang="en-US" dirty="0"/>
-          </a:p>
-        </p:txBody>
-      </p:sp>
-      <p:pic>
-        <p:nvPicPr>
-          <p:cNvPr id="11" name="Image 2" descr="/Users/danwahlin/.copilot/session-state/56a7a0da-def8-48d4-b5e8-0ac3878cb8dd/files/slides-build/icons/GoCommentDiscussion-59636E.png">    </p:cNvPr>
+          <p:cNvPr id="9" name="Image 2" descr="/Users/danwahlin/.copilot/session-state/56a7a0da-def8-48d4-b5e8-0ac3878cb8dd/files/slides-build/img/04-skill-vs-one-off-prompt.jpg">    </p:cNvPr>
           <p:cNvPicPr>
             <a:picLocks noChangeAspect="1"/>
           </p:cNvPicPr>
@@ -12762,8 +12584,8 @@
         </p:blipFill>
         <p:spPr>
           <a:xfrm>
-            <a:off x="5086350" y="2020491"/>
-            <a:ext cx="215801" cy="215801"/>
+            <a:off x="558701" y="1468636"/>
+            <a:ext cx="4089350" cy="2726680"/>
           </a:xfrm>
           <a:prstGeom prst="rect">
             <a:avLst/>
@@ -12772,94 +12594,13 @@
       </p:pic>
       <p:sp>
         <p:nvSpPr>
-          <p:cNvPr id="12" name="Text 7"/>
-          <p:cNvSpPr/>
-          <p:nvPr/>
-        </p:nvSpPr>
-        <p:spPr>
-          <a:xfrm>
-            <a:off x="5537150" y="1902470"/>
-            <a:ext cx="2362233" cy="228600"/>
-          </a:xfrm>
-          <a:prstGeom prst="rect">
-            <a:avLst/>
-          </a:prstGeom>
-          <a:noFill/>
-          <a:ln/>
-        </p:spPr>
-        <p:txBody>
-          <a:bodyPr wrap="square" lIns="0" tIns="0" rIns="0" bIns="0" rtlCol="0" anchor="t"/>
-          <a:lstStyle/>
-          <a:p>
-            <a:pPr algn="l" indent="0" marL="0">
-              <a:buNone/>
-            </a:pPr>
-            <a:r>
-              <a:rPr lang="en-US" sz="1550" b="1" dirty="0">
-                <a:solidFill>
-                  <a:srgbClr val="1F2328"/>
-                </a:solidFill>
-                <a:latin typeface="Arial" pitchFamily="34" charset="0"/>
-                <a:ea typeface="Arial" pitchFamily="34" charset="-122"/>
-                <a:cs typeface="Arial" pitchFamily="34" charset="-120"/>
-              </a:rPr>
-              <a:t>A one-off prompt</a:t>
-            </a:r>
-            <a:endParaRPr lang="en-US" sz="1550" dirty="0"/>
-          </a:p>
-        </p:txBody>
-      </p:sp>
-      <p:sp>
-        <p:nvSpPr>
-          <p:cNvPr id="13" name="Text 8"/>
-          <p:cNvSpPr/>
-          <p:nvPr/>
-        </p:nvSpPr>
-        <p:spPr>
-          <a:xfrm>
-            <a:off x="5537150" y="2156371"/>
-            <a:ext cx="2362233" cy="198090"/>
-          </a:xfrm>
-          <a:prstGeom prst="rect">
-            <a:avLst/>
-          </a:prstGeom>
-          <a:noFill/>
-          <a:ln/>
-        </p:spPr>
-        <p:txBody>
-          <a:bodyPr wrap="square" lIns="0" tIns="0" rIns="0" bIns="0" rtlCol="0" anchor="t"/>
-          <a:lstStyle/>
-          <a:p>
-            <a:pPr algn="l" indent="0" marL="0">
-              <a:lnSpc>
-                <a:spcPts val="1560"/>
-              </a:lnSpc>
-              <a:buNone/>
-            </a:pPr>
-            <a:r>
-              <a:rPr lang="en-US" sz="1350" dirty="0">
-                <a:solidFill>
-                  <a:srgbClr val="59636E"/>
-                </a:solidFill>
-                <a:latin typeface="Arial" pitchFamily="34" charset="0"/>
-                <a:ea typeface="Arial" pitchFamily="34" charset="-122"/>
-                <a:cs typeface="Arial" pitchFamily="34" charset="-120"/>
-              </a:rPr>
-              <a:t>Helps once, then you retype it.</a:t>
-            </a:r>
-            <a:endParaRPr lang="en-US" sz="1350" dirty="0"/>
-          </a:p>
-        </p:txBody>
-      </p:sp>
-      <p:sp>
-        <p:nvSpPr>
-          <p:cNvPr id="14" name="Text 9"/>
-          <p:cNvSpPr/>
-          <p:nvPr/>
-        </p:nvSpPr>
-        <p:spPr>
-          <a:xfrm>
-            <a:off x="5003750" y="2717602"/>
+          <p:cNvPr id="10" name="Text 5"/>
+          <p:cNvSpPr/>
+          <p:nvPr/>
+        </p:nvSpPr>
+        <p:spPr>
+          <a:xfrm>
+            <a:off x="5003750" y="1937891"/>
             <a:ext cx="381000" cy="381000"/>
           </a:xfrm>
           <a:prstGeom prst="roundRect">
@@ -12868,7 +12609,7 @@
             </a:avLst>
           </a:prstGeom>
           <a:solidFill>
-            <a:srgbClr val="FBEFFF"/>
+            <a:srgbClr val="F6F8FA"/>
           </a:solidFill>
           <a:ln/>
         </p:spPr>
@@ -12885,7 +12626,7 @@
       </p:sp>
       <p:pic>
         <p:nvPicPr>
-          <p:cNvPr id="15" name="Image 3" descr="/Users/danwahlin/.copilot/session-state/56a7a0da-def8-48d4-b5e8-0ac3878cb8dd/files/slides-build/icons/GoChecklist-8250DF.png">    </p:cNvPr>
+          <p:cNvPr id="11" name="Image 3" descr="/Users/danwahlin/.copilot/session-state/56a7a0da-def8-48d4-b5e8-0ac3878cb8dd/files/slides-build/icons/GoCommentDiscussion-59636E.png">    </p:cNvPr>
           <p:cNvPicPr>
             <a:picLocks noChangeAspect="1"/>
           </p:cNvPicPr>
@@ -12899,7 +12640,7 @@
         </p:blipFill>
         <p:spPr>
           <a:xfrm>
-            <a:off x="5086350" y="2800201"/>
+            <a:off x="5086350" y="2020491"/>
             <a:ext cx="215801" cy="215801"/>
           </a:xfrm>
           <a:prstGeom prst="rect">
@@ -12909,14 +12650,14 @@
       </p:pic>
       <p:sp>
         <p:nvSpPr>
-          <p:cNvPr id="16" name="Text 10"/>
-          <p:cNvSpPr/>
-          <p:nvPr/>
-        </p:nvSpPr>
-        <p:spPr>
-          <a:xfrm>
-            <a:off x="5537150" y="2583061"/>
-            <a:ext cx="3160725" cy="228600"/>
+          <p:cNvPr id="12" name="Text 6"/>
+          <p:cNvSpPr/>
+          <p:nvPr/>
+        </p:nvSpPr>
+        <p:spPr>
+          <a:xfrm>
+            <a:off x="5537150" y="1902470"/>
+            <a:ext cx="2362233" cy="228600"/>
           </a:xfrm>
           <a:prstGeom prst="rect">
             <a:avLst/>
@@ -12940,7 +12681,7 @@
                 <a:ea typeface="Arial" pitchFamily="34" charset="-122"/>
                 <a:cs typeface="Arial" pitchFamily="34" charset="-120"/>
               </a:rPr>
-              <a:t>A skill</a:t>
+              <a:t>A one-off prompt</a:t>
             </a:r>
             <a:endParaRPr lang="en-US" sz="1550" dirty="0"/>
           </a:p>
@@ -12948,14 +12689,14 @@
       </p:sp>
       <p:sp>
         <p:nvSpPr>
-          <p:cNvPr id="17" name="Text 11"/>
-          <p:cNvSpPr/>
-          <p:nvPr/>
-        </p:nvSpPr>
-        <p:spPr>
-          <a:xfrm>
-            <a:off x="5537150" y="2836962"/>
-            <a:ext cx="3160725" cy="396180"/>
+          <p:cNvPr id="13" name="Text 7"/>
+          <p:cNvSpPr/>
+          <p:nvPr/>
+        </p:nvSpPr>
+        <p:spPr>
+          <a:xfrm>
+            <a:off x="5537150" y="2156371"/>
+            <a:ext cx="2362233" cy="198090"/>
           </a:xfrm>
           <a:prstGeom prst="rect">
             <a:avLst/>
@@ -12982,7 +12723,7 @@
                 <a:ea typeface="Arial" pitchFamily="34" charset="-122"/>
                 <a:cs typeface="Arial" pitchFamily="34" charset="-120"/>
               </a:rPr>
-              <a:t>Lives in the repo. Same guidance every time.</a:t>
+              <a:t>Helps once, then you retype it.</a:t>
             </a:r>
             <a:endParaRPr lang="en-US" sz="1350" dirty="0"/>
           </a:p>
@@ -12990,13 +12731,13 @@
       </p:sp>
       <p:sp>
         <p:nvSpPr>
-          <p:cNvPr id="18" name="Text 12"/>
-          <p:cNvSpPr/>
-          <p:nvPr/>
-        </p:nvSpPr>
-        <p:spPr>
-          <a:xfrm>
-            <a:off x="5003750" y="3497163"/>
+          <p:cNvPr id="14" name="Text 8"/>
+          <p:cNvSpPr/>
+          <p:nvPr/>
+        </p:nvSpPr>
+        <p:spPr>
+          <a:xfrm>
+            <a:off x="5003750" y="2717602"/>
             <a:ext cx="381000" cy="381000"/>
           </a:xfrm>
           <a:prstGeom prst="roundRect">
@@ -13022,7 +12763,7 @@
       </p:sp>
       <p:pic>
         <p:nvPicPr>
-          <p:cNvPr id="19" name="Image 4" descr="/Users/danwahlin/.copilot/session-state/56a7a0da-def8-48d4-b5e8-0ac3878cb8dd/files/slides-build/icons/GoPeople-8250DF.png">    </p:cNvPr>
+          <p:cNvPr id="15" name="Image 4" descr="/Users/danwahlin/.copilot/session-state/56a7a0da-def8-48d4-b5e8-0ac3878cb8dd/files/slides-build/icons/GoChecklist-8250DF.png">    </p:cNvPr>
           <p:cNvPicPr>
             <a:picLocks noChangeAspect="1"/>
           </p:cNvPicPr>
@@ -13036,6 +12777,143 @@
         </p:blipFill>
         <p:spPr>
           <a:xfrm>
+            <a:off x="5086350" y="2800201"/>
+            <a:ext cx="215801" cy="215801"/>
+          </a:xfrm>
+          <a:prstGeom prst="rect">
+            <a:avLst/>
+          </a:prstGeom>
+        </p:spPr>
+      </p:pic>
+      <p:sp>
+        <p:nvSpPr>
+          <p:cNvPr id="16" name="Text 9"/>
+          <p:cNvSpPr/>
+          <p:nvPr/>
+        </p:nvSpPr>
+        <p:spPr>
+          <a:xfrm>
+            <a:off x="5537150" y="2583061"/>
+            <a:ext cx="3160725" cy="228600"/>
+          </a:xfrm>
+          <a:prstGeom prst="rect">
+            <a:avLst/>
+          </a:prstGeom>
+          <a:noFill/>
+          <a:ln/>
+        </p:spPr>
+        <p:txBody>
+          <a:bodyPr wrap="square" lIns="0" tIns="0" rIns="0" bIns="0" rtlCol="0" anchor="t"/>
+          <a:lstStyle/>
+          <a:p>
+            <a:pPr algn="l" indent="0" marL="0">
+              <a:buNone/>
+            </a:pPr>
+            <a:r>
+              <a:rPr lang="en-US" sz="1550" b="1" dirty="0">
+                <a:solidFill>
+                  <a:srgbClr val="1F2328"/>
+                </a:solidFill>
+                <a:latin typeface="Arial" pitchFamily="34" charset="0"/>
+                <a:ea typeface="Arial" pitchFamily="34" charset="-122"/>
+                <a:cs typeface="Arial" pitchFamily="34" charset="-120"/>
+              </a:rPr>
+              <a:t>A skill</a:t>
+            </a:r>
+            <a:endParaRPr lang="en-US" sz="1550" dirty="0"/>
+          </a:p>
+        </p:txBody>
+      </p:sp>
+      <p:sp>
+        <p:nvSpPr>
+          <p:cNvPr id="17" name="Text 10"/>
+          <p:cNvSpPr/>
+          <p:nvPr/>
+        </p:nvSpPr>
+        <p:spPr>
+          <a:xfrm>
+            <a:off x="5537150" y="2836962"/>
+            <a:ext cx="3160725" cy="396180"/>
+          </a:xfrm>
+          <a:prstGeom prst="rect">
+            <a:avLst/>
+          </a:prstGeom>
+          <a:noFill/>
+          <a:ln/>
+        </p:spPr>
+        <p:txBody>
+          <a:bodyPr wrap="square" lIns="0" tIns="0" rIns="0" bIns="0" rtlCol="0" anchor="t"/>
+          <a:lstStyle/>
+          <a:p>
+            <a:pPr algn="l" indent="0" marL="0">
+              <a:lnSpc>
+                <a:spcPts val="1560"/>
+              </a:lnSpc>
+              <a:buNone/>
+            </a:pPr>
+            <a:r>
+              <a:rPr lang="en-US" sz="1350" dirty="0">
+                <a:solidFill>
+                  <a:srgbClr val="59636E"/>
+                </a:solidFill>
+                <a:latin typeface="Arial" pitchFamily="34" charset="0"/>
+                <a:ea typeface="Arial" pitchFamily="34" charset="-122"/>
+                <a:cs typeface="Arial" pitchFamily="34" charset="-120"/>
+              </a:rPr>
+              <a:t>Lives in the repo. Same guidance every time.</a:t>
+            </a:r>
+            <a:endParaRPr lang="en-US" sz="1350" dirty="0"/>
+          </a:p>
+        </p:txBody>
+      </p:sp>
+      <p:sp>
+        <p:nvSpPr>
+          <p:cNvPr id="18" name="Text 11"/>
+          <p:cNvSpPr/>
+          <p:nvPr/>
+        </p:nvSpPr>
+        <p:spPr>
+          <a:xfrm>
+            <a:off x="5003750" y="3497163"/>
+            <a:ext cx="381000" cy="381000"/>
+          </a:xfrm>
+          <a:prstGeom prst="roundRect">
+            <a:avLst>
+              <a:gd name="adj" fmla="val 23333"/>
+            </a:avLst>
+          </a:prstGeom>
+          <a:solidFill>
+            <a:srgbClr val="FBEFFF"/>
+          </a:solidFill>
+          <a:ln/>
+        </p:spPr>
+        <p:txBody>
+          <a:bodyPr wrap="square" rtlCol="0" anchor="ctr"/>
+          <a:lstStyle/>
+          <a:p>
+            <a:pPr indent="0" marL="0">
+              <a:buNone/>
+            </a:pPr>
+            <a:endParaRPr lang="en-US" dirty="0"/>
+          </a:p>
+        </p:txBody>
+      </p:sp>
+      <p:pic>
+        <p:nvPicPr>
+          <p:cNvPr id="19" name="Image 5" descr="/Users/danwahlin/.copilot/session-state/56a7a0da-def8-48d4-b5e8-0ac3878cb8dd/files/slides-build/icons/GoPeople-8250DF.png">    </p:cNvPr>
+          <p:cNvPicPr>
+            <a:picLocks noChangeAspect="1"/>
+          </p:cNvPicPr>
+          <p:nvPr/>
+        </p:nvPicPr>
+        <p:blipFill>
+          <a:blip r:embed="rId7"/>
+          <a:stretch>
+            <a:fillRect/>
+          </a:stretch>
+        </p:blipFill>
+        <p:spPr>
+          <a:xfrm>
             <a:off x="5086350" y="3579763"/>
             <a:ext cx="215801" cy="215801"/>
           </a:xfrm>
@@ -13046,7 +12924,7 @@
       </p:pic>
       <p:sp>
         <p:nvSpPr>
-          <p:cNvPr id="20" name="Text 13"/>
+          <p:cNvPr id="20" name="Text 12"/>
           <p:cNvSpPr/>
           <p:nvPr/>
         </p:nvSpPr>
@@ -13085,7 +12963,7 @@
       </p:sp>
       <p:sp>
         <p:nvSpPr>
-          <p:cNvPr id="21" name="Text 14"/>
+          <p:cNvPr id="21" name="Text 13"/>
           <p:cNvSpPr/>
           <p:nvPr/>
         </p:nvSpPr>
@@ -13157,112 +13035,9 @@
           <a:chExt cx="0" cy="0"/>
         </a:xfrm>
       </p:grpSpPr>
-      <p:sp>
-        <p:nvSpPr>
-          <p:cNvPr id="2" name="Text 0"/>
-          <p:cNvSpPr/>
-          <p:nvPr/>
-        </p:nvSpPr>
-        <p:spPr>
-          <a:xfrm>
-            <a:off x="0" y="0"/>
-            <a:ext cx="9144000" cy="76200"/>
-          </a:xfrm>
-          <a:prstGeom prst="rect">
-            <a:avLst/>
-          </a:prstGeom>
-          <a:solidFill>
-            <a:srgbClr val="0969DA"/>
-          </a:solidFill>
-          <a:ln/>
-        </p:spPr>
-        <p:txBody>
-          <a:bodyPr wrap="square" rtlCol="0" anchor="ctr"/>
-          <a:lstStyle/>
-          <a:p>
-            <a:pPr indent="0" marL="0">
-              <a:buNone/>
-            </a:pPr>
-            <a:endParaRPr lang="en-US" dirty="0"/>
-          </a:p>
-        </p:txBody>
-      </p:sp>
-      <p:sp>
-        <p:nvSpPr>
-          <p:cNvPr id="3" name="Text 1"/>
-          <p:cNvSpPr/>
-          <p:nvPr/>
-        </p:nvSpPr>
-        <p:spPr>
-          <a:xfrm>
-            <a:off x="7340501" y="177701"/>
-            <a:ext cx="1168301" cy="279350"/>
-          </a:xfrm>
-          <a:prstGeom prst="roundRect">
-            <a:avLst>
-              <a:gd name="adj" fmla="val 22731"/>
-            </a:avLst>
-          </a:prstGeom>
-          <a:solidFill>
-            <a:srgbClr val="1A7F37"/>
-          </a:solidFill>
-          <a:ln/>
-        </p:spPr>
-        <p:txBody>
-          <a:bodyPr wrap="square" rtlCol="0" anchor="ctr"/>
-          <a:lstStyle/>
-          <a:p>
-            <a:pPr indent="0" marL="0">
-              <a:buNone/>
-            </a:pPr>
-            <a:endParaRPr lang="en-US" dirty="0"/>
-          </a:p>
-        </p:txBody>
-      </p:sp>
-      <p:sp>
-        <p:nvSpPr>
-          <p:cNvPr id="4" name="Text 2"/>
-          <p:cNvSpPr/>
-          <p:nvPr/>
-        </p:nvSpPr>
-        <p:spPr>
-          <a:xfrm>
-            <a:off x="7461041" y="231577"/>
-            <a:ext cx="927071" cy="171450"/>
-          </a:xfrm>
-          <a:prstGeom prst="rect">
-            <a:avLst/>
-          </a:prstGeom>
-          <a:noFill/>
-          <a:ln/>
-        </p:spPr>
-        <p:txBody>
-          <a:bodyPr wrap="square" lIns="0" tIns="0" rIns="0" bIns="0" rtlCol="0" anchor="t"/>
-          <a:lstStyle/>
-          <a:p>
-            <a:pPr algn="ctr" indent="0" marL="0">
-              <a:buNone/>
-            </a:pPr>
-            <a:r>
-              <a:rPr lang="en-US" sz="1150" b="1" dirty="0">
-                <a:solidFill>
-                  <a:srgbClr val="FFFFFF"/>
-                </a:solidFill>
-                <a:latin typeface="Arial" pitchFamily="34" charset="0"/>
-                <a:ea typeface="Arial" pitchFamily="34" charset="-122"/>
-                <a:cs typeface="Arial" pitchFamily="34" charset="-120"/>
-              </a:rPr>
-              <a:t>CHAPTER 04</a:t>
-            </a:r>
-            <a:endParaRPr lang="en-US" sz="1150" dirty="0"/>
-          </a:p>
-        </p:txBody>
-      </p:sp>
       <p:pic>
         <p:nvPicPr>
-          <p:cNvPr id="5" name="Image 0" descr="/Users/danwahlin/.copilot/session-state/56a7a0da-def8-48d4-b5e8-0ac3878cb8dd/files/slides-build/icons/FaGithub-1F2328.png">
-            <a:hlinkClick r:id="rId2" tooltip="https://github.com/github/copilot-app-for-beginners/tree/main/04-skills-custom-agents"/>
-          </p:cNvPr>
+          <p:cNvPr id="2" name="Image 0" descr="/Users/danwahlin/.copilot/session-state/56a7a0da-def8-48d4-b5e8-0ac3878cb8dd/files/slides-build/img/grad-corner.png">    </p:cNvPr>
           <p:cNvPicPr>
             <a:picLocks noChangeAspect="1"/>
           </p:cNvPicPr>
@@ -13276,6 +13051,103 @@
         </p:blipFill>
         <p:spPr>
           <a:xfrm>
+            <a:off x="6349901" y="0"/>
+            <a:ext cx="2793950" cy="1308050"/>
+          </a:xfrm>
+          <a:prstGeom prst="rect">
+            <a:avLst/>
+          </a:prstGeom>
+        </p:spPr>
+      </p:pic>
+      <p:sp>
+        <p:nvSpPr>
+          <p:cNvPr id="3" name="Text 0"/>
+          <p:cNvSpPr/>
+          <p:nvPr/>
+        </p:nvSpPr>
+        <p:spPr>
+          <a:xfrm>
+            <a:off x="7340501" y="177701"/>
+            <a:ext cx="1168301" cy="279350"/>
+          </a:xfrm>
+          <a:prstGeom prst="roundRect">
+            <a:avLst>
+              <a:gd name="adj" fmla="val 22731"/>
+            </a:avLst>
+          </a:prstGeom>
+          <a:solidFill>
+            <a:srgbClr val="1A7F37"/>
+          </a:solidFill>
+          <a:ln/>
+        </p:spPr>
+        <p:txBody>
+          <a:bodyPr wrap="square" rtlCol="0" anchor="ctr"/>
+          <a:lstStyle/>
+          <a:p>
+            <a:pPr indent="0" marL="0">
+              <a:buNone/>
+            </a:pPr>
+            <a:endParaRPr lang="en-US" dirty="0"/>
+          </a:p>
+        </p:txBody>
+      </p:sp>
+      <p:sp>
+        <p:nvSpPr>
+          <p:cNvPr id="4" name="Text 1"/>
+          <p:cNvSpPr/>
+          <p:nvPr/>
+        </p:nvSpPr>
+        <p:spPr>
+          <a:xfrm>
+            <a:off x="7461041" y="231577"/>
+            <a:ext cx="927071" cy="171450"/>
+          </a:xfrm>
+          <a:prstGeom prst="rect">
+            <a:avLst/>
+          </a:prstGeom>
+          <a:noFill/>
+          <a:ln/>
+        </p:spPr>
+        <p:txBody>
+          <a:bodyPr wrap="square" lIns="0" tIns="0" rIns="0" bIns="0" rtlCol="0" anchor="t"/>
+          <a:lstStyle/>
+          <a:p>
+            <a:pPr algn="ctr" indent="0" marL="0">
+              <a:buNone/>
+            </a:pPr>
+            <a:r>
+              <a:rPr lang="en-US" sz="1150" b="1" dirty="0">
+                <a:solidFill>
+                  <a:srgbClr val="FFFFFF"/>
+                </a:solidFill>
+                <a:latin typeface="Arial" pitchFamily="34" charset="0"/>
+                <a:ea typeface="Arial" pitchFamily="34" charset="-122"/>
+                <a:cs typeface="Arial" pitchFamily="34" charset="-120"/>
+              </a:rPr>
+              <a:t>CHAPTER 04</a:t>
+            </a:r>
+            <a:endParaRPr lang="en-US" sz="1150" dirty="0"/>
+          </a:p>
+        </p:txBody>
+      </p:sp>
+      <p:pic>
+        <p:nvPicPr>
+          <p:cNvPr id="5" name="Image 1" descr="/Users/danwahlin/.copilot/session-state/56a7a0da-def8-48d4-b5e8-0ac3878cb8dd/files/slides-build/icons/FaGithub-1F2328.png">
+            <a:hlinkClick r:id="rId3" tooltip="https://github.com/github/copilot-app-for-beginners/tree/main/04-skills-custom-agents"/>
+          </p:cNvPr>
+          <p:cNvPicPr>
+            <a:picLocks noChangeAspect="1"/>
+          </p:cNvPicPr>
+          <p:nvPr/>
+        </p:nvPicPr>
+        <p:blipFill>
+          <a:blip r:embed="rId2"/>
+          <a:stretch>
+            <a:fillRect/>
+          </a:stretch>
+        </p:blipFill>
+        <p:spPr>
+          <a:xfrm>
             <a:off x="8610600" y="165050"/>
             <a:ext cx="304800" cy="304800"/>
           </a:xfrm>
@@ -13286,7 +13158,7 @@
       </p:pic>
       <p:sp>
         <p:nvSpPr>
-          <p:cNvPr id="6" name="Text 3"/>
+          <p:cNvPr id="6" name="Text 2"/>
           <p:cNvSpPr/>
           <p:nvPr/>
         </p:nvSpPr>
@@ -13325,7 +13197,7 @@
       </p:sp>
       <p:sp>
         <p:nvSpPr>
-          <p:cNvPr id="7" name="Text 4"/>
+          <p:cNvPr id="7" name="Text 3"/>
           <p:cNvSpPr/>
           <p:nvPr/>
         </p:nvSpPr>
@@ -13370,7 +13242,7 @@
       </p:sp>
       <p:sp>
         <p:nvSpPr>
-          <p:cNvPr id="8" name="Text 5"/>
+          <p:cNvPr id="8" name="Text 4"/>
           <p:cNvSpPr/>
           <p:nvPr/>
         </p:nvSpPr>
@@ -13455,7 +13327,7 @@
       </p:sp>
       <p:sp>
         <p:nvSpPr>
-          <p:cNvPr id="9" name="Text 6"/>
+          <p:cNvPr id="9" name="Text 5"/>
           <p:cNvSpPr/>
           <p:nvPr/>
         </p:nvSpPr>
@@ -13491,7 +13363,7 @@
       </p:sp>
       <p:sp>
         <p:nvSpPr>
-          <p:cNvPr id="10" name="Text 7"/>
+          <p:cNvPr id="10" name="Text 6"/>
           <p:cNvSpPr/>
           <p:nvPr/>
         </p:nvSpPr>
@@ -13521,7 +13393,7 @@
       </p:sp>
       <p:sp>
         <p:nvSpPr>
-          <p:cNvPr id="11" name="Shape 8"/>
+          <p:cNvPr id="11" name="Shape 7"/>
           <p:cNvSpPr/>
           <p:nvPr/>
         </p:nvSpPr>
@@ -13544,7 +13416,7 @@
       </p:sp>
       <p:sp>
         <p:nvSpPr>
-          <p:cNvPr id="12" name="Text 9"/>
+          <p:cNvPr id="12" name="Text 8"/>
           <p:cNvSpPr/>
           <p:nvPr/>
         </p:nvSpPr>
@@ -13576,7 +13448,7 @@
       </p:sp>
       <p:sp>
         <p:nvSpPr>
-          <p:cNvPr id="13" name="Text 10"/>
+          <p:cNvPr id="13" name="Text 9"/>
           <p:cNvSpPr/>
           <p:nvPr/>
         </p:nvSpPr>
@@ -13608,7 +13480,7 @@
       </p:sp>
       <p:sp>
         <p:nvSpPr>
-          <p:cNvPr id="14" name="Text 11"/>
+          <p:cNvPr id="14" name="Text 10"/>
           <p:cNvSpPr/>
           <p:nvPr/>
         </p:nvSpPr>
@@ -13640,7 +13512,7 @@
       </p:sp>
       <p:sp>
         <p:nvSpPr>
-          <p:cNvPr id="15" name="Text 12"/>
+          <p:cNvPr id="15" name="Text 11"/>
           <p:cNvSpPr/>
           <p:nvPr/>
         </p:nvSpPr>
@@ -13679,7 +13551,7 @@
       </p:sp>
       <p:sp>
         <p:nvSpPr>
-          <p:cNvPr id="16" name="Text 13"/>
+          <p:cNvPr id="16" name="Text 12"/>
           <p:cNvSpPr/>
           <p:nvPr/>
         </p:nvSpPr>
@@ -13721,7 +13593,7 @@
       </p:sp>
       <p:sp>
         <p:nvSpPr>
-          <p:cNvPr id="17" name="Text 14"/>
+          <p:cNvPr id="17" name="Text 13"/>
           <p:cNvSpPr/>
           <p:nvPr/>
         </p:nvSpPr>
@@ -13780,7 +13652,7 @@
       </p:sp>
       <p:sp>
         <p:nvSpPr>
-          <p:cNvPr id="18" name="Text 15"/>
+          <p:cNvPr id="18" name="Text 14"/>
           <p:cNvSpPr/>
           <p:nvPr/>
         </p:nvSpPr>
@@ -13839,7 +13711,7 @@
       </p:sp>
       <p:sp>
         <p:nvSpPr>
-          <p:cNvPr id="19" name="Text 16"/>
+          <p:cNvPr id="19" name="Text 15"/>
           <p:cNvSpPr/>
           <p:nvPr/>
         </p:nvSpPr>
@@ -13881,7 +13753,7 @@
       </p:sp>
       <p:sp>
         <p:nvSpPr>
-          <p:cNvPr id="20" name="Text 17"/>
+          <p:cNvPr id="20" name="Text 16"/>
           <p:cNvSpPr/>
           <p:nvPr/>
         </p:nvSpPr>
@@ -13923,7 +13795,7 @@
       </p:sp>
       <p:sp>
         <p:nvSpPr>
-          <p:cNvPr id="21" name="Text 18"/>
+          <p:cNvPr id="21" name="Text 17"/>
           <p:cNvSpPr/>
           <p:nvPr/>
         </p:nvSpPr>
@@ -13965,7 +13837,7 @@
       </p:sp>
       <p:sp>
         <p:nvSpPr>
-          <p:cNvPr id="22" name="Text 19"/>
+          <p:cNvPr id="22" name="Text 18"/>
           <p:cNvSpPr/>
           <p:nvPr/>
         </p:nvSpPr>
@@ -14007,7 +13879,7 @@
       </p:sp>
       <p:sp>
         <p:nvSpPr>
-          <p:cNvPr id="23" name="Text 20"/>
+          <p:cNvPr id="23" name="Text 19"/>
           <p:cNvSpPr/>
           <p:nvPr/>
         </p:nvSpPr>
@@ -14049,7 +13921,7 @@
       </p:sp>
       <p:sp>
         <p:nvSpPr>
-          <p:cNvPr id="24" name="Text 21"/>
+          <p:cNvPr id="24" name="Text 20"/>
           <p:cNvSpPr/>
           <p:nvPr/>
         </p:nvSpPr>
@@ -14091,7 +13963,7 @@
       </p:sp>
       <p:sp>
         <p:nvSpPr>
-          <p:cNvPr id="25" name="Text 22"/>
+          <p:cNvPr id="25" name="Text 21"/>
           <p:cNvSpPr/>
           <p:nvPr/>
         </p:nvSpPr>
@@ -14133,7 +14005,7 @@
       </p:sp>
       <p:sp>
         <p:nvSpPr>
-          <p:cNvPr id="26" name="Text 23"/>
+          <p:cNvPr id="26" name="Text 22"/>
           <p:cNvSpPr/>
           <p:nvPr/>
         </p:nvSpPr>
@@ -14175,7 +14047,7 @@
       </p:sp>
       <p:sp>
         <p:nvSpPr>
-          <p:cNvPr id="27" name="Text 24"/>
+          <p:cNvPr id="27" name="Text 23"/>
           <p:cNvSpPr/>
           <p:nvPr/>
         </p:nvSpPr>
@@ -14207,178 +14079,7 @@
       </p:sp>
       <p:pic>
         <p:nvPicPr>
-          <p:cNvPr id="28" name="Image 1" descr="/Users/danwahlin/.copilot/session-state/56a7a0da-def8-48d4-b5e8-0ac3878cb8dd/files/slides-build/icons/GoTag-8250DF.png">    </p:cNvPr>
-          <p:cNvPicPr>
-            <a:picLocks noChangeAspect="1"/>
-          </p:cNvPicPr>
-          <p:nvPr/>
-        </p:nvPicPr>
-        <p:blipFill>
-          <a:blip r:embed="rId3"/>
-          <a:stretch>
-            <a:fillRect/>
-          </a:stretch>
-        </p:blipFill>
-        <p:spPr>
-          <a:xfrm>
-            <a:off x="4654451" y="2148780"/>
-            <a:ext cx="215801" cy="215801"/>
-          </a:xfrm>
-          <a:prstGeom prst="rect">
-            <a:avLst/>
-          </a:prstGeom>
-        </p:spPr>
-      </p:pic>
-      <p:sp>
-        <p:nvSpPr>
-          <p:cNvPr id="29" name="Text 25"/>
-          <p:cNvSpPr/>
-          <p:nvPr/>
-        </p:nvSpPr>
-        <p:spPr>
-          <a:xfrm>
-            <a:off x="5105251" y="1926878"/>
-            <a:ext cx="3601263" cy="228600"/>
-          </a:xfrm>
-          <a:prstGeom prst="rect">
-            <a:avLst/>
-          </a:prstGeom>
-          <a:noFill/>
-          <a:ln/>
-        </p:spPr>
-        <p:txBody>
-          <a:bodyPr wrap="square" lIns="0" tIns="0" rIns="0" bIns="0" rtlCol="0" anchor="t"/>
-          <a:lstStyle/>
-          <a:p>
-            <a:pPr algn="l" indent="0" marL="0">
-              <a:buNone/>
-            </a:pPr>
-            <a:r>
-              <a:rPr lang="en-US" sz="1550" b="1" dirty="0">
-                <a:solidFill>
-                  <a:srgbClr val="1F2328"/>
-                </a:solidFill>
-                <a:latin typeface="Arial" pitchFamily="34" charset="0"/>
-                <a:ea typeface="Arial" pitchFamily="34" charset="-122"/>
-                <a:cs typeface="Arial" pitchFamily="34" charset="-120"/>
-              </a:rPr>
-              <a:t>Frontmatter</a:t>
-            </a:r>
-            <a:endParaRPr lang="en-US" sz="1550" dirty="0"/>
-          </a:p>
-        </p:txBody>
-      </p:sp>
-      <p:sp>
-        <p:nvSpPr>
-          <p:cNvPr id="30" name="Text 26"/>
-          <p:cNvSpPr/>
-          <p:nvPr/>
-        </p:nvSpPr>
-        <p:spPr>
-          <a:xfrm>
-            <a:off x="5105251" y="2180779"/>
-            <a:ext cx="3601263" cy="405705"/>
-          </a:xfrm>
-          <a:prstGeom prst="rect">
-            <a:avLst/>
-          </a:prstGeom>
-          <a:noFill/>
-          <a:ln/>
-        </p:spPr>
-        <p:txBody>
-          <a:bodyPr wrap="square" lIns="0" tIns="0" rIns="0" bIns="0" rtlCol="0" anchor="t"/>
-          <a:lstStyle/>
-          <a:p>
-            <a:pPr algn="l" indent="0" marL="0">
-              <a:lnSpc>
-                <a:spcPts val="1560"/>
-              </a:lnSpc>
-              <a:buNone/>
-            </a:pPr>
-            <a:r>
-              <a:rPr lang="en-US" sz="1350" dirty="0">
-                <a:solidFill>
-                  <a:srgbClr val="59636E"/>
-                </a:solidFill>
-                <a:latin typeface="Arial" pitchFamily="34" charset="0"/>
-                <a:ea typeface="Arial" pitchFamily="34" charset="-122"/>
-                <a:cs typeface="Arial" pitchFamily="34" charset="-120"/>
-              </a:rPr>
-              <a:t>The </a:t>
-            </a:r>
-            <a:pPr algn="l" indent="0" marL="0">
-              <a:lnSpc>
-                <a:spcPts val="1560"/>
-              </a:lnSpc>
-              <a:buNone/>
-            </a:pPr>
-            <a:r>
-              <a:rPr lang="en-US" sz="1350" b="1" dirty="0">
-                <a:solidFill>
-                  <a:srgbClr val="0550AE"/>
-                </a:solidFill>
-                <a:latin typeface="Courier New" pitchFamily="34" charset="0"/>
-                <a:ea typeface="Courier New" pitchFamily="34" charset="-122"/>
-                <a:cs typeface="Courier New" pitchFamily="34" charset="-120"/>
-              </a:rPr>
-              <a:t>description</a:t>
-            </a:r>
-            <a:pPr algn="l" indent="0" marL="0">
-              <a:lnSpc>
-                <a:spcPts val="1560"/>
-              </a:lnSpc>
-              <a:buNone/>
-            </a:pPr>
-            <a:r>
-              <a:rPr lang="en-US" sz="1350" dirty="0">
-                <a:solidFill>
-                  <a:srgbClr val="59636E"/>
-                </a:solidFill>
-                <a:latin typeface="Arial" pitchFamily="34" charset="0"/>
-                <a:ea typeface="Arial" pitchFamily="34" charset="-122"/>
-                <a:cs typeface="Arial" pitchFamily="34" charset="-120"/>
-              </a:rPr>
-              <a:t> tells the app when to load it.</a:t>
-            </a:r>
-            <a:endParaRPr lang="en-US" sz="1350" dirty="0"/>
-          </a:p>
-        </p:txBody>
-      </p:sp>
-      <p:sp>
-        <p:nvSpPr>
-          <p:cNvPr id="31" name="Text 27"/>
-          <p:cNvSpPr/>
-          <p:nvPr/>
-        </p:nvSpPr>
-        <p:spPr>
-          <a:xfrm>
-            <a:off x="4571851" y="2825055"/>
-            <a:ext cx="381000" cy="381000"/>
-          </a:xfrm>
-          <a:prstGeom prst="roundRect">
-            <a:avLst>
-              <a:gd name="adj" fmla="val 23333"/>
-            </a:avLst>
-          </a:prstGeom>
-          <a:solidFill>
-            <a:srgbClr val="FBEFFF"/>
-          </a:solidFill>
-          <a:ln/>
-        </p:spPr>
-        <p:txBody>
-          <a:bodyPr wrap="square" rtlCol="0" anchor="ctr"/>
-          <a:lstStyle/>
-          <a:p>
-            <a:pPr indent="0" marL="0">
-              <a:buNone/>
-            </a:pPr>
-            <a:endParaRPr lang="en-US" dirty="0"/>
-          </a:p>
-        </p:txBody>
-      </p:sp>
-      <p:pic>
-        <p:nvPicPr>
-          <p:cNvPr id="32" name="Image 2" descr="/Users/danwahlin/.copilot/session-state/56a7a0da-def8-48d4-b5e8-0ac3878cb8dd/files/slides-build/icons/GoNote-8250DF.png">    </p:cNvPr>
+          <p:cNvPr id="28" name="Image 2" descr="/Users/danwahlin/.copilot/session-state/56a7a0da-def8-48d4-b5e8-0ac3878cb8dd/files/slides-build/icons/GoTag-8250DF.png">    </p:cNvPr>
           <p:cNvPicPr>
             <a:picLocks noChangeAspect="1"/>
           </p:cNvPicPr>
@@ -14392,7 +14093,7 @@
         </p:blipFill>
         <p:spPr>
           <a:xfrm>
-            <a:off x="4654451" y="2907655"/>
+            <a:off x="4654451" y="2148780"/>
             <a:ext cx="215801" cy="215801"/>
           </a:xfrm>
           <a:prstGeom prst="rect">
@@ -14402,14 +14103,14 @@
       </p:pic>
       <p:sp>
         <p:nvSpPr>
-          <p:cNvPr id="33" name="Text 28"/>
-          <p:cNvSpPr/>
-          <p:nvPr/>
-        </p:nvSpPr>
-        <p:spPr>
-          <a:xfrm>
-            <a:off x="5105251" y="2789634"/>
-            <a:ext cx="2430241" cy="228600"/>
+          <p:cNvPr id="29" name="Text 24"/>
+          <p:cNvSpPr/>
+          <p:nvPr/>
+        </p:nvSpPr>
+        <p:spPr>
+          <a:xfrm>
+            <a:off x="5105251" y="1926878"/>
+            <a:ext cx="3601263" cy="228600"/>
           </a:xfrm>
           <a:prstGeom prst="rect">
             <a:avLst/>
@@ -14433,7 +14134,7 @@
                 <a:ea typeface="Arial" pitchFamily="34" charset="-122"/>
                 <a:cs typeface="Arial" pitchFamily="34" charset="-120"/>
               </a:rPr>
-              <a:t>Instructions</a:t>
+              <a:t>Frontmatter</a:t>
             </a:r>
             <a:endParaRPr lang="en-US" sz="1550" dirty="0"/>
           </a:p>
@@ -14441,14 +14142,14 @@
       </p:sp>
       <p:sp>
         <p:nvSpPr>
-          <p:cNvPr id="34" name="Text 29"/>
-          <p:cNvSpPr/>
-          <p:nvPr/>
-        </p:nvSpPr>
-        <p:spPr>
-          <a:xfrm>
-            <a:off x="5105251" y="3043535"/>
-            <a:ext cx="2430241" cy="198090"/>
+          <p:cNvPr id="30" name="Text 25"/>
+          <p:cNvSpPr/>
+          <p:nvPr/>
+        </p:nvSpPr>
+        <p:spPr>
+          <a:xfrm>
+            <a:off x="5105251" y="2180779"/>
+            <a:ext cx="3601263" cy="405705"/>
           </a:xfrm>
           <a:prstGeom prst="rect">
             <a:avLst/>
@@ -14475,6 +14176,177 @@
                 <a:ea typeface="Arial" pitchFamily="34" charset="-122"/>
                 <a:cs typeface="Arial" pitchFamily="34" charset="-120"/>
               </a:rPr>
+              <a:t>The </a:t>
+            </a:r>
+            <a:pPr algn="l" indent="0" marL="0">
+              <a:lnSpc>
+                <a:spcPts val="1560"/>
+              </a:lnSpc>
+              <a:buNone/>
+            </a:pPr>
+            <a:r>
+              <a:rPr lang="en-US" sz="1350" b="1" dirty="0">
+                <a:solidFill>
+                  <a:srgbClr val="0550AE"/>
+                </a:solidFill>
+                <a:latin typeface="Courier New" pitchFamily="34" charset="0"/>
+                <a:ea typeface="Courier New" pitchFamily="34" charset="-122"/>
+                <a:cs typeface="Courier New" pitchFamily="34" charset="-120"/>
+              </a:rPr>
+              <a:t>description</a:t>
+            </a:r>
+            <a:pPr algn="l" indent="0" marL="0">
+              <a:lnSpc>
+                <a:spcPts val="1560"/>
+              </a:lnSpc>
+              <a:buNone/>
+            </a:pPr>
+            <a:r>
+              <a:rPr lang="en-US" sz="1350" dirty="0">
+                <a:solidFill>
+                  <a:srgbClr val="59636E"/>
+                </a:solidFill>
+                <a:latin typeface="Arial" pitchFamily="34" charset="0"/>
+                <a:ea typeface="Arial" pitchFamily="34" charset="-122"/>
+                <a:cs typeface="Arial" pitchFamily="34" charset="-120"/>
+              </a:rPr>
+              <a:t> tells the app when to load it.</a:t>
+            </a:r>
+            <a:endParaRPr lang="en-US" sz="1350" dirty="0"/>
+          </a:p>
+        </p:txBody>
+      </p:sp>
+      <p:sp>
+        <p:nvSpPr>
+          <p:cNvPr id="31" name="Text 26"/>
+          <p:cNvSpPr/>
+          <p:nvPr/>
+        </p:nvSpPr>
+        <p:spPr>
+          <a:xfrm>
+            <a:off x="4571851" y="2825055"/>
+            <a:ext cx="381000" cy="381000"/>
+          </a:xfrm>
+          <a:prstGeom prst="roundRect">
+            <a:avLst>
+              <a:gd name="adj" fmla="val 23333"/>
+            </a:avLst>
+          </a:prstGeom>
+          <a:solidFill>
+            <a:srgbClr val="FBEFFF"/>
+          </a:solidFill>
+          <a:ln/>
+        </p:spPr>
+        <p:txBody>
+          <a:bodyPr wrap="square" rtlCol="0" anchor="ctr"/>
+          <a:lstStyle/>
+          <a:p>
+            <a:pPr indent="0" marL="0">
+              <a:buNone/>
+            </a:pPr>
+            <a:endParaRPr lang="en-US" dirty="0"/>
+          </a:p>
+        </p:txBody>
+      </p:sp>
+      <p:pic>
+        <p:nvPicPr>
+          <p:cNvPr id="32" name="Image 3" descr="/Users/danwahlin/.copilot/session-state/56a7a0da-def8-48d4-b5e8-0ac3878cb8dd/files/slides-build/icons/GoNote-8250DF.png">    </p:cNvPr>
+          <p:cNvPicPr>
+            <a:picLocks noChangeAspect="1"/>
+          </p:cNvPicPr>
+          <p:nvPr/>
+        </p:nvPicPr>
+        <p:blipFill>
+          <a:blip r:embed="rId5"/>
+          <a:stretch>
+            <a:fillRect/>
+          </a:stretch>
+        </p:blipFill>
+        <p:spPr>
+          <a:xfrm>
+            <a:off x="4654451" y="2907655"/>
+            <a:ext cx="215801" cy="215801"/>
+          </a:xfrm>
+          <a:prstGeom prst="rect">
+            <a:avLst/>
+          </a:prstGeom>
+        </p:spPr>
+      </p:pic>
+      <p:sp>
+        <p:nvSpPr>
+          <p:cNvPr id="33" name="Text 27"/>
+          <p:cNvSpPr/>
+          <p:nvPr/>
+        </p:nvSpPr>
+        <p:spPr>
+          <a:xfrm>
+            <a:off x="5105251" y="2789634"/>
+            <a:ext cx="2430241" cy="228600"/>
+          </a:xfrm>
+          <a:prstGeom prst="rect">
+            <a:avLst/>
+          </a:prstGeom>
+          <a:noFill/>
+          <a:ln/>
+        </p:spPr>
+        <p:txBody>
+          <a:bodyPr wrap="square" lIns="0" tIns="0" rIns="0" bIns="0" rtlCol="0" anchor="t"/>
+          <a:lstStyle/>
+          <a:p>
+            <a:pPr algn="l" indent="0" marL="0">
+              <a:buNone/>
+            </a:pPr>
+            <a:r>
+              <a:rPr lang="en-US" sz="1550" b="1" dirty="0">
+                <a:solidFill>
+                  <a:srgbClr val="1F2328"/>
+                </a:solidFill>
+                <a:latin typeface="Arial" pitchFamily="34" charset="0"/>
+                <a:ea typeface="Arial" pitchFamily="34" charset="-122"/>
+                <a:cs typeface="Arial" pitchFamily="34" charset="-120"/>
+              </a:rPr>
+              <a:t>Instructions</a:t>
+            </a:r>
+            <a:endParaRPr lang="en-US" sz="1550" dirty="0"/>
+          </a:p>
+        </p:txBody>
+      </p:sp>
+      <p:sp>
+        <p:nvSpPr>
+          <p:cNvPr id="34" name="Text 28"/>
+          <p:cNvSpPr/>
+          <p:nvPr/>
+        </p:nvSpPr>
+        <p:spPr>
+          <a:xfrm>
+            <a:off x="5105251" y="3043535"/>
+            <a:ext cx="2430241" cy="198090"/>
+          </a:xfrm>
+          <a:prstGeom prst="rect">
+            <a:avLst/>
+          </a:prstGeom>
+          <a:noFill/>
+          <a:ln/>
+        </p:spPr>
+        <p:txBody>
+          <a:bodyPr wrap="square" lIns="0" tIns="0" rIns="0" bIns="0" rtlCol="0" anchor="t"/>
+          <a:lstStyle/>
+          <a:p>
+            <a:pPr algn="l" indent="0" marL="0">
+              <a:lnSpc>
+                <a:spcPts val="1560"/>
+              </a:lnSpc>
+              <a:buNone/>
+            </a:pPr>
+            <a:r>
+              <a:rPr lang="en-US" sz="1350" dirty="0">
+                <a:solidFill>
+                  <a:srgbClr val="59636E"/>
+                </a:solidFill>
+                <a:latin typeface="Arial" pitchFamily="34" charset="0"/>
+                <a:ea typeface="Arial" pitchFamily="34" charset="-122"/>
+                <a:cs typeface="Arial" pitchFamily="34" charset="-120"/>
+              </a:rPr>
               <a:t>The checklist the agent follows.</a:t>
             </a:r>
             <a:endParaRPr lang="en-US" sz="1350" dirty="0"/>
@@ -14483,7 +14355,7 @@
       </p:sp>
       <p:sp>
         <p:nvSpPr>
-          <p:cNvPr id="35" name="Text 30"/>
+          <p:cNvPr id="35" name="Text 29"/>
           <p:cNvSpPr/>
           <p:nvPr/>
         </p:nvSpPr>
@@ -14519,14 +14391,14 @@
       </p:sp>
       <p:pic>
         <p:nvPicPr>
-          <p:cNvPr id="36" name="Image 3" descr="/Users/danwahlin/.copilot/session-state/56a7a0da-def8-48d4-b5e8-0ac3878cb8dd/files/slides-build/icons/GoAlert-CF222E.png">    </p:cNvPr>
+          <p:cNvPr id="36" name="Image 4" descr="/Users/danwahlin/.copilot/session-state/56a7a0da-def8-48d4-b5e8-0ac3878cb8dd/files/slides-build/icons/GoAlert-CF222E.png">    </p:cNvPr>
           <p:cNvPicPr>
             <a:picLocks noChangeAspect="1"/>
           </p:cNvPicPr>
           <p:nvPr/>
         </p:nvPicPr>
         <p:blipFill>
-          <a:blip r:embed="rId5"/>
+          <a:blip r:embed="rId6"/>
           <a:stretch>
             <a:fillRect/>
           </a:stretch>
@@ -14543,7 +14415,7 @@
       </p:pic>
       <p:sp>
         <p:nvSpPr>
-          <p:cNvPr id="37" name="Text 31"/>
+          <p:cNvPr id="37" name="Text 30"/>
           <p:cNvSpPr/>
           <p:nvPr/>
         </p:nvSpPr>
@@ -14649,112 +14521,9 @@
           <a:chExt cx="0" cy="0"/>
         </a:xfrm>
       </p:grpSpPr>
-      <p:sp>
-        <p:nvSpPr>
-          <p:cNvPr id="2" name="Text 0"/>
-          <p:cNvSpPr/>
-          <p:nvPr/>
-        </p:nvSpPr>
-        <p:spPr>
-          <a:xfrm>
-            <a:off x="0" y="0"/>
-            <a:ext cx="9144000" cy="76200"/>
-          </a:xfrm>
-          <a:prstGeom prst="rect">
-            <a:avLst/>
-          </a:prstGeom>
-          <a:solidFill>
-            <a:srgbClr val="0969DA"/>
-          </a:solidFill>
-          <a:ln/>
-        </p:spPr>
-        <p:txBody>
-          <a:bodyPr wrap="square" rtlCol="0" anchor="ctr"/>
-          <a:lstStyle/>
-          <a:p>
-            <a:pPr indent="0" marL="0">
-              <a:buNone/>
-            </a:pPr>
-            <a:endParaRPr lang="en-US" dirty="0"/>
-          </a:p>
-        </p:txBody>
-      </p:sp>
-      <p:sp>
-        <p:nvSpPr>
-          <p:cNvPr id="3" name="Text 1"/>
-          <p:cNvSpPr/>
-          <p:nvPr/>
-        </p:nvSpPr>
-        <p:spPr>
-          <a:xfrm>
-            <a:off x="7340501" y="177701"/>
-            <a:ext cx="1168301" cy="279350"/>
-          </a:xfrm>
-          <a:prstGeom prst="roundRect">
-            <a:avLst>
-              <a:gd name="adj" fmla="val 22731"/>
-            </a:avLst>
-          </a:prstGeom>
-          <a:solidFill>
-            <a:srgbClr val="1A7F37"/>
-          </a:solidFill>
-          <a:ln/>
-        </p:spPr>
-        <p:txBody>
-          <a:bodyPr wrap="square" rtlCol="0" anchor="ctr"/>
-          <a:lstStyle/>
-          <a:p>
-            <a:pPr indent="0" marL="0">
-              <a:buNone/>
-            </a:pPr>
-            <a:endParaRPr lang="en-US" dirty="0"/>
-          </a:p>
-        </p:txBody>
-      </p:sp>
-      <p:sp>
-        <p:nvSpPr>
-          <p:cNvPr id="4" name="Text 2"/>
-          <p:cNvSpPr/>
-          <p:nvPr/>
-        </p:nvSpPr>
-        <p:spPr>
-          <a:xfrm>
-            <a:off x="7461041" y="231577"/>
-            <a:ext cx="927071" cy="171450"/>
-          </a:xfrm>
-          <a:prstGeom prst="rect">
-            <a:avLst/>
-          </a:prstGeom>
-          <a:noFill/>
-          <a:ln/>
-        </p:spPr>
-        <p:txBody>
-          <a:bodyPr wrap="square" lIns="0" tIns="0" rIns="0" bIns="0" rtlCol="0" anchor="t"/>
-          <a:lstStyle/>
-          <a:p>
-            <a:pPr algn="ctr" indent="0" marL="0">
-              <a:buNone/>
-            </a:pPr>
-            <a:r>
-              <a:rPr lang="en-US" sz="1150" b="1" dirty="0">
-                <a:solidFill>
-                  <a:srgbClr val="FFFFFF"/>
-                </a:solidFill>
-                <a:latin typeface="Arial" pitchFamily="34" charset="0"/>
-                <a:ea typeface="Arial" pitchFamily="34" charset="-122"/>
-                <a:cs typeface="Arial" pitchFamily="34" charset="-120"/>
-              </a:rPr>
-              <a:t>CHAPTER 04</a:t>
-            </a:r>
-            <a:endParaRPr lang="en-US" sz="1150" dirty="0"/>
-          </a:p>
-        </p:txBody>
-      </p:sp>
       <p:pic>
         <p:nvPicPr>
-          <p:cNvPr id="5" name="Image 0" descr="/Users/danwahlin/.copilot/session-state/56a7a0da-def8-48d4-b5e8-0ac3878cb8dd/files/slides-build/icons/FaGithub-1F2328.png">
-            <a:hlinkClick r:id="rId2" tooltip="https://github.com/github/copilot-app-for-beginners/tree/main/04-skills-custom-agents"/>
-          </p:cNvPr>
+          <p:cNvPr id="2" name="Image 0" descr="/Users/danwahlin/.copilot/session-state/56a7a0da-def8-48d4-b5e8-0ac3878cb8dd/files/slides-build/img/grad-corner.png">    </p:cNvPr>
           <p:cNvPicPr>
             <a:picLocks noChangeAspect="1"/>
           </p:cNvPicPr>
@@ -14768,6 +14537,103 @@
         </p:blipFill>
         <p:spPr>
           <a:xfrm>
+            <a:off x="6349901" y="0"/>
+            <a:ext cx="2793950" cy="1308050"/>
+          </a:xfrm>
+          <a:prstGeom prst="rect">
+            <a:avLst/>
+          </a:prstGeom>
+        </p:spPr>
+      </p:pic>
+      <p:sp>
+        <p:nvSpPr>
+          <p:cNvPr id="3" name="Text 0"/>
+          <p:cNvSpPr/>
+          <p:nvPr/>
+        </p:nvSpPr>
+        <p:spPr>
+          <a:xfrm>
+            <a:off x="7340501" y="177701"/>
+            <a:ext cx="1168301" cy="279350"/>
+          </a:xfrm>
+          <a:prstGeom prst="roundRect">
+            <a:avLst>
+              <a:gd name="adj" fmla="val 22731"/>
+            </a:avLst>
+          </a:prstGeom>
+          <a:solidFill>
+            <a:srgbClr val="1A7F37"/>
+          </a:solidFill>
+          <a:ln/>
+        </p:spPr>
+        <p:txBody>
+          <a:bodyPr wrap="square" rtlCol="0" anchor="ctr"/>
+          <a:lstStyle/>
+          <a:p>
+            <a:pPr indent="0" marL="0">
+              <a:buNone/>
+            </a:pPr>
+            <a:endParaRPr lang="en-US" dirty="0"/>
+          </a:p>
+        </p:txBody>
+      </p:sp>
+      <p:sp>
+        <p:nvSpPr>
+          <p:cNvPr id="4" name="Text 1"/>
+          <p:cNvSpPr/>
+          <p:nvPr/>
+        </p:nvSpPr>
+        <p:spPr>
+          <a:xfrm>
+            <a:off x="7461041" y="231577"/>
+            <a:ext cx="927071" cy="171450"/>
+          </a:xfrm>
+          <a:prstGeom prst="rect">
+            <a:avLst/>
+          </a:prstGeom>
+          <a:noFill/>
+          <a:ln/>
+        </p:spPr>
+        <p:txBody>
+          <a:bodyPr wrap="square" lIns="0" tIns="0" rIns="0" bIns="0" rtlCol="0" anchor="t"/>
+          <a:lstStyle/>
+          <a:p>
+            <a:pPr algn="ctr" indent="0" marL="0">
+              <a:buNone/>
+            </a:pPr>
+            <a:r>
+              <a:rPr lang="en-US" sz="1150" b="1" dirty="0">
+                <a:solidFill>
+                  <a:srgbClr val="FFFFFF"/>
+                </a:solidFill>
+                <a:latin typeface="Arial" pitchFamily="34" charset="0"/>
+                <a:ea typeface="Arial" pitchFamily="34" charset="-122"/>
+                <a:cs typeface="Arial" pitchFamily="34" charset="-120"/>
+              </a:rPr>
+              <a:t>CHAPTER 04</a:t>
+            </a:r>
+            <a:endParaRPr lang="en-US" sz="1150" dirty="0"/>
+          </a:p>
+        </p:txBody>
+      </p:sp>
+      <p:pic>
+        <p:nvPicPr>
+          <p:cNvPr id="5" name="Image 1" descr="/Users/danwahlin/.copilot/session-state/56a7a0da-def8-48d4-b5e8-0ac3878cb8dd/files/slides-build/icons/FaGithub-1F2328.png">
+            <a:hlinkClick r:id="rId3" tooltip="https://github.com/github/copilot-app-for-beginners/tree/main/04-skills-custom-agents"/>
+          </p:cNvPr>
+          <p:cNvPicPr>
+            <a:picLocks noChangeAspect="1"/>
+          </p:cNvPicPr>
+          <p:nvPr/>
+        </p:nvPicPr>
+        <p:blipFill>
+          <a:blip r:embed="rId2"/>
+          <a:stretch>
+            <a:fillRect/>
+          </a:stretch>
+        </p:blipFill>
+        <p:spPr>
+          <a:xfrm>
             <a:off x="8610600" y="165050"/>
             <a:ext cx="304800" cy="304800"/>
           </a:xfrm>
@@ -14778,7 +14644,7 @@
       </p:pic>
       <p:sp>
         <p:nvSpPr>
-          <p:cNvPr id="6" name="Text 3"/>
+          <p:cNvPr id="6" name="Text 2"/>
           <p:cNvSpPr/>
           <p:nvPr/>
         </p:nvSpPr>
@@ -14817,7 +14683,7 @@
       </p:sp>
       <p:sp>
         <p:nvSpPr>
-          <p:cNvPr id="7" name="Text 4"/>
+          <p:cNvPr id="7" name="Text 3"/>
           <p:cNvSpPr/>
           <p:nvPr/>
         </p:nvSpPr>
@@ -14862,7 +14728,7 @@
       </p:sp>
       <p:sp>
         <p:nvSpPr>
-          <p:cNvPr id="8" name="Text 5"/>
+          <p:cNvPr id="8" name="Text 4"/>
           <p:cNvSpPr/>
           <p:nvPr/>
         </p:nvSpPr>
@@ -14905,14 +14771,14 @@
       </p:sp>
       <p:pic>
         <p:nvPicPr>
-          <p:cNvPr id="9" name="Image 1" descr="/Users/danwahlin/.copilot/session-state/56a7a0da-def8-48d4-b5e8-0ac3878cb8dd/files/slides-build/img/04-customize-skills-crop.png">    </p:cNvPr>
+          <p:cNvPr id="9" name="Image 2" descr="/Users/danwahlin/.copilot/session-state/56a7a0da-def8-48d4-b5e8-0ac3878cb8dd/files/slides-build/img/04-customize-skills-crop.png">    </p:cNvPr>
           <p:cNvPicPr>
             <a:picLocks noChangeAspect="1"/>
           </p:cNvPicPr>
           <p:nvPr/>
         </p:nvPicPr>
         <p:blipFill>
-          <a:blip r:embed="rId3"/>
+          <a:blip r:embed="rId4"/>
           <a:stretch>
             <a:fillRect/>
           </a:stretch>
@@ -14929,7 +14795,7 @@
       </p:pic>
       <p:sp>
         <p:nvSpPr>
-          <p:cNvPr id="10" name="Text 6"/>
+          <p:cNvPr id="10" name="Text 5"/>
           <p:cNvSpPr/>
           <p:nvPr/>
         </p:nvSpPr>
@@ -14965,7 +14831,7 @@
       </p:sp>
       <p:sp>
         <p:nvSpPr>
-          <p:cNvPr id="11" name="Shape 7"/>
+          <p:cNvPr id="11" name="Shape 6"/>
           <p:cNvSpPr/>
           <p:nvPr/>
         </p:nvSpPr>
@@ -14988,7 +14854,7 @@
       </p:sp>
       <p:sp>
         <p:nvSpPr>
-          <p:cNvPr id="12" name="Text 8"/>
+          <p:cNvPr id="12" name="Text 7"/>
           <p:cNvSpPr/>
           <p:nvPr/>
         </p:nvSpPr>
@@ -15020,7 +14886,7 @@
       </p:sp>
       <p:sp>
         <p:nvSpPr>
-          <p:cNvPr id="13" name="Text 9"/>
+          <p:cNvPr id="13" name="Text 8"/>
           <p:cNvSpPr/>
           <p:nvPr/>
         </p:nvSpPr>
@@ -15059,7 +14925,7 @@
       </p:sp>
       <p:sp>
         <p:nvSpPr>
-          <p:cNvPr id="14" name="Text 10"/>
+          <p:cNvPr id="14" name="Text 9"/>
           <p:cNvSpPr/>
           <p:nvPr/>
         </p:nvSpPr>
@@ -15101,7 +14967,7 @@
       </p:sp>
       <p:sp>
         <p:nvSpPr>
-          <p:cNvPr id="15" name="Text 11"/>
+          <p:cNvPr id="15" name="Text 10"/>
           <p:cNvSpPr/>
           <p:nvPr/>
         </p:nvSpPr>
@@ -15228,7 +15094,7 @@
       </p:sp>
       <p:sp>
         <p:nvSpPr>
-          <p:cNvPr id="16" name="Shape 12"/>
+          <p:cNvPr id="16" name="Shape 11"/>
           <p:cNvSpPr/>
           <p:nvPr/>
         </p:nvSpPr>
@@ -15251,7 +15117,7 @@
       </p:sp>
       <p:sp>
         <p:nvSpPr>
-          <p:cNvPr id="17" name="Text 13"/>
+          <p:cNvPr id="17" name="Text 12"/>
           <p:cNvSpPr/>
           <p:nvPr/>
         </p:nvSpPr>
@@ -15283,7 +15149,7 @@
       </p:sp>
       <p:sp>
         <p:nvSpPr>
-          <p:cNvPr id="18" name="Text 14"/>
+          <p:cNvPr id="18" name="Text 13"/>
           <p:cNvSpPr/>
           <p:nvPr/>
         </p:nvSpPr>
@@ -15322,7 +15188,7 @@
       </p:sp>
       <p:sp>
         <p:nvSpPr>
-          <p:cNvPr id="19" name="Text 15"/>
+          <p:cNvPr id="19" name="Text 14"/>
           <p:cNvSpPr/>
           <p:nvPr/>
         </p:nvSpPr>
@@ -15364,7 +15230,7 @@
       </p:sp>
       <p:sp>
         <p:nvSpPr>
-          <p:cNvPr id="20" name="Text 16"/>
+          <p:cNvPr id="20" name="Text 15"/>
           <p:cNvSpPr/>
           <p:nvPr/>
         </p:nvSpPr>
@@ -15406,7 +15272,7 @@
       </p:sp>
       <p:sp>
         <p:nvSpPr>
-          <p:cNvPr id="21" name="Shape 17"/>
+          <p:cNvPr id="21" name="Shape 16"/>
           <p:cNvSpPr/>
           <p:nvPr/>
         </p:nvSpPr>
@@ -15429,7 +15295,7 @@
       </p:sp>
       <p:sp>
         <p:nvSpPr>
-          <p:cNvPr id="22" name="Text 18"/>
+          <p:cNvPr id="22" name="Text 17"/>
           <p:cNvSpPr/>
           <p:nvPr/>
         </p:nvSpPr>
@@ -15461,7 +15327,7 @@
       </p:sp>
       <p:sp>
         <p:nvSpPr>
-          <p:cNvPr id="23" name="Text 19"/>
+          <p:cNvPr id="23" name="Text 18"/>
           <p:cNvSpPr/>
           <p:nvPr/>
         </p:nvSpPr>
@@ -15500,7 +15366,7 @@
       </p:sp>
       <p:sp>
         <p:nvSpPr>
-          <p:cNvPr id="24" name="Text 20"/>
+          <p:cNvPr id="24" name="Text 19"/>
           <p:cNvSpPr/>
           <p:nvPr/>
         </p:nvSpPr>
@@ -15542,7 +15408,7 @@
       </p:sp>
       <p:sp>
         <p:nvSpPr>
-          <p:cNvPr id="25" name="Text 21"/>
+          <p:cNvPr id="25" name="Text 20"/>
           <p:cNvSpPr/>
           <p:nvPr/>
         </p:nvSpPr>
@@ -15652,7 +15518,7 @@
       </p:sp>
       <p:sp>
         <p:nvSpPr>
-          <p:cNvPr id="26" name="Text 22"/>
+          <p:cNvPr id="26" name="Text 21"/>
           <p:cNvSpPr/>
           <p:nvPr/>
         </p:nvSpPr>
@@ -15684,7 +15550,7 @@
       </p:sp>
       <p:sp>
         <p:nvSpPr>
-          <p:cNvPr id="27" name="Text 23"/>
+          <p:cNvPr id="27" name="Text 22"/>
           <p:cNvSpPr/>
           <p:nvPr/>
         </p:nvSpPr>
@@ -15723,7 +15589,7 @@
       </p:sp>
       <p:sp>
         <p:nvSpPr>
-          <p:cNvPr id="28" name="Text 24"/>
+          <p:cNvPr id="28" name="Text 23"/>
           <p:cNvSpPr/>
           <p:nvPr/>
         </p:nvSpPr>
@@ -15765,7 +15631,7 @@
       </p:sp>
       <p:sp>
         <p:nvSpPr>
-          <p:cNvPr id="29" name="Text 25"/>
+          <p:cNvPr id="29" name="Text 24"/>
           <p:cNvSpPr/>
           <p:nvPr/>
         </p:nvSpPr>
@@ -15837,112 +15703,9 @@
           <a:chExt cx="0" cy="0"/>
         </a:xfrm>
       </p:grpSpPr>
-      <p:sp>
-        <p:nvSpPr>
-          <p:cNvPr id="2" name="Text 0"/>
-          <p:cNvSpPr/>
-          <p:nvPr/>
-        </p:nvSpPr>
-        <p:spPr>
-          <a:xfrm>
-            <a:off x="0" y="0"/>
-            <a:ext cx="9144000" cy="76200"/>
-          </a:xfrm>
-          <a:prstGeom prst="rect">
-            <a:avLst/>
-          </a:prstGeom>
-          <a:solidFill>
-            <a:srgbClr val="0969DA"/>
-          </a:solidFill>
-          <a:ln/>
-        </p:spPr>
-        <p:txBody>
-          <a:bodyPr wrap="square" rtlCol="0" anchor="ctr"/>
-          <a:lstStyle/>
-          <a:p>
-            <a:pPr indent="0" marL="0">
-              <a:buNone/>
-            </a:pPr>
-            <a:endParaRPr lang="en-US" dirty="0"/>
-          </a:p>
-        </p:txBody>
-      </p:sp>
-      <p:sp>
-        <p:nvSpPr>
-          <p:cNvPr id="3" name="Text 1"/>
-          <p:cNvSpPr/>
-          <p:nvPr/>
-        </p:nvSpPr>
-        <p:spPr>
-          <a:xfrm>
-            <a:off x="7340501" y="177701"/>
-            <a:ext cx="1168301" cy="279350"/>
-          </a:xfrm>
-          <a:prstGeom prst="roundRect">
-            <a:avLst>
-              <a:gd name="adj" fmla="val 22731"/>
-            </a:avLst>
-          </a:prstGeom>
-          <a:solidFill>
-            <a:srgbClr val="1A7F37"/>
-          </a:solidFill>
-          <a:ln/>
-        </p:spPr>
-        <p:txBody>
-          <a:bodyPr wrap="square" rtlCol="0" anchor="ctr"/>
-          <a:lstStyle/>
-          <a:p>
-            <a:pPr indent="0" marL="0">
-              <a:buNone/>
-            </a:pPr>
-            <a:endParaRPr lang="en-US" dirty="0"/>
-          </a:p>
-        </p:txBody>
-      </p:sp>
-      <p:sp>
-        <p:nvSpPr>
-          <p:cNvPr id="4" name="Text 2"/>
-          <p:cNvSpPr/>
-          <p:nvPr/>
-        </p:nvSpPr>
-        <p:spPr>
-          <a:xfrm>
-            <a:off x="7461041" y="231577"/>
-            <a:ext cx="927071" cy="171450"/>
-          </a:xfrm>
-          <a:prstGeom prst="rect">
-            <a:avLst/>
-          </a:prstGeom>
-          <a:noFill/>
-          <a:ln/>
-        </p:spPr>
-        <p:txBody>
-          <a:bodyPr wrap="square" lIns="0" tIns="0" rIns="0" bIns="0" rtlCol="0" anchor="t"/>
-          <a:lstStyle/>
-          <a:p>
-            <a:pPr algn="ctr" indent="0" marL="0">
-              <a:buNone/>
-            </a:pPr>
-            <a:r>
-              <a:rPr lang="en-US" sz="1150" b="1" dirty="0">
-                <a:solidFill>
-                  <a:srgbClr val="FFFFFF"/>
-                </a:solidFill>
-                <a:latin typeface="Arial" pitchFamily="34" charset="0"/>
-                <a:ea typeface="Arial" pitchFamily="34" charset="-122"/>
-                <a:cs typeface="Arial" pitchFamily="34" charset="-120"/>
-              </a:rPr>
-              <a:t>CHAPTER 04</a:t>
-            </a:r>
-            <a:endParaRPr lang="en-US" sz="1150" dirty="0"/>
-          </a:p>
-        </p:txBody>
-      </p:sp>
       <p:pic>
         <p:nvPicPr>
-          <p:cNvPr id="5" name="Image 0" descr="/Users/danwahlin/.copilot/session-state/56a7a0da-def8-48d4-b5e8-0ac3878cb8dd/files/slides-build/icons/FaGithub-1F2328.png">
-            <a:hlinkClick r:id="rId2" tooltip="https://github.com/github/copilot-app-for-beginners/tree/main/04-skills-custom-agents"/>
-          </p:cNvPr>
+          <p:cNvPr id="2" name="Image 0" descr="/Users/danwahlin/.copilot/session-state/56a7a0da-def8-48d4-b5e8-0ac3878cb8dd/files/slides-build/img/grad-corner.png">    </p:cNvPr>
           <p:cNvPicPr>
             <a:picLocks noChangeAspect="1"/>
           </p:cNvPicPr>
@@ -15956,6 +15719,103 @@
         </p:blipFill>
         <p:spPr>
           <a:xfrm>
+            <a:off x="6349901" y="0"/>
+            <a:ext cx="2793950" cy="1308050"/>
+          </a:xfrm>
+          <a:prstGeom prst="rect">
+            <a:avLst/>
+          </a:prstGeom>
+        </p:spPr>
+      </p:pic>
+      <p:sp>
+        <p:nvSpPr>
+          <p:cNvPr id="3" name="Text 0"/>
+          <p:cNvSpPr/>
+          <p:nvPr/>
+        </p:nvSpPr>
+        <p:spPr>
+          <a:xfrm>
+            <a:off x="7340501" y="177701"/>
+            <a:ext cx="1168301" cy="279350"/>
+          </a:xfrm>
+          <a:prstGeom prst="roundRect">
+            <a:avLst>
+              <a:gd name="adj" fmla="val 22731"/>
+            </a:avLst>
+          </a:prstGeom>
+          <a:solidFill>
+            <a:srgbClr val="1A7F37"/>
+          </a:solidFill>
+          <a:ln/>
+        </p:spPr>
+        <p:txBody>
+          <a:bodyPr wrap="square" rtlCol="0" anchor="ctr"/>
+          <a:lstStyle/>
+          <a:p>
+            <a:pPr indent="0" marL="0">
+              <a:buNone/>
+            </a:pPr>
+            <a:endParaRPr lang="en-US" dirty="0"/>
+          </a:p>
+        </p:txBody>
+      </p:sp>
+      <p:sp>
+        <p:nvSpPr>
+          <p:cNvPr id="4" name="Text 1"/>
+          <p:cNvSpPr/>
+          <p:nvPr/>
+        </p:nvSpPr>
+        <p:spPr>
+          <a:xfrm>
+            <a:off x="7461041" y="231577"/>
+            <a:ext cx="927071" cy="171450"/>
+          </a:xfrm>
+          <a:prstGeom prst="rect">
+            <a:avLst/>
+          </a:prstGeom>
+          <a:noFill/>
+          <a:ln/>
+        </p:spPr>
+        <p:txBody>
+          <a:bodyPr wrap="square" lIns="0" tIns="0" rIns="0" bIns="0" rtlCol="0" anchor="t"/>
+          <a:lstStyle/>
+          <a:p>
+            <a:pPr algn="ctr" indent="0" marL="0">
+              <a:buNone/>
+            </a:pPr>
+            <a:r>
+              <a:rPr lang="en-US" sz="1150" b="1" dirty="0">
+                <a:solidFill>
+                  <a:srgbClr val="FFFFFF"/>
+                </a:solidFill>
+                <a:latin typeface="Arial" pitchFamily="34" charset="0"/>
+                <a:ea typeface="Arial" pitchFamily="34" charset="-122"/>
+                <a:cs typeface="Arial" pitchFamily="34" charset="-120"/>
+              </a:rPr>
+              <a:t>CHAPTER 04</a:t>
+            </a:r>
+            <a:endParaRPr lang="en-US" sz="1150" dirty="0"/>
+          </a:p>
+        </p:txBody>
+      </p:sp>
+      <p:pic>
+        <p:nvPicPr>
+          <p:cNvPr id="5" name="Image 1" descr="/Users/danwahlin/.copilot/session-state/56a7a0da-def8-48d4-b5e8-0ac3878cb8dd/files/slides-build/icons/FaGithub-1F2328.png">
+            <a:hlinkClick r:id="rId3" tooltip="https://github.com/github/copilot-app-for-beginners/tree/main/04-skills-custom-agents"/>
+          </p:cNvPr>
+          <p:cNvPicPr>
+            <a:picLocks noChangeAspect="1"/>
+          </p:cNvPicPr>
+          <p:nvPr/>
+        </p:nvPicPr>
+        <p:blipFill>
+          <a:blip r:embed="rId2"/>
+          <a:stretch>
+            <a:fillRect/>
+          </a:stretch>
+        </p:blipFill>
+        <p:spPr>
+          <a:xfrm>
             <a:off x="8610600" y="165050"/>
             <a:ext cx="304800" cy="304800"/>
           </a:xfrm>
@@ -15966,7 +15826,7 @@
       </p:pic>
       <p:sp>
         <p:nvSpPr>
-          <p:cNvPr id="6" name="Text 3"/>
+          <p:cNvPr id="6" name="Text 2"/>
           <p:cNvSpPr/>
           <p:nvPr/>
         </p:nvSpPr>
@@ -16005,7 +15865,7 @@
       </p:sp>
       <p:sp>
         <p:nvSpPr>
-          <p:cNvPr id="7" name="Text 4"/>
+          <p:cNvPr id="7" name="Text 3"/>
           <p:cNvSpPr/>
           <p:nvPr/>
         </p:nvSpPr>
@@ -16050,7 +15910,7 @@
       </p:sp>
       <p:sp>
         <p:nvSpPr>
-          <p:cNvPr id="8" name="Text 5"/>
+          <p:cNvPr id="8" name="Text 4"/>
           <p:cNvSpPr/>
           <p:nvPr/>
         </p:nvSpPr>
@@ -16095,7 +15955,7 @@
       </p:sp>
       <p:sp>
         <p:nvSpPr>
-          <p:cNvPr id="9" name="Text 6"/>
+          <p:cNvPr id="9" name="Text 5"/>
           <p:cNvSpPr/>
           <p:nvPr/>
         </p:nvSpPr>
@@ -16131,7 +15991,7 @@
       </p:sp>
       <p:sp>
         <p:nvSpPr>
-          <p:cNvPr id="10" name="Text 7"/>
+          <p:cNvPr id="10" name="Text 6"/>
           <p:cNvSpPr/>
           <p:nvPr/>
         </p:nvSpPr>
@@ -16163,14 +16023,14 @@
       </p:sp>
       <p:pic>
         <p:nvPicPr>
-          <p:cNvPr id="11" name="Image 1" descr="/Users/danwahlin/.copilot/session-state/56a7a0da-def8-48d4-b5e8-0ac3878cb8dd/files/slides-build/icons/GoListOrdered-8250DF.png">    </p:cNvPr>
+          <p:cNvPr id="11" name="Image 2" descr="/Users/danwahlin/.copilot/session-state/56a7a0da-def8-48d4-b5e8-0ac3878cb8dd/files/slides-build/icons/GoListOrdered-8250DF.png">    </p:cNvPr>
           <p:cNvPicPr>
             <a:picLocks noChangeAspect="1"/>
           </p:cNvPicPr>
           <p:nvPr/>
         </p:nvPicPr>
         <p:blipFill>
-          <a:blip r:embed="rId3"/>
+          <a:blip r:embed="rId4"/>
           <a:stretch>
             <a:fillRect/>
           </a:stretch>
@@ -16187,7 +16047,7 @@
       </p:pic>
       <p:sp>
         <p:nvSpPr>
-          <p:cNvPr id="12" name="Text 8"/>
+          <p:cNvPr id="12" name="Text 7"/>
           <p:cNvSpPr/>
           <p:nvPr/>
         </p:nvSpPr>
@@ -16229,7 +16089,7 @@
       </p:sp>
       <p:sp>
         <p:nvSpPr>
-          <p:cNvPr id="13" name="Text 9"/>
+          <p:cNvPr id="13" name="Text 8"/>
           <p:cNvSpPr/>
           <p:nvPr/>
         </p:nvSpPr>
@@ -16261,7 +16121,7 @@
       </p:sp>
       <p:sp>
         <p:nvSpPr>
-          <p:cNvPr id="14" name="Text 10"/>
+          <p:cNvPr id="14" name="Text 9"/>
           <p:cNvSpPr/>
           <p:nvPr/>
         </p:nvSpPr>
@@ -16300,7 +16160,7 @@
       </p:sp>
       <p:sp>
         <p:nvSpPr>
-          <p:cNvPr id="15" name="Text 11"/>
+          <p:cNvPr id="15" name="Text 10"/>
           <p:cNvSpPr/>
           <p:nvPr/>
         </p:nvSpPr>
@@ -16339,7 +16199,7 @@
       </p:sp>
       <p:sp>
         <p:nvSpPr>
-          <p:cNvPr id="16" name="Text 12"/>
+          <p:cNvPr id="16" name="Text 11"/>
           <p:cNvSpPr/>
           <p:nvPr/>
         </p:nvSpPr>
@@ -16371,7 +16231,7 @@
       </p:sp>
       <p:sp>
         <p:nvSpPr>
-          <p:cNvPr id="17" name="Text 13"/>
+          <p:cNvPr id="17" name="Text 12"/>
           <p:cNvSpPr/>
           <p:nvPr/>
         </p:nvSpPr>
@@ -16410,7 +16270,7 @@
       </p:sp>
       <p:sp>
         <p:nvSpPr>
-          <p:cNvPr id="18" name="Text 14"/>
+          <p:cNvPr id="18" name="Text 13"/>
           <p:cNvSpPr/>
           <p:nvPr/>
         </p:nvSpPr>
@@ -16449,7 +16309,7 @@
       </p:sp>
       <p:sp>
         <p:nvSpPr>
-          <p:cNvPr id="19" name="Text 15"/>
+          <p:cNvPr id="19" name="Text 14"/>
           <p:cNvSpPr/>
           <p:nvPr/>
         </p:nvSpPr>
@@ -16481,7 +16341,7 @@
       </p:sp>
       <p:sp>
         <p:nvSpPr>
-          <p:cNvPr id="20" name="Text 16"/>
+          <p:cNvPr id="20" name="Text 15"/>
           <p:cNvSpPr/>
           <p:nvPr/>
         </p:nvSpPr>
@@ -16520,7 +16380,7 @@
       </p:sp>
       <p:sp>
         <p:nvSpPr>
-          <p:cNvPr id="21" name="Text 17"/>
+          <p:cNvPr id="21" name="Text 16"/>
           <p:cNvSpPr/>
           <p:nvPr/>
         </p:nvSpPr>
@@ -16573,7 +16433,7 @@
       </p:sp>
       <p:sp>
         <p:nvSpPr>
-          <p:cNvPr id="22" name="Text 18"/>
+          <p:cNvPr id="22" name="Text 17"/>
           <p:cNvSpPr/>
           <p:nvPr/>
         </p:nvSpPr>
@@ -16605,7 +16465,7 @@
       </p:sp>
       <p:sp>
         <p:nvSpPr>
-          <p:cNvPr id="23" name="Text 19"/>
+          <p:cNvPr id="23" name="Text 18"/>
           <p:cNvSpPr/>
           <p:nvPr/>
         </p:nvSpPr>
@@ -16644,7 +16504,7 @@
       </p:sp>
       <p:sp>
         <p:nvSpPr>
-          <p:cNvPr id="24" name="Text 20"/>
+          <p:cNvPr id="24" name="Text 19"/>
           <p:cNvSpPr/>
           <p:nvPr/>
         </p:nvSpPr>
@@ -16697,7 +16557,7 @@
       </p:sp>
       <p:sp>
         <p:nvSpPr>
-          <p:cNvPr id="25" name="Text 21"/>
+          <p:cNvPr id="25" name="Text 20"/>
           <p:cNvSpPr/>
           <p:nvPr/>
         </p:nvSpPr>
@@ -16733,14 +16593,14 @@
       </p:sp>
       <p:pic>
         <p:nvPicPr>
-          <p:cNvPr id="26" name="Image 2" descr="/Users/danwahlin/.copilot/session-state/56a7a0da-def8-48d4-b5e8-0ac3878cb8dd/files/slides-build/icons/GoAlert-9A6700.png">    </p:cNvPr>
+          <p:cNvPr id="26" name="Image 3" descr="/Users/danwahlin/.copilot/session-state/56a7a0da-def8-48d4-b5e8-0ac3878cb8dd/files/slides-build/icons/GoAlert-9A6700.png">    </p:cNvPr>
           <p:cNvPicPr>
             <a:picLocks noChangeAspect="1"/>
           </p:cNvPicPr>
           <p:nvPr/>
         </p:nvPicPr>
         <p:blipFill>
-          <a:blip r:embed="rId4"/>
+          <a:blip r:embed="rId5"/>
           <a:stretch>
             <a:fillRect/>
           </a:stretch>
@@ -16757,7 +16617,7 @@
       </p:pic>
       <p:sp>
         <p:nvSpPr>
-          <p:cNvPr id="27" name="Text 22"/>
+          <p:cNvPr id="27" name="Text 21"/>
           <p:cNvSpPr/>
           <p:nvPr/>
         </p:nvSpPr>
@@ -16867,7 +16727,7 @@
       </p:sp>
       <p:sp>
         <p:nvSpPr>
-          <p:cNvPr id="28" name="Text 23"/>
+          <p:cNvPr id="28" name="Text 22"/>
           <p:cNvSpPr/>
           <p:nvPr/>
         </p:nvSpPr>
@@ -16903,14 +16763,14 @@
       </p:sp>
       <p:pic>
         <p:nvPicPr>
-          <p:cNvPr id="29" name="Image 3" descr="/Users/danwahlin/.copilot/session-state/56a7a0da-def8-48d4-b5e8-0ac3878cb8dd/files/slides-build/icons/GoX-CF222E.png">    </p:cNvPr>
+          <p:cNvPr id="29" name="Image 4" descr="/Users/danwahlin/.copilot/session-state/56a7a0da-def8-48d4-b5e8-0ac3878cb8dd/files/slides-build/icons/GoX-CF222E.png">    </p:cNvPr>
           <p:cNvPicPr>
             <a:picLocks noChangeAspect="1"/>
           </p:cNvPicPr>
           <p:nvPr/>
         </p:nvPicPr>
         <p:blipFill>
-          <a:blip r:embed="rId5"/>
+          <a:blip r:embed="rId6"/>
           <a:stretch>
             <a:fillRect/>
           </a:stretch>
@@ -16927,7 +16787,7 @@
       </p:pic>
       <p:sp>
         <p:nvSpPr>
-          <p:cNvPr id="30" name="Text 24"/>
+          <p:cNvPr id="30" name="Text 23"/>
           <p:cNvSpPr/>
           <p:nvPr/>
         </p:nvSpPr>
@@ -16969,7 +16829,7 @@
       </p:sp>
       <p:sp>
         <p:nvSpPr>
-          <p:cNvPr id="31" name="Text 25"/>
+          <p:cNvPr id="31" name="Text 24"/>
           <p:cNvSpPr/>
           <p:nvPr/>
         </p:nvSpPr>
@@ -17005,14 +16865,14 @@
       </p:sp>
       <p:pic>
         <p:nvPicPr>
-          <p:cNvPr id="32" name="Image 4" descr="/Users/danwahlin/.copilot/session-state/56a7a0da-def8-48d4-b5e8-0ac3878cb8dd/files/slides-build/icons/GoEye-1A7F37.png">    </p:cNvPr>
+          <p:cNvPr id="32" name="Image 5" descr="/Users/danwahlin/.copilot/session-state/56a7a0da-def8-48d4-b5e8-0ac3878cb8dd/files/slides-build/icons/GoEye-1A7F37.png">    </p:cNvPr>
           <p:cNvPicPr>
             <a:picLocks noChangeAspect="1"/>
           </p:cNvPicPr>
           <p:nvPr/>
         </p:nvPicPr>
         <p:blipFill>
-          <a:blip r:embed="rId6"/>
+          <a:blip r:embed="rId7"/>
           <a:stretch>
             <a:fillRect/>
           </a:stretch>
@@ -17029,7 +16889,7 @@
       </p:pic>
       <p:sp>
         <p:nvSpPr>
-          <p:cNvPr id="33" name="Text 26"/>
+          <p:cNvPr id="33" name="Text 25"/>
           <p:cNvSpPr/>
           <p:nvPr/>
         </p:nvSpPr>

--- a/slides/04-skills-custom-agents.pptx
+++ b/slides/04-skills-custom-agents.pptx
@@ -14734,12 +14734,12 @@
         </p:nvSpPr>
         <p:spPr>
           <a:xfrm>
-            <a:off x="511076" y="1398836"/>
-            <a:ext cx="8121551" cy="1342281"/>
+            <a:off x="511076" y="1311771"/>
+            <a:ext cx="8121551" cy="1516261"/>
           </a:xfrm>
           <a:prstGeom prst="roundRect">
             <a:avLst>
-              <a:gd name="adj" fmla="val 5677"/>
+              <a:gd name="adj" fmla="val 5026"/>
             </a:avLst>
           </a:prstGeom>
           <a:solidFill>
@@ -14785,8 +14785,8 @@
         </p:blipFill>
         <p:spPr>
           <a:xfrm>
-            <a:off x="558701" y="1446461"/>
-            <a:ext cx="8026301" cy="1247031"/>
+            <a:off x="558701" y="1359396"/>
+            <a:ext cx="8026301" cy="1421011"/>
           </a:xfrm>
           <a:prstGeom prst="rect">
             <a:avLst/>

--- a/slides/04-skills-custom-agents.pptx
+++ b/slides/04-skills-custom-agents.pptx
@@ -2212,7 +2212,7 @@
       </p:grpSpPr>
       <p:pic>
         <p:nvPicPr>
-          <p:cNvPr id="2" name="Image 0" descr="/Users/danwahlin/.copilot/session-state/56a7a0da-def8-48d4-b5e8-0ac3878cb8dd/files/slides-build/img/grad-title.jpg">    </p:cNvPr>
+          <p:cNvPr id="2" name="Image 0" descr="/Users/danwahlin/.copilot/session-state/56a7a0da-def8-48d4-b5e8-0ac3878cb8dd/files/slides-build/img/grad-title-pattern.jpg">    </p:cNvPr>
           <p:cNvPicPr>
             <a:picLocks noChangeAspect="1"/>
           </p:cNvPicPr>
@@ -2624,7 +2624,7 @@
       </p:sp>
       <p:pic>
         <p:nvPicPr>
-          <p:cNvPr id="5" name="Image 0" descr="/Users/danwahlin/.copilot/session-state/56a7a0da-def8-48d4-b5e8-0ac3878cb8dd/files/slides-build/img/grad-corner.png">    </p:cNvPr>
+          <p:cNvPr id="5" name="Image 0" descr="/Users/danwahlin/.copilot/session-state/56a7a0da-def8-48d4-b5e8-0ac3878cb8dd/files/slides-build/img/grad-corner-pattern.png">    </p:cNvPr>
           <p:cNvPicPr>
             <a:picLocks noChangeAspect="1"/>
           </p:cNvPicPr>
@@ -2935,7 +2935,7 @@
       </p:grpSpPr>
       <p:pic>
         <p:nvPicPr>
-          <p:cNvPr id="2" name="Image 0" descr="/Users/danwahlin/.copilot/session-state/56a7a0da-def8-48d4-b5e8-0ac3878cb8dd/files/slides-build/img/grad-corner.png">    </p:cNvPr>
+          <p:cNvPr id="2" name="Image 0" descr="/Users/danwahlin/.copilot/session-state/56a7a0da-def8-48d4-b5e8-0ac3878cb8dd/files/slides-build/img/grad-corner-pattern.png">    </p:cNvPr>
           <p:cNvPicPr>
             <a:picLocks noChangeAspect="1"/>
           </p:cNvPicPr>
@@ -3695,7 +3695,7 @@
       </p:grpSpPr>
       <p:pic>
         <p:nvPicPr>
-          <p:cNvPr id="2" name="Image 0" descr="/Users/danwahlin/.copilot/session-state/56a7a0da-def8-48d4-b5e8-0ac3878cb8dd/files/slides-build/img/grad-corner.png">    </p:cNvPr>
+          <p:cNvPr id="2" name="Image 0" descr="/Users/danwahlin/.copilot/session-state/56a7a0da-def8-48d4-b5e8-0ac3878cb8dd/files/slides-build/img/grad-corner-pattern.png">    </p:cNvPr>
           <p:cNvPicPr>
             <a:picLocks noChangeAspect="1"/>
           </p:cNvPicPr>
@@ -5202,7 +5202,7 @@
       </p:grpSpPr>
       <p:pic>
         <p:nvPicPr>
-          <p:cNvPr id="2" name="Image 0" descr="/Users/danwahlin/.copilot/session-state/56a7a0da-def8-48d4-b5e8-0ac3878cb8dd/files/slides-build/img/grad-corner.png">    </p:cNvPr>
+          <p:cNvPr id="2" name="Image 0" descr="/Users/danwahlin/.copilot/session-state/56a7a0da-def8-48d4-b5e8-0ac3878cb8dd/files/slides-build/img/grad-corner-pattern.png">    </p:cNvPr>
           <p:cNvPicPr>
             <a:picLocks noChangeAspect="1"/>
           </p:cNvPicPr>
@@ -6158,7 +6158,7 @@
       </p:grpSpPr>
       <p:pic>
         <p:nvPicPr>
-          <p:cNvPr id="2" name="Image 0" descr="/Users/danwahlin/.copilot/session-state/56a7a0da-def8-48d4-b5e8-0ac3878cb8dd/files/slides-build/img/grad-corner.png">    </p:cNvPr>
+          <p:cNvPr id="2" name="Image 0" descr="/Users/danwahlin/.copilot/session-state/56a7a0da-def8-48d4-b5e8-0ac3878cb8dd/files/slides-build/img/grad-corner-pattern.png">    </p:cNvPr>
           <p:cNvPicPr>
             <a:picLocks noChangeAspect="1"/>
           </p:cNvPicPr>
@@ -6991,7 +6991,7 @@
       </p:grpSpPr>
       <p:pic>
         <p:nvPicPr>
-          <p:cNvPr id="2" name="Image 0" descr="/Users/danwahlin/.copilot/session-state/56a7a0da-def8-48d4-b5e8-0ac3878cb8dd/files/slides-build/img/grad-corner.png">    </p:cNvPr>
+          <p:cNvPr id="2" name="Image 0" descr="/Users/danwahlin/.copilot/session-state/56a7a0da-def8-48d4-b5e8-0ac3878cb8dd/files/slides-build/img/grad-corner-pattern.png">    </p:cNvPr>
           <p:cNvPicPr>
             <a:picLocks noChangeAspect="1"/>
           </p:cNvPicPr>
@@ -8208,7 +8208,7 @@
       </p:grpSpPr>
       <p:pic>
         <p:nvPicPr>
-          <p:cNvPr id="2" name="Image 0" descr="/Users/danwahlin/.copilot/session-state/56a7a0da-def8-48d4-b5e8-0ac3878cb8dd/files/slides-build/img/grad-corner.png">    </p:cNvPr>
+          <p:cNvPr id="2" name="Image 0" descr="/Users/danwahlin/.copilot/session-state/56a7a0da-def8-48d4-b5e8-0ac3878cb8dd/files/slides-build/img/grad-corner-pattern.png">    </p:cNvPr>
           <p:cNvPicPr>
             <a:picLocks noChangeAspect="1"/>
           </p:cNvPicPr>
@@ -9337,7 +9337,7 @@
       </p:grpSpPr>
       <p:pic>
         <p:nvPicPr>
-          <p:cNvPr id="2" name="Image 0" descr="/Users/danwahlin/.copilot/session-state/56a7a0da-def8-48d4-b5e8-0ac3878cb8dd/files/slides-build/img/grad-corner.png">    </p:cNvPr>
+          <p:cNvPr id="2" name="Image 0" descr="/Users/danwahlin/.copilot/session-state/56a7a0da-def8-48d4-b5e8-0ac3878cb8dd/files/slides-build/img/grad-corner-pattern.png">    </p:cNvPr>
           <p:cNvPicPr>
             <a:picLocks noChangeAspect="1"/>
           </p:cNvPicPr>
@@ -10062,7 +10062,7 @@
       </p:grpSpPr>
       <p:pic>
         <p:nvPicPr>
-          <p:cNvPr id="2" name="Image 0" descr="/Users/danwahlin/.copilot/session-state/56a7a0da-def8-48d4-b5e8-0ac3878cb8dd/files/slides-build/img/grad-corner.png">    </p:cNvPr>
+          <p:cNvPr id="2" name="Image 0" descr="/Users/danwahlin/.copilot/session-state/56a7a0da-def8-48d4-b5e8-0ac3878cb8dd/files/slides-build/img/grad-corner-pattern.png">    </p:cNvPr>
           <p:cNvPicPr>
             <a:picLocks noChangeAspect="1"/>
           </p:cNvPicPr>
@@ -11251,7 +11251,7 @@
       </p:sp>
       <p:pic>
         <p:nvPicPr>
-          <p:cNvPr id="5" name="Image 0" descr="/Users/danwahlin/.copilot/session-state/56a7a0da-def8-48d4-b5e8-0ac3878cb8dd/files/slides-build/img/grad-corner.png">    </p:cNvPr>
+          <p:cNvPr id="5" name="Image 0" descr="/Users/danwahlin/.copilot/session-state/56a7a0da-def8-48d4-b5e8-0ac3878cb8dd/files/slides-build/img/grad-corner-pattern.png">    </p:cNvPr>
           <p:cNvPicPr>
             <a:picLocks noChangeAspect="1"/>
           </p:cNvPicPr>
@@ -11562,7 +11562,7 @@
       </p:grpSpPr>
       <p:pic>
         <p:nvPicPr>
-          <p:cNvPr id="2" name="Image 0" descr="/Users/danwahlin/.copilot/session-state/56a7a0da-def8-48d4-b5e8-0ac3878cb8dd/files/slides-build/img/grad-corner.png">    </p:cNvPr>
+          <p:cNvPr id="2" name="Image 0" descr="/Users/danwahlin/.copilot/session-state/56a7a0da-def8-48d4-b5e8-0ac3878cb8dd/files/slides-build/img/grad-corner-pattern.png">    </p:cNvPr>
           <p:cNvPicPr>
             <a:picLocks noChangeAspect="1"/>
           </p:cNvPicPr>
@@ -12322,7 +12322,7 @@
       </p:grpSpPr>
       <p:pic>
         <p:nvPicPr>
-          <p:cNvPr id="2" name="Image 0" descr="/Users/danwahlin/.copilot/session-state/56a7a0da-def8-48d4-b5e8-0ac3878cb8dd/files/slides-build/img/grad-corner.png">    </p:cNvPr>
+          <p:cNvPr id="2" name="Image 0" descr="/Users/danwahlin/.copilot/session-state/56a7a0da-def8-48d4-b5e8-0ac3878cb8dd/files/slides-build/img/grad-corner-pattern.png">    </p:cNvPr>
           <p:cNvPicPr>
             <a:picLocks noChangeAspect="1"/>
           </p:cNvPicPr>
@@ -13037,7 +13037,7 @@
       </p:grpSpPr>
       <p:pic>
         <p:nvPicPr>
-          <p:cNvPr id="2" name="Image 0" descr="/Users/danwahlin/.copilot/session-state/56a7a0da-def8-48d4-b5e8-0ac3878cb8dd/files/slides-build/img/grad-corner.png">    </p:cNvPr>
+          <p:cNvPr id="2" name="Image 0" descr="/Users/danwahlin/.copilot/session-state/56a7a0da-def8-48d4-b5e8-0ac3878cb8dd/files/slides-build/img/grad-corner-pattern.png">    </p:cNvPr>
           <p:cNvPicPr>
             <a:picLocks noChangeAspect="1"/>
           </p:cNvPicPr>
@@ -14523,7 +14523,7 @@
       </p:grpSpPr>
       <p:pic>
         <p:nvPicPr>
-          <p:cNvPr id="2" name="Image 0" descr="/Users/danwahlin/.copilot/session-state/56a7a0da-def8-48d4-b5e8-0ac3878cb8dd/files/slides-build/img/grad-corner.png">    </p:cNvPr>
+          <p:cNvPr id="2" name="Image 0" descr="/Users/danwahlin/.copilot/session-state/56a7a0da-def8-48d4-b5e8-0ac3878cb8dd/files/slides-build/img/grad-corner-pattern.png">    </p:cNvPr>
           <p:cNvPicPr>
             <a:picLocks noChangeAspect="1"/>
           </p:cNvPicPr>
@@ -15705,7 +15705,7 @@
       </p:grpSpPr>
       <p:pic>
         <p:nvPicPr>
-          <p:cNvPr id="2" name="Image 0" descr="/Users/danwahlin/.copilot/session-state/56a7a0da-def8-48d4-b5e8-0ac3878cb8dd/files/slides-build/img/grad-corner.png">    </p:cNvPr>
+          <p:cNvPr id="2" name="Image 0" descr="/Users/danwahlin/.copilot/session-state/56a7a0da-def8-48d4-b5e8-0ac3878cb8dd/files/slides-build/img/grad-corner-pattern.png">    </p:cNvPr>
           <p:cNvPicPr>
             <a:picLocks noChangeAspect="1"/>
           </p:cNvPicPr>

--- a/slides/04-skills-custom-agents.pptx
+++ b/slides/04-skills-custom-agents.pptx
@@ -2212,7 +2212,13 @@
       </p:grpSpPr>
       <p:pic>
         <p:nvPicPr>
-          <p:cNvPr id="2" name="Image 0" descr="/Users/danwahlin/.copilot/session-state/56a7a0da-def8-48d4-b5e8-0ac3878cb8dd/files/slides-build/img/grad-title-pattern.jpg">    </p:cNvPr>
+          <p:cNvPr id="2" name="Image 0" descr="">
+            <a:extLst>
+              <a:ext uri="{C183D7F6-B498-43B3-948B-1728B52AA6E4}">
+                <adec:decorative xmlns:adec="http://schemas.microsoft.com/office/drawing/2017/decorative" val="1"/>
+              </a:ext>
+            </a:extLst>
+          </p:cNvPr>
           <p:cNvPicPr>
             <a:picLocks noChangeAspect="1"/>
           </p:cNvPicPr>
@@ -2236,7 +2242,7 @@
       </p:pic>
       <p:pic>
         <p:nvPicPr>
-          <p:cNvPr id="3" name="Image 1" descr="/Users/danwahlin/.copilot/session-state/56a7a0da-def8-48d4-b5e8-0ac3878cb8dd/files/slides-build/icons/FaGithub-1F2328.png">
+          <p:cNvPr id="3" name="Image 1" descr="Open this chapter on GitHub">
             <a:hlinkClick r:id="rId3" tooltip="https://github.com/github/copilot-app-for-beginners/tree/main/04-skills-custom-agents"/>
           </p:cNvPr>
           <p:cNvPicPr>
@@ -2420,7 +2426,13 @@
       </p:sp>
       <p:pic>
         <p:nvPicPr>
-          <p:cNvPr id="8" name="Image 2" descr="/Users/danwahlin/.copilot/session-state/56a7a0da-def8-48d4-b5e8-0ac3878cb8dd/files/slides-build/icons/FaGithub-0969DA.png">    </p:cNvPr>
+          <p:cNvPr id="8" name="Image 2" descr="">
+            <a:extLst>
+              <a:ext uri="{C183D7F6-B498-43B3-948B-1728B52AA6E4}">
+                <adec:decorative xmlns:adec="http://schemas.microsoft.com/office/drawing/2017/decorative" val="1"/>
+              </a:ext>
+            </a:extLst>
+          </p:cNvPr>
           <p:cNvPicPr>
             <a:picLocks noChangeAspect="1"/>
           </p:cNvPicPr>
@@ -2624,7 +2636,13 @@
       </p:sp>
       <p:pic>
         <p:nvPicPr>
-          <p:cNvPr id="5" name="Image 0" descr="/Users/danwahlin/.copilot/session-state/56a7a0da-def8-48d4-b5e8-0ac3878cb8dd/files/slides-build/img/grad-corner-pattern.png">    </p:cNvPr>
+          <p:cNvPr id="5" name="Image 0" descr="">
+            <a:extLst>
+              <a:ext uri="{C183D7F6-B498-43B3-948B-1728B52AA6E4}">
+                <adec:decorative xmlns:adec="http://schemas.microsoft.com/office/drawing/2017/decorative" val="1"/>
+              </a:ext>
+            </a:extLst>
+          </p:cNvPr>
           <p:cNvPicPr>
             <a:picLocks noChangeAspect="1"/>
           </p:cNvPicPr>
@@ -2719,7 +2737,7 @@
       </p:sp>
       <p:pic>
         <p:nvPicPr>
-          <p:cNvPr id="8" name="Image 1" descr="/Users/danwahlin/.copilot/session-state/56a7a0da-def8-48d4-b5e8-0ac3878cb8dd/files/slides-build/icons/FaGithub-1F2328.png">
+          <p:cNvPr id="8" name="Image 1" descr="Open this chapter on GitHub">
             <a:hlinkClick r:id="rId3" tooltip="https://github.com/github/copilot-app-for-beginners/tree/main/04-skills-custom-agents"/>
           </p:cNvPr>
           <p:cNvPicPr>
@@ -2935,7 +2953,13 @@
       </p:grpSpPr>
       <p:pic>
         <p:nvPicPr>
-          <p:cNvPr id="2" name="Image 0" descr="/Users/danwahlin/.copilot/session-state/56a7a0da-def8-48d4-b5e8-0ac3878cb8dd/files/slides-build/img/grad-corner-pattern.png">    </p:cNvPr>
+          <p:cNvPr id="2" name="Image 0" descr="">
+            <a:extLst>
+              <a:ext uri="{C183D7F6-B498-43B3-948B-1728B52AA6E4}">
+                <adec:decorative xmlns:adec="http://schemas.microsoft.com/office/drawing/2017/decorative" val="1"/>
+              </a:ext>
+            </a:extLst>
+          </p:cNvPr>
           <p:cNvPicPr>
             <a:picLocks noChangeAspect="1"/>
           </p:cNvPicPr>
@@ -3030,7 +3054,7 @@
       </p:sp>
       <p:pic>
         <p:nvPicPr>
-          <p:cNvPr id="5" name="Image 1" descr="/Users/danwahlin/.copilot/session-state/56a7a0da-def8-48d4-b5e8-0ac3878cb8dd/files/slides-build/icons/FaGithub-1F2328.png">
+          <p:cNvPr id="5" name="Image 1" descr="Open this chapter on GitHub">
             <a:hlinkClick r:id="rId3" tooltip="https://github.com/github/copilot-app-for-beginners/tree/main/04-skills-custom-agents"/>
           </p:cNvPr>
           <p:cNvPicPr>
@@ -3228,7 +3252,7 @@
       </p:sp>
       <p:pic>
         <p:nvPicPr>
-          <p:cNvPr id="10" name="Image 2" descr="/Users/danwahlin/.copilot/session-state/56a7a0da-def8-48d4-b5e8-0ac3878cb8dd/files/slides-build/img/04-hiring-specialists-analogy.jpg">    </p:cNvPr>
+          <p:cNvPr id="10" name="Image 2" descr="A plumber, electrician, and roofer illustrate specialist roles, compared with AI agents for code review, testing, security, and documentation">    </p:cNvPr>
           <p:cNvPicPr>
             <a:picLocks noChangeAspect="1"/>
           </p:cNvPicPr>
@@ -3284,7 +3308,13 @@
       </p:sp>
       <p:pic>
         <p:nvPicPr>
-          <p:cNvPr id="12" name="Image 3" descr="/Users/danwahlin/.copilot/session-state/56a7a0da-def8-48d4-b5e8-0ac3878cb8dd/files/slides-build/icons/GoPerson-1A7F37.png">    </p:cNvPr>
+          <p:cNvPr id="12" name="Image 3" descr="">
+            <a:extLst>
+              <a:ext uri="{C183D7F6-B498-43B3-948B-1728B52AA6E4}">
+                <adec:decorative xmlns:adec="http://schemas.microsoft.com/office/drawing/2017/decorative" val="1"/>
+              </a:ext>
+            </a:extLst>
+          </p:cNvPr>
           <p:cNvPicPr>
             <a:picLocks noChangeAspect="1"/>
           </p:cNvPicPr>
@@ -3421,7 +3451,13 @@
       </p:sp>
       <p:pic>
         <p:nvPicPr>
-          <p:cNvPr id="16" name="Image 4" descr="/Users/danwahlin/.copilot/session-state/56a7a0da-def8-48d4-b5e8-0ac3878cb8dd/files/slides-build/icons/GoTools-1A7F37.png">    </p:cNvPr>
+          <p:cNvPr id="16" name="Image 4" descr="">
+            <a:extLst>
+              <a:ext uri="{C183D7F6-B498-43B3-948B-1728B52AA6E4}">
+                <adec:decorative xmlns:adec="http://schemas.microsoft.com/office/drawing/2017/decorative" val="1"/>
+              </a:ext>
+            </a:extLst>
+          </p:cNvPr>
           <p:cNvPicPr>
             <a:picLocks noChangeAspect="1"/>
           </p:cNvPicPr>
@@ -3558,7 +3594,13 @@
       </p:sp>
       <p:pic>
         <p:nvPicPr>
-          <p:cNvPr id="20" name="Image 5" descr="/Users/danwahlin/.copilot/session-state/56a7a0da-def8-48d4-b5e8-0ac3878cb8dd/files/slides-build/icons/GoBook-1A7F37.png">    </p:cNvPr>
+          <p:cNvPr id="20" name="Image 5" descr="">
+            <a:extLst>
+              <a:ext uri="{C183D7F6-B498-43B3-948B-1728B52AA6E4}">
+                <adec:decorative xmlns:adec="http://schemas.microsoft.com/office/drawing/2017/decorative" val="1"/>
+              </a:ext>
+            </a:extLst>
+          </p:cNvPr>
           <p:cNvPicPr>
             <a:picLocks noChangeAspect="1"/>
           </p:cNvPicPr>
@@ -3695,7 +3737,13 @@
       </p:grpSpPr>
       <p:pic>
         <p:nvPicPr>
-          <p:cNvPr id="2" name="Image 0" descr="/Users/danwahlin/.copilot/session-state/56a7a0da-def8-48d4-b5e8-0ac3878cb8dd/files/slides-build/img/grad-corner-pattern.png">    </p:cNvPr>
+          <p:cNvPr id="2" name="Image 0" descr="">
+            <a:extLst>
+              <a:ext uri="{C183D7F6-B498-43B3-948B-1728B52AA6E4}">
+                <adec:decorative xmlns:adec="http://schemas.microsoft.com/office/drawing/2017/decorative" val="1"/>
+              </a:ext>
+            </a:extLst>
+          </p:cNvPr>
           <p:cNvPicPr>
             <a:picLocks noChangeAspect="1"/>
           </p:cNvPicPr>
@@ -3790,7 +3838,7 @@
       </p:sp>
       <p:pic>
         <p:nvPicPr>
-          <p:cNvPr id="5" name="Image 1" descr="/Users/danwahlin/.copilot/session-state/56a7a0da-def8-48d4-b5e8-0ac3878cb8dd/files/slides-build/icons/FaGithub-1F2328.png">
+          <p:cNvPr id="5" name="Image 1" descr="Open this chapter on GitHub">
             <a:hlinkClick r:id="rId3" tooltip="https://github.com/github/copilot-app-for-beginners/tree/main/04-skills-custom-agents"/>
           </p:cNvPr>
           <p:cNvPicPr>
@@ -4712,7 +4760,13 @@
       </p:sp>
       <p:pic>
         <p:nvPicPr>
-          <p:cNvPr id="27" name="Image 2" descr="/Users/danwahlin/.copilot/session-state/56a7a0da-def8-48d4-b5e8-0ac3878cb8dd/files/slides-build/icons/GoTag-1A7F37.png">    </p:cNvPr>
+          <p:cNvPr id="27" name="Image 2" descr="">
+            <a:extLst>
+              <a:ext uri="{C183D7F6-B498-43B3-948B-1728B52AA6E4}">
+                <adec:decorative xmlns:adec="http://schemas.microsoft.com/office/drawing/2017/decorative" val="1"/>
+              </a:ext>
+            </a:extLst>
+          </p:cNvPr>
           <p:cNvPicPr>
             <a:picLocks noChangeAspect="1"/>
           </p:cNvPicPr>
@@ -4877,7 +4931,13 @@
       </p:sp>
       <p:pic>
         <p:nvPicPr>
-          <p:cNvPr id="31" name="Image 3" descr="/Users/danwahlin/.copilot/session-state/56a7a0da-def8-48d4-b5e8-0ac3878cb8dd/files/slides-build/icons/GoLock-1A7F37.png">    </p:cNvPr>
+          <p:cNvPr id="31" name="Image 3" descr="">
+            <a:extLst>
+              <a:ext uri="{C183D7F6-B498-43B3-948B-1728B52AA6E4}">
+                <adec:decorative xmlns:adec="http://schemas.microsoft.com/office/drawing/2017/decorative" val="1"/>
+              </a:ext>
+            </a:extLst>
+          </p:cNvPr>
           <p:cNvPicPr>
             <a:picLocks noChangeAspect="1"/>
           </p:cNvPicPr>
@@ -5065,7 +5125,13 @@
       </p:sp>
       <p:pic>
         <p:nvPicPr>
-          <p:cNvPr id="35" name="Image 4" descr="/Users/danwahlin/.copilot/session-state/56a7a0da-def8-48d4-b5e8-0ac3878cb8dd/files/slides-build/icons/GoNote-1A7F37.png">    </p:cNvPr>
+          <p:cNvPr id="35" name="Image 4" descr="">
+            <a:extLst>
+              <a:ext uri="{C183D7F6-B498-43B3-948B-1728B52AA6E4}">
+                <adec:decorative xmlns:adec="http://schemas.microsoft.com/office/drawing/2017/decorative" val="1"/>
+              </a:ext>
+            </a:extLst>
+          </p:cNvPr>
           <p:cNvPicPr>
             <a:picLocks noChangeAspect="1"/>
           </p:cNvPicPr>
@@ -5202,7 +5268,13 @@
       </p:grpSpPr>
       <p:pic>
         <p:nvPicPr>
-          <p:cNvPr id="2" name="Image 0" descr="/Users/danwahlin/.copilot/session-state/56a7a0da-def8-48d4-b5e8-0ac3878cb8dd/files/slides-build/img/grad-corner-pattern.png">    </p:cNvPr>
+          <p:cNvPr id="2" name="Image 0" descr="">
+            <a:extLst>
+              <a:ext uri="{C183D7F6-B498-43B3-948B-1728B52AA6E4}">
+                <adec:decorative xmlns:adec="http://schemas.microsoft.com/office/drawing/2017/decorative" val="1"/>
+              </a:ext>
+            </a:extLst>
+          </p:cNvPr>
           <p:cNvPicPr>
             <a:picLocks noChangeAspect="1"/>
           </p:cNvPicPr>
@@ -5297,7 +5369,7 @@
       </p:sp>
       <p:pic>
         <p:nvPicPr>
-          <p:cNvPr id="5" name="Image 1" descr="/Users/danwahlin/.copilot/session-state/56a7a0da-def8-48d4-b5e8-0ac3878cb8dd/files/slides-build/icons/FaGithub-1F2328.png">
+          <p:cNvPr id="5" name="Image 1" descr="Open this chapter on GitHub">
             <a:hlinkClick r:id="rId3" tooltip="https://github.com/github/copilot-app-for-beginners/tree/main/04-skills-custom-agents"/>
           </p:cNvPr>
           <p:cNvPicPr>
@@ -5495,7 +5567,7 @@
       </p:sp>
       <p:pic>
         <p:nvPicPr>
-          <p:cNvPr id="10" name="Image 2" descr="/Users/danwahlin/.copilot/session-state/56a7a0da-def8-48d4-b5e8-0ac3878cb8dd/files/slides-build/img/04-agent-picker-crop.png">    </p:cNvPr>
+          <p:cNvPr id="10" name="Image 2" descr="The /agent suggestions with book-app-explainer highlighted and its read-only description visible">    </p:cNvPr>
           <p:cNvPicPr>
             <a:picLocks noChangeAspect="1"/>
           </p:cNvPicPr>
@@ -6158,7 +6230,13 @@
       </p:grpSpPr>
       <p:pic>
         <p:nvPicPr>
-          <p:cNvPr id="2" name="Image 0" descr="/Users/danwahlin/.copilot/session-state/56a7a0da-def8-48d4-b5e8-0ac3878cb8dd/files/slides-build/img/grad-corner-pattern.png">    </p:cNvPr>
+          <p:cNvPr id="2" name="Image 0" descr="">
+            <a:extLst>
+              <a:ext uri="{C183D7F6-B498-43B3-948B-1728B52AA6E4}">
+                <adec:decorative xmlns:adec="http://schemas.microsoft.com/office/drawing/2017/decorative" val="1"/>
+              </a:ext>
+            </a:extLst>
+          </p:cNvPr>
           <p:cNvPicPr>
             <a:picLocks noChangeAspect="1"/>
           </p:cNvPicPr>
@@ -6253,7 +6331,7 @@
       </p:sp>
       <p:pic>
         <p:nvPicPr>
-          <p:cNvPr id="5" name="Image 1" descr="/Users/danwahlin/.copilot/session-state/56a7a0da-def8-48d4-b5e8-0ac3878cb8dd/files/slides-build/icons/FaGithub-1F2328.png">
+          <p:cNvPr id="5" name="Image 1" descr="Open this chapter on GitHub">
             <a:hlinkClick r:id="rId3" tooltip="https://github.com/github/copilot-app-for-beginners/tree/main/04-skills-custom-agents"/>
           </p:cNvPr>
           <p:cNvPicPr>
@@ -6431,7 +6509,13 @@
       </p:sp>
       <p:pic>
         <p:nvPicPr>
-          <p:cNvPr id="10" name="Image 2" descr="/Users/danwahlin/.copilot/session-state/56a7a0da-def8-48d4-b5e8-0ac3878cb8dd/files/slides-build/icons/GoLock-1A7F37.png">    </p:cNvPr>
+          <p:cNvPr id="10" name="Image 2" descr="">
+            <a:extLst>
+              <a:ext uri="{C183D7F6-B498-43B3-948B-1728B52AA6E4}">
+                <adec:decorative xmlns:adec="http://schemas.microsoft.com/office/drawing/2017/decorative" val="1"/>
+              </a:ext>
+            </a:extLst>
+          </p:cNvPr>
           <p:cNvPicPr>
             <a:picLocks noChangeAspect="1"/>
           </p:cNvPicPr>
@@ -6675,7 +6759,13 @@
       </p:sp>
       <p:pic>
         <p:nvPicPr>
-          <p:cNvPr id="15" name="Image 3" descr="/Users/danwahlin/.copilot/session-state/56a7a0da-def8-48d4-b5e8-0ac3878cb8dd/files/slides-build/icons/GoUnlock-CF222E.png">    </p:cNvPr>
+          <p:cNvPr id="15" name="Image 3" descr="">
+            <a:extLst>
+              <a:ext uri="{C183D7F6-B498-43B3-948B-1728B52AA6E4}">
+                <adec:decorative xmlns:adec="http://schemas.microsoft.com/office/drawing/2017/decorative" val="1"/>
+              </a:ext>
+            </a:extLst>
+          </p:cNvPr>
           <p:cNvPicPr>
             <a:picLocks noChangeAspect="1"/>
           </p:cNvPicPr>
@@ -6851,7 +6941,13 @@
       </p:sp>
       <p:pic>
         <p:nvPicPr>
-          <p:cNvPr id="20" name="Image 4" descr="/Users/danwahlin/.copilot/session-state/56a7a0da-def8-48d4-b5e8-0ac3878cb8dd/files/slides-build/icons/GoPerson-0969DA.png">    </p:cNvPr>
+          <p:cNvPr id="20" name="Image 4" descr="">
+            <a:extLst>
+              <a:ext uri="{C183D7F6-B498-43B3-948B-1728B52AA6E4}">
+                <adec:decorative xmlns:adec="http://schemas.microsoft.com/office/drawing/2017/decorative" val="1"/>
+              </a:ext>
+            </a:extLst>
+          </p:cNvPr>
           <p:cNvPicPr>
             <a:picLocks noChangeAspect="1"/>
           </p:cNvPicPr>
@@ -6991,7 +7087,13 @@
       </p:grpSpPr>
       <p:pic>
         <p:nvPicPr>
-          <p:cNvPr id="2" name="Image 0" descr="/Users/danwahlin/.copilot/session-state/56a7a0da-def8-48d4-b5e8-0ac3878cb8dd/files/slides-build/img/grad-corner-pattern.png">    </p:cNvPr>
+          <p:cNvPr id="2" name="Image 0" descr="">
+            <a:extLst>
+              <a:ext uri="{C183D7F6-B498-43B3-948B-1728B52AA6E4}">
+                <adec:decorative xmlns:adec="http://schemas.microsoft.com/office/drawing/2017/decorative" val="1"/>
+              </a:ext>
+            </a:extLst>
+          </p:cNvPr>
           <p:cNvPicPr>
             <a:picLocks noChangeAspect="1"/>
           </p:cNvPicPr>
@@ -7086,7 +7188,7 @@
       </p:sp>
       <p:pic>
         <p:nvPicPr>
-          <p:cNvPr id="5" name="Image 1" descr="/Users/danwahlin/.copilot/session-state/56a7a0da-def8-48d4-b5e8-0ac3878cb8dd/files/slides-build/icons/FaGithub-1F2328.png">
+          <p:cNvPr id="5" name="Image 1" descr="Open this chapter on GitHub">
             <a:hlinkClick r:id="rId3" tooltip="https://github.com/github/copilot-app-for-beginners/tree/main/04-skills-custom-agents"/>
           </p:cNvPr>
           <p:cNvPicPr>
@@ -8068,7 +8170,13 @@
       </p:sp>
       <p:pic>
         <p:nvPicPr>
-          <p:cNvPr id="31" name="Image 2" descr="/Users/danwahlin/.copilot/session-state/56a7a0da-def8-48d4-b5e8-0ac3878cb8dd/files/slides-build/icons/GoGoal-BC4C00.png">    </p:cNvPr>
+          <p:cNvPr id="31" name="Image 2" descr="">
+            <a:extLst>
+              <a:ext uri="{C183D7F6-B498-43B3-948B-1728B52AA6E4}">
+                <adec:decorative xmlns:adec="http://schemas.microsoft.com/office/drawing/2017/decorative" val="1"/>
+              </a:ext>
+            </a:extLst>
+          </p:cNvPr>
           <p:cNvPicPr>
             <a:picLocks noChangeAspect="1"/>
           </p:cNvPicPr>
@@ -8208,7 +8316,13 @@
       </p:grpSpPr>
       <p:pic>
         <p:nvPicPr>
-          <p:cNvPr id="2" name="Image 0" descr="/Users/danwahlin/.copilot/session-state/56a7a0da-def8-48d4-b5e8-0ac3878cb8dd/files/slides-build/img/grad-corner-pattern.png">    </p:cNvPr>
+          <p:cNvPr id="2" name="Image 0" descr="">
+            <a:extLst>
+              <a:ext uri="{C183D7F6-B498-43B3-948B-1728B52AA6E4}">
+                <adec:decorative xmlns:adec="http://schemas.microsoft.com/office/drawing/2017/decorative" val="1"/>
+              </a:ext>
+            </a:extLst>
+          </p:cNvPr>
           <p:cNvPicPr>
             <a:picLocks noChangeAspect="1"/>
           </p:cNvPicPr>
@@ -8303,7 +8417,7 @@
       </p:sp>
       <p:pic>
         <p:nvPicPr>
-          <p:cNvPr id="5" name="Image 1" descr="/Users/danwahlin/.copilot/session-state/56a7a0da-def8-48d4-b5e8-0ac3878cb8dd/files/slides-build/icons/FaGithub-1F2328.png">
+          <p:cNvPr id="5" name="Image 1" descr="Open this chapter on GitHub">
             <a:hlinkClick r:id="rId3" tooltip="https://github.com/github/copilot-app-for-beginners/tree/main/04-skills-custom-agents"/>
           </p:cNvPr>
           <p:cNvPicPr>
@@ -9111,7 +9225,13 @@
       </p:sp>
       <p:pic>
         <p:nvPicPr>
-          <p:cNvPr id="26" name="Image 2" descr="/Users/danwahlin/.copilot/session-state/56a7a0da-def8-48d4-b5e8-0ac3878cb8dd/files/slides-build/icons/FaGithub-0969DA.png">    </p:cNvPr>
+          <p:cNvPr id="26" name="Image 2" descr="">
+            <a:extLst>
+              <a:ext uri="{C183D7F6-B498-43B3-948B-1728B52AA6E4}">
+                <adec:decorative xmlns:adec="http://schemas.microsoft.com/office/drawing/2017/decorative" val="1"/>
+              </a:ext>
+            </a:extLst>
+          </p:cNvPr>
           <p:cNvPicPr>
             <a:picLocks noChangeAspect="1"/>
           </p:cNvPicPr>
@@ -9337,7 +9457,13 @@
       </p:grpSpPr>
       <p:pic>
         <p:nvPicPr>
-          <p:cNvPr id="2" name="Image 0" descr="/Users/danwahlin/.copilot/session-state/56a7a0da-def8-48d4-b5e8-0ac3878cb8dd/files/slides-build/img/grad-corner-pattern.png">    </p:cNvPr>
+          <p:cNvPr id="2" name="Image 0" descr="">
+            <a:extLst>
+              <a:ext uri="{C183D7F6-B498-43B3-948B-1728B52AA6E4}">
+                <adec:decorative xmlns:adec="http://schemas.microsoft.com/office/drawing/2017/decorative" val="1"/>
+              </a:ext>
+            </a:extLst>
+          </p:cNvPr>
           <p:cNvPicPr>
             <a:picLocks noChangeAspect="1"/>
           </p:cNvPicPr>
@@ -9432,7 +9558,7 @@
       </p:sp>
       <p:pic>
         <p:nvPicPr>
-          <p:cNvPr id="5" name="Image 1" descr="/Users/danwahlin/.copilot/session-state/56a7a0da-def8-48d4-b5e8-0ac3878cb8dd/files/slides-build/icons/FaGithub-1F2328.png">
+          <p:cNvPr id="5" name="Image 1" descr="Open this chapter on GitHub">
             <a:hlinkClick r:id="rId3" tooltip="https://github.com/github/copilot-app-for-beginners/tree/main/04-skills-custom-agents"/>
           </p:cNvPr>
           <p:cNvPicPr>
@@ -10062,7 +10188,13 @@
       </p:grpSpPr>
       <p:pic>
         <p:nvPicPr>
-          <p:cNvPr id="2" name="Image 0" descr="/Users/danwahlin/.copilot/session-state/56a7a0da-def8-48d4-b5e8-0ac3878cb8dd/files/slides-build/img/grad-corner-pattern.png">    </p:cNvPr>
+          <p:cNvPr id="2" name="Image 0" descr="">
+            <a:extLst>
+              <a:ext uri="{C183D7F6-B498-43B3-948B-1728B52AA6E4}">
+                <adec:decorative xmlns:adec="http://schemas.microsoft.com/office/drawing/2017/decorative" val="1"/>
+              </a:ext>
+            </a:extLst>
+          </p:cNvPr>
           <p:cNvPicPr>
             <a:picLocks noChangeAspect="1"/>
           </p:cNvPicPr>
@@ -10157,7 +10289,7 @@
       </p:sp>
       <p:pic>
         <p:nvPicPr>
-          <p:cNvPr id="5" name="Image 1" descr="/Users/danwahlin/.copilot/session-state/56a7a0da-def8-48d4-b5e8-0ac3878cb8dd/files/slides-build/icons/FaGithub-1F2328.png">
+          <p:cNvPr id="5" name="Image 1" descr="Open this chapter on GitHub">
             <a:hlinkClick r:id="rId3" tooltip="https://github.com/github/copilot-app-for-beginners/tree/main/04-skills-custom-agents"/>
           </p:cNvPr>
           <p:cNvPicPr>
@@ -11251,7 +11383,13 @@
       </p:sp>
       <p:pic>
         <p:nvPicPr>
-          <p:cNvPr id="5" name="Image 0" descr="/Users/danwahlin/.copilot/session-state/56a7a0da-def8-48d4-b5e8-0ac3878cb8dd/files/slides-build/img/grad-corner-pattern.png">    </p:cNvPr>
+          <p:cNvPr id="5" name="Image 0" descr="">
+            <a:extLst>
+              <a:ext uri="{C183D7F6-B498-43B3-948B-1728B52AA6E4}">
+                <adec:decorative xmlns:adec="http://schemas.microsoft.com/office/drawing/2017/decorative" val="1"/>
+              </a:ext>
+            </a:extLst>
+          </p:cNvPr>
           <p:cNvPicPr>
             <a:picLocks noChangeAspect="1"/>
           </p:cNvPicPr>
@@ -11346,7 +11484,7 @@
       </p:sp>
       <p:pic>
         <p:nvPicPr>
-          <p:cNvPr id="8" name="Image 1" descr="/Users/danwahlin/.copilot/session-state/56a7a0da-def8-48d4-b5e8-0ac3878cb8dd/files/slides-build/icons/FaGithub-1F2328.png">
+          <p:cNvPr id="8" name="Image 1" descr="Open this chapter on GitHub">
             <a:hlinkClick r:id="rId3" tooltip="https://github.com/github/copilot-app-for-beginners/tree/main/04-skills-custom-agents"/>
           </p:cNvPr>
           <p:cNvPicPr>
@@ -11562,7 +11700,13 @@
       </p:grpSpPr>
       <p:pic>
         <p:nvPicPr>
-          <p:cNvPr id="2" name="Image 0" descr="/Users/danwahlin/.copilot/session-state/56a7a0da-def8-48d4-b5e8-0ac3878cb8dd/files/slides-build/img/grad-corner-pattern.png">    </p:cNvPr>
+          <p:cNvPr id="2" name="Image 0" descr="">
+            <a:extLst>
+              <a:ext uri="{C183D7F6-B498-43B3-948B-1728B52AA6E4}">
+                <adec:decorative xmlns:adec="http://schemas.microsoft.com/office/drawing/2017/decorative" val="1"/>
+              </a:ext>
+            </a:extLst>
+          </p:cNvPr>
           <p:cNvPicPr>
             <a:picLocks noChangeAspect="1"/>
           </p:cNvPicPr>
@@ -11657,7 +11801,7 @@
       </p:sp>
       <p:pic>
         <p:nvPicPr>
-          <p:cNvPr id="5" name="Image 1" descr="/Users/danwahlin/.copilot/session-state/56a7a0da-def8-48d4-b5e8-0ac3878cb8dd/files/slides-build/icons/FaGithub-1F2328.png">
+          <p:cNvPr id="5" name="Image 1" descr="Open this chapter on GitHub">
             <a:hlinkClick r:id="rId3" tooltip="https://github.com/github/copilot-app-for-beginners/tree/main/04-skills-custom-agents"/>
           </p:cNvPr>
           <p:cNvPicPr>
@@ -11855,7 +11999,7 @@
       </p:sp>
       <p:pic>
         <p:nvPicPr>
-          <p:cNvPr id="10" name="Image 2" descr="/Users/danwahlin/.copilot/session-state/56a7a0da-def8-48d4-b5e8-0ac3878cb8dd/files/slides-build/img/04-song-chart-skills.jpg">    </p:cNvPr>
+          <p:cNvPr id="10" name="Image 2" descr="Song chart analogy for skills in the Copilot app">    </p:cNvPr>
           <p:cNvPicPr>
             <a:picLocks noChangeAspect="1"/>
           </p:cNvPicPr>
@@ -11911,7 +12055,13 @@
       </p:sp>
       <p:pic>
         <p:nvPicPr>
-          <p:cNvPr id="12" name="Image 3" descr="/Users/danwahlin/.copilot/session-state/56a7a0da-def8-48d4-b5e8-0ac3878cb8dd/files/slides-build/icons/GoChecklist-8250DF.png">    </p:cNvPr>
+          <p:cNvPr id="12" name="Image 3" descr="">
+            <a:extLst>
+              <a:ext uri="{C183D7F6-B498-43B3-948B-1728B52AA6E4}">
+                <adec:decorative xmlns:adec="http://schemas.microsoft.com/office/drawing/2017/decorative" val="1"/>
+              </a:ext>
+            </a:extLst>
+          </p:cNvPr>
           <p:cNvPicPr>
             <a:picLocks noChangeAspect="1"/>
           </p:cNvPicPr>
@@ -12048,7 +12198,13 @@
       </p:sp>
       <p:pic>
         <p:nvPicPr>
-          <p:cNvPr id="16" name="Image 4" descr="/Users/danwahlin/.copilot/session-state/56a7a0da-def8-48d4-b5e8-0ac3878cb8dd/files/slides-build/icons/GoPerson-1A7F37.png">    </p:cNvPr>
+          <p:cNvPr id="16" name="Image 4" descr="">
+            <a:extLst>
+              <a:ext uri="{C183D7F6-B498-43B3-948B-1728B52AA6E4}">
+                <adec:decorative xmlns:adec="http://schemas.microsoft.com/office/drawing/2017/decorative" val="1"/>
+              </a:ext>
+            </a:extLst>
+          </p:cNvPr>
           <p:cNvPicPr>
             <a:picLocks noChangeAspect="1"/>
           </p:cNvPicPr>
@@ -12185,7 +12341,13 @@
       </p:sp>
       <p:pic>
         <p:nvPicPr>
-          <p:cNvPr id="20" name="Image 5" descr="/Users/danwahlin/.copilot/session-state/56a7a0da-def8-48d4-b5e8-0ac3878cb8dd/files/slides-build/icons/GoEye-0969DA.png">    </p:cNvPr>
+          <p:cNvPr id="20" name="Image 5" descr="">
+            <a:extLst>
+              <a:ext uri="{C183D7F6-B498-43B3-948B-1728B52AA6E4}">
+                <adec:decorative xmlns:adec="http://schemas.microsoft.com/office/drawing/2017/decorative" val="1"/>
+              </a:ext>
+            </a:extLst>
+          </p:cNvPr>
           <p:cNvPicPr>
             <a:picLocks noChangeAspect="1"/>
           </p:cNvPicPr>
@@ -12322,7 +12484,13 @@
       </p:grpSpPr>
       <p:pic>
         <p:nvPicPr>
-          <p:cNvPr id="2" name="Image 0" descr="/Users/danwahlin/.copilot/session-state/56a7a0da-def8-48d4-b5e8-0ac3878cb8dd/files/slides-build/img/grad-corner-pattern.png">    </p:cNvPr>
+          <p:cNvPr id="2" name="Image 0" descr="">
+            <a:extLst>
+              <a:ext uri="{C183D7F6-B498-43B3-948B-1728B52AA6E4}">
+                <adec:decorative xmlns:adec="http://schemas.microsoft.com/office/drawing/2017/decorative" val="1"/>
+              </a:ext>
+            </a:extLst>
+          </p:cNvPr>
           <p:cNvPicPr>
             <a:picLocks noChangeAspect="1"/>
           </p:cNvPicPr>
@@ -12417,7 +12585,7 @@
       </p:sp>
       <p:pic>
         <p:nvPicPr>
-          <p:cNvPr id="5" name="Image 1" descr="/Users/danwahlin/.copilot/session-state/56a7a0da-def8-48d4-b5e8-0ac3878cb8dd/files/slides-build/icons/FaGithub-1F2328.png">
+          <p:cNvPr id="5" name="Image 1" descr="Open this chapter on GitHub">
             <a:hlinkClick r:id="rId3" tooltip="https://github.com/github/copilot-app-for-beginners/tree/main/04-skills-custom-agents"/>
           </p:cNvPr>
           <p:cNvPicPr>
@@ -12570,7 +12738,7 @@
       </p:sp>
       <p:pic>
         <p:nvPicPr>
-          <p:cNvPr id="9" name="Image 2" descr="/Users/danwahlin/.copilot/session-state/56a7a0da-def8-48d4-b5e8-0ac3878cb8dd/files/slides-build/img/04-skill-vs-one-off-prompt.jpg">    </p:cNvPr>
+          <p:cNvPr id="9" name="Image 2" descr="One-off prompt versus skill: a skill is a reusable checklist that lives in the repo and gives the same guidance each time">    </p:cNvPr>
           <p:cNvPicPr>
             <a:picLocks noChangeAspect="1"/>
           </p:cNvPicPr>
@@ -12626,7 +12794,13 @@
       </p:sp>
       <p:pic>
         <p:nvPicPr>
-          <p:cNvPr id="11" name="Image 3" descr="/Users/danwahlin/.copilot/session-state/56a7a0da-def8-48d4-b5e8-0ac3878cb8dd/files/slides-build/icons/GoCommentDiscussion-59636E.png">    </p:cNvPr>
+          <p:cNvPr id="11" name="Image 3" descr="">
+            <a:extLst>
+              <a:ext uri="{C183D7F6-B498-43B3-948B-1728B52AA6E4}">
+                <adec:decorative xmlns:adec="http://schemas.microsoft.com/office/drawing/2017/decorative" val="1"/>
+              </a:ext>
+            </a:extLst>
+          </p:cNvPr>
           <p:cNvPicPr>
             <a:picLocks noChangeAspect="1"/>
           </p:cNvPicPr>
@@ -12763,7 +12937,13 @@
       </p:sp>
       <p:pic>
         <p:nvPicPr>
-          <p:cNvPr id="15" name="Image 4" descr="/Users/danwahlin/.copilot/session-state/56a7a0da-def8-48d4-b5e8-0ac3878cb8dd/files/slides-build/icons/GoChecklist-8250DF.png">    </p:cNvPr>
+          <p:cNvPr id="15" name="Image 4" descr="">
+            <a:extLst>
+              <a:ext uri="{C183D7F6-B498-43B3-948B-1728B52AA6E4}">
+                <adec:decorative xmlns:adec="http://schemas.microsoft.com/office/drawing/2017/decorative" val="1"/>
+              </a:ext>
+            </a:extLst>
+          </p:cNvPr>
           <p:cNvPicPr>
             <a:picLocks noChangeAspect="1"/>
           </p:cNvPicPr>
@@ -12900,7 +13080,13 @@
       </p:sp>
       <p:pic>
         <p:nvPicPr>
-          <p:cNvPr id="19" name="Image 5" descr="/Users/danwahlin/.copilot/session-state/56a7a0da-def8-48d4-b5e8-0ac3878cb8dd/files/slides-build/icons/GoPeople-8250DF.png">    </p:cNvPr>
+          <p:cNvPr id="19" name="Image 5" descr="">
+            <a:extLst>
+              <a:ext uri="{C183D7F6-B498-43B3-948B-1728B52AA6E4}">
+                <adec:decorative xmlns:adec="http://schemas.microsoft.com/office/drawing/2017/decorative" val="1"/>
+              </a:ext>
+            </a:extLst>
+          </p:cNvPr>
           <p:cNvPicPr>
             <a:picLocks noChangeAspect="1"/>
           </p:cNvPicPr>
@@ -13037,7 +13223,13 @@
       </p:grpSpPr>
       <p:pic>
         <p:nvPicPr>
-          <p:cNvPr id="2" name="Image 0" descr="/Users/danwahlin/.copilot/session-state/56a7a0da-def8-48d4-b5e8-0ac3878cb8dd/files/slides-build/img/grad-corner-pattern.png">    </p:cNvPr>
+          <p:cNvPr id="2" name="Image 0" descr="">
+            <a:extLst>
+              <a:ext uri="{C183D7F6-B498-43B3-948B-1728B52AA6E4}">
+                <adec:decorative xmlns:adec="http://schemas.microsoft.com/office/drawing/2017/decorative" val="1"/>
+              </a:ext>
+            </a:extLst>
+          </p:cNvPr>
           <p:cNvPicPr>
             <a:picLocks noChangeAspect="1"/>
           </p:cNvPicPr>
@@ -13132,7 +13324,7 @@
       </p:sp>
       <p:pic>
         <p:nvPicPr>
-          <p:cNvPr id="5" name="Image 1" descr="/Users/danwahlin/.copilot/session-state/56a7a0da-def8-48d4-b5e8-0ac3878cb8dd/files/slides-build/icons/FaGithub-1F2328.png">
+          <p:cNvPr id="5" name="Image 1" descr="Open this chapter on GitHub">
             <a:hlinkClick r:id="rId3" tooltip="https://github.com/github/copilot-app-for-beginners/tree/main/04-skills-custom-agents"/>
           </p:cNvPr>
           <p:cNvPicPr>
@@ -14079,7 +14271,13 @@
       </p:sp>
       <p:pic>
         <p:nvPicPr>
-          <p:cNvPr id="28" name="Image 2" descr="/Users/danwahlin/.copilot/session-state/56a7a0da-def8-48d4-b5e8-0ac3878cb8dd/files/slides-build/icons/GoTag-8250DF.png">    </p:cNvPr>
+          <p:cNvPr id="28" name="Image 2" descr="">
+            <a:extLst>
+              <a:ext uri="{C183D7F6-B498-43B3-948B-1728B52AA6E4}">
+                <adec:decorative xmlns:adec="http://schemas.microsoft.com/office/drawing/2017/decorative" val="1"/>
+              </a:ext>
+            </a:extLst>
+          </p:cNvPr>
           <p:cNvPicPr>
             <a:picLocks noChangeAspect="1"/>
           </p:cNvPicPr>
@@ -14250,7 +14448,13 @@
       </p:sp>
       <p:pic>
         <p:nvPicPr>
-          <p:cNvPr id="32" name="Image 3" descr="/Users/danwahlin/.copilot/session-state/56a7a0da-def8-48d4-b5e8-0ac3878cb8dd/files/slides-build/icons/GoNote-8250DF.png">    </p:cNvPr>
+          <p:cNvPr id="32" name="Image 3" descr="">
+            <a:extLst>
+              <a:ext uri="{C183D7F6-B498-43B3-948B-1728B52AA6E4}">
+                <adec:decorative xmlns:adec="http://schemas.microsoft.com/office/drawing/2017/decorative" val="1"/>
+              </a:ext>
+            </a:extLst>
+          </p:cNvPr>
           <p:cNvPicPr>
             <a:picLocks noChangeAspect="1"/>
           </p:cNvPicPr>
@@ -14391,7 +14595,13 @@
       </p:sp>
       <p:pic>
         <p:nvPicPr>
-          <p:cNvPr id="36" name="Image 4" descr="/Users/danwahlin/.copilot/session-state/56a7a0da-def8-48d4-b5e8-0ac3878cb8dd/files/slides-build/icons/GoAlert-CF222E.png">    </p:cNvPr>
+          <p:cNvPr id="36" name="Image 4" descr="">
+            <a:extLst>
+              <a:ext uri="{C183D7F6-B498-43B3-948B-1728B52AA6E4}">
+                <adec:decorative xmlns:adec="http://schemas.microsoft.com/office/drawing/2017/decorative" val="1"/>
+              </a:ext>
+            </a:extLst>
+          </p:cNvPr>
           <p:cNvPicPr>
             <a:picLocks noChangeAspect="1"/>
           </p:cNvPicPr>
@@ -14523,7 +14733,13 @@
       </p:grpSpPr>
       <p:pic>
         <p:nvPicPr>
-          <p:cNvPr id="2" name="Image 0" descr="/Users/danwahlin/.copilot/session-state/56a7a0da-def8-48d4-b5e8-0ac3878cb8dd/files/slides-build/img/grad-corner-pattern.png">    </p:cNvPr>
+          <p:cNvPr id="2" name="Image 0" descr="">
+            <a:extLst>
+              <a:ext uri="{C183D7F6-B498-43B3-948B-1728B52AA6E4}">
+                <adec:decorative xmlns:adec="http://schemas.microsoft.com/office/drawing/2017/decorative" val="1"/>
+              </a:ext>
+            </a:extLst>
+          </p:cNvPr>
           <p:cNvPicPr>
             <a:picLocks noChangeAspect="1"/>
           </p:cNvPicPr>
@@ -14618,7 +14834,7 @@
       </p:sp>
       <p:pic>
         <p:nvPicPr>
-          <p:cNvPr id="5" name="Image 1" descr="/Users/danwahlin/.copilot/session-state/56a7a0da-def8-48d4-b5e8-0ac3878cb8dd/files/slides-build/icons/FaGithub-1F2328.png">
+          <p:cNvPr id="5" name="Image 1" descr="Open this chapter on GitHub">
             <a:hlinkClick r:id="rId3" tooltip="https://github.com/github/copilot-app-for-beginners/tree/main/04-skills-custom-agents"/>
           </p:cNvPr>
           <p:cNvPicPr>
@@ -14771,7 +14987,7 @@
       </p:sp>
       <p:pic>
         <p:nvPicPr>
-          <p:cNvPr id="9" name="Image 2" descr="/Users/danwahlin/.copilot/session-state/56a7a0da-def8-48d4-b5e8-0ac3878cb8dd/files/slides-build/img/04-customize-skills-crop.png">    </p:cNvPr>
+          <p:cNvPr id="9" name="Image 2" descr="Customize Skills page with the book-app-reviewer skill listed under Project">    </p:cNvPr>
           <p:cNvPicPr>
             <a:picLocks noChangeAspect="1"/>
           </p:cNvPicPr>
@@ -15705,7 +15921,13 @@
       </p:grpSpPr>
       <p:pic>
         <p:nvPicPr>
-          <p:cNvPr id="2" name="Image 0" descr="/Users/danwahlin/.copilot/session-state/56a7a0da-def8-48d4-b5e8-0ac3878cb8dd/files/slides-build/img/grad-corner-pattern.png">    </p:cNvPr>
+          <p:cNvPr id="2" name="Image 0" descr="">
+            <a:extLst>
+              <a:ext uri="{C183D7F6-B498-43B3-948B-1728B52AA6E4}">
+                <adec:decorative xmlns:adec="http://schemas.microsoft.com/office/drawing/2017/decorative" val="1"/>
+              </a:ext>
+            </a:extLst>
+          </p:cNvPr>
           <p:cNvPicPr>
             <a:picLocks noChangeAspect="1"/>
           </p:cNvPicPr>
@@ -15800,7 +16022,7 @@
       </p:sp>
       <p:pic>
         <p:nvPicPr>
-          <p:cNvPr id="5" name="Image 1" descr="/Users/danwahlin/.copilot/session-state/56a7a0da-def8-48d4-b5e8-0ac3878cb8dd/files/slides-build/icons/FaGithub-1F2328.png">
+          <p:cNvPr id="5" name="Image 1" descr="Open this chapter on GitHub">
             <a:hlinkClick r:id="rId3" tooltip="https://github.com/github/copilot-app-for-beginners/tree/main/04-skills-custom-agents"/>
           </p:cNvPr>
           <p:cNvPicPr>
@@ -16023,7 +16245,13 @@
       </p:sp>
       <p:pic>
         <p:nvPicPr>
-          <p:cNvPr id="11" name="Image 2" descr="/Users/danwahlin/.copilot/session-state/56a7a0da-def8-48d4-b5e8-0ac3878cb8dd/files/slides-build/icons/GoListOrdered-8250DF.png">    </p:cNvPr>
+          <p:cNvPr id="11" name="Image 2" descr="">
+            <a:extLst>
+              <a:ext uri="{C183D7F6-B498-43B3-948B-1728B52AA6E4}">
+                <adec:decorative xmlns:adec="http://schemas.microsoft.com/office/drawing/2017/decorative" val="1"/>
+              </a:ext>
+            </a:extLst>
+          </p:cNvPr>
           <p:cNvPicPr>
             <a:picLocks noChangeAspect="1"/>
           </p:cNvPicPr>
@@ -16593,7 +16821,13 @@
       </p:sp>
       <p:pic>
         <p:nvPicPr>
-          <p:cNvPr id="26" name="Image 3" descr="/Users/danwahlin/.copilot/session-state/56a7a0da-def8-48d4-b5e8-0ac3878cb8dd/files/slides-build/icons/GoAlert-9A6700.png">    </p:cNvPr>
+          <p:cNvPr id="26" name="Image 3" descr="">
+            <a:extLst>
+              <a:ext uri="{C183D7F6-B498-43B3-948B-1728B52AA6E4}">
+                <adec:decorative xmlns:adec="http://schemas.microsoft.com/office/drawing/2017/decorative" val="1"/>
+              </a:ext>
+            </a:extLst>
+          </p:cNvPr>
           <p:cNvPicPr>
             <a:picLocks noChangeAspect="1"/>
           </p:cNvPicPr>
@@ -16763,7 +16997,13 @@
       </p:sp>
       <p:pic>
         <p:nvPicPr>
-          <p:cNvPr id="29" name="Image 4" descr="/Users/danwahlin/.copilot/session-state/56a7a0da-def8-48d4-b5e8-0ac3878cb8dd/files/slides-build/icons/GoX-CF222E.png">    </p:cNvPr>
+          <p:cNvPr id="29" name="Image 4" descr="">
+            <a:extLst>
+              <a:ext uri="{C183D7F6-B498-43B3-948B-1728B52AA6E4}">
+                <adec:decorative xmlns:adec="http://schemas.microsoft.com/office/drawing/2017/decorative" val="1"/>
+              </a:ext>
+            </a:extLst>
+          </p:cNvPr>
           <p:cNvPicPr>
             <a:picLocks noChangeAspect="1"/>
           </p:cNvPicPr>
@@ -16865,7 +17105,13 @@
       </p:sp>
       <p:pic>
         <p:nvPicPr>
-          <p:cNvPr id="32" name="Image 5" descr="/Users/danwahlin/.copilot/session-state/56a7a0da-def8-48d4-b5e8-0ac3878cb8dd/files/slides-build/icons/GoEye-1A7F37.png">    </p:cNvPr>
+          <p:cNvPr id="32" name="Image 5" descr="">
+            <a:extLst>
+              <a:ext uri="{C183D7F6-B498-43B3-948B-1728B52AA6E4}">
+                <adec:decorative xmlns:adec="http://schemas.microsoft.com/office/drawing/2017/decorative" val="1"/>
+              </a:ext>
+            </a:extLst>
+          </p:cNvPr>
           <p:cNvPicPr>
             <a:picLocks noChangeAspect="1"/>
           </p:cNvPicPr>
